--- a/presentation/Fenwick_Tree_Case_Study.pptx
+++ b/presentation/Fenwick_Tree_Case_Study.pptx
@@ -19,6 +19,8 @@
     <p:sldId id="267" r:id="rId18"/>
     <p:sldId id="268" r:id="rId19"/>
     <p:sldId id="269" r:id="rId20"/>
+    <p:sldId id="270" r:id="rId21"/>
+    <p:sldId id="271" r:id="rId22"/>
   </p:sldIdLst>
   <p:sldSz cx="12191695" cy="6858000" type="screen4x3"/>
   <p:notesSz cx="6858000" cy="9144000"/>
@@ -3117,7 +3119,7 @@
         </p:nvSpPr>
         <p:spPr>
           <a:xfrm>
-            <a:off x="914400" y="1280160"/>
+            <a:off x="914400" y="1097280"/>
             <a:ext cx="10332720" cy="2743200"/>
           </a:xfrm>
           <a:prstGeom prst="rect">
@@ -3139,19 +3141,19 @@
               </a:defRPr>
             </a:pPr>
             <a:r>
-              <a:t>DATA STRUCTURES &amp; ALGORITHMS CASE STUDY</a:t>
-            </a:r>
-          </a:p>
-          <a:p>
-            <a:pPr>
-              <a:defRPr sz="3200" b="1">
-                <a:solidFill>
-                  <a:srgbClr val="F8FAFC"/>
-                </a:solidFill>
-              </a:defRPr>
-            </a:pPr>
-            <a:r>
-              <a:t>Dynamic Traffic Congestion Analytics</a:t>
+              <a:t>DATA STRUCTURES &amp; ALGORITHMS (DSA) CASE STUDY</a:t>
+            </a:r>
+          </a:p>
+          <a:p>
+            <a:pPr>
+              <a:defRPr sz="3000" b="1">
+                <a:solidFill>
+                  <a:srgbClr val="F8FAFC"/>
+                </a:solidFill>
+              </a:defRPr>
+            </a:pPr>
+            <a:r>
+              <a:t>FlowGrid — Dynamic Traffic Congestion Analytics</a:t>
             </a:r>
             <a:br/>
             <a:r>
@@ -3160,14 +3162,14 @@
           </a:p>
           <a:p>
             <a:pPr>
-              <a:defRPr sz="1600">
+              <a:defRPr sz="1500">
                 <a:solidFill>
                   <a:srgbClr val="94A3B8"/>
                 </a:solidFill>
               </a:defRPr>
             </a:pPr>
             <a:r>
-              <a:t>High-Performance Sub-Corridor Range Aggregation &amp; Point Inflow Tracking</a:t>
+              <a:t>Sub-Corridor Range Aggregation &amp; Point Inflow Tracking via 1-Based BIT</a:t>
             </a:r>
           </a:p>
         </p:txBody>
@@ -3181,7 +3183,7 @@
         <p:spPr>
           <a:xfrm>
             <a:off x="914400" y="4114800"/>
-            <a:ext cx="10332720" cy="2011680"/>
+            <a:ext cx="10332720" cy="2103120"/>
           </a:xfrm>
           <a:prstGeom prst="roundRect">
             <a:avLst/>
@@ -3240,7 +3242,7 @@
           <a:lstStyle/>
           <a:p>
             <a:pPr>
-              <a:defRPr sz="1400" b="1">
+              <a:defRPr sz="1300" b="1">
                 <a:solidFill>
                   <a:srgbClr val="3B82F6"/>
                 </a:solidFill>
@@ -3260,8 +3262,8 @@
         </p:nvSpPr>
         <p:spPr>
           <a:xfrm>
-            <a:off x="1097280" y="4663440"/>
-            <a:ext cx="9966960" cy="1280160"/>
+            <a:off x="1097280" y="4572000"/>
+            <a:ext cx="9966960" cy="1463040"/>
           </a:xfrm>
           <a:prstGeom prst="rect">
             <a:avLst/>
@@ -3275,50 +3277,77 @@
           <a:lstStyle/>
           <a:p>
             <a:pPr>
-              <a:defRPr sz="1300">
-                <a:solidFill>
-                  <a:srgbClr val="F8FAFC"/>
-                </a:solidFill>
-              </a:defRPr>
-            </a:pPr>
-            <a:r>
-              <a:t>Student Team: [Student Name(s) / Team Member Placeholders]</a:t>
-            </a:r>
-          </a:p>
-          <a:p>
-            <a:pPr>
-              <a:defRPr sz="1200">
+              <a:spcAft>
+                <a:spcPts val="300"/>
+              </a:spcAft>
+              <a:defRPr sz="1100">
                 <a:solidFill>
                   <a:srgbClr val="94A3B8"/>
                 </a:solidFill>
               </a:defRPr>
             </a:pPr>
             <a:r>
-              <a:t>Academic Profile: 2nd Year B.Tech Computer Science &amp; Engineering | Semester Evaluation</a:t>
-            </a:r>
-          </a:p>
-          <a:p>
-            <a:pPr>
-              <a:defRPr sz="1200">
+              <a:t>Student Team: 2nd Year CSE Case Study Team (4-Member Division)</a:t>
+            </a:r>
+          </a:p>
+          <a:p>
+            <a:pPr>
+              <a:spcAft>
+                <a:spcPts val="300"/>
+              </a:spcAft>
+              <a:defRPr sz="1100">
                 <a:solidFill>
                   <a:srgbClr val="94A3B8"/>
                 </a:solidFill>
               </a:defRPr>
             </a:pPr>
             <a:r>
-              <a:t>Evaluation Faculty: [Faculty / Evaluator Name Placeholder] | Dept. of CSE</a:t>
-            </a:r>
-          </a:p>
-          <a:p>
-            <a:pPr>
-              <a:defRPr sz="1200" b="1">
+              <a:t>Course &amp; Degree: Data Structures &amp; Algorithms | 2nd Year B.Tech Computer Science &amp; Engineering</a:t>
+            </a:r>
+          </a:p>
+          <a:p>
+            <a:pPr>
+              <a:spcAft>
+                <a:spcPts val="300"/>
+              </a:spcAft>
+              <a:defRPr sz="1100">
                 <a:solidFill>
                   <a:srgbClr val="10B981"/>
                 </a:solidFill>
               </a:defRPr>
             </a:pPr>
             <a:r>
-              <a:t>System Implementation: FlowGrid Traffic Intelligence (C++ Core Engine &amp; Modern Web Dashboard)</a:t>
+              <a:t>Core Data Structure: 1-Based Fenwick Tree (Binary Indexed Tree / BIT) in C++17</a:t>
+            </a:r>
+          </a:p>
+          <a:p>
+            <a:pPr>
+              <a:spcAft>
+                <a:spcPts val="300"/>
+              </a:spcAft>
+              <a:defRPr sz="1100">
+                <a:solidFill>
+                  <a:srgbClr val="F8FAFC"/>
+                </a:solidFill>
+              </a:defRPr>
+            </a:pPr>
+            <a:r>
+              <a:t>Architecture Stack: C++17 Engine (traffic_analytics.exe) + Python 3 Bridge (server.py) + Web Dashboard</a:t>
+            </a:r>
+          </a:p>
+          <a:p>
+            <a:pPr>
+              <a:spcAft>
+                <a:spcPts val="300"/>
+              </a:spcAft>
+              <a:defRPr sz="1100">
+                <a:solidFill>
+                  <a:srgbClr val="94A3B8"/>
+                </a:solidFill>
+              </a:defRPr>
+            </a:pPr>
+            <a:r>
+              <a:t>Evaluation Mode: Automated Non-Menu Benchmark Verification &amp; Interactive Web Integration</a:t>
             </a:r>
           </a:p>
         </p:txBody>
@@ -3379,7 +3408,7 @@
               </a:defRPr>
             </a:pPr>
             <a:r>
-              <a:t>DSA CASE STUDY EVALUATION</a:t>
+              <a:t>NUMERICAL VERIFICATION</a:t>
             </a:r>
           </a:p>
         </p:txBody>
@@ -3414,7 +3443,7 @@
               </a:defRPr>
             </a:pPr>
             <a:r>
-              <a:t>FlowGrid — Modern Traffic Intelligence Dashboard</a:t>
+              <a:t>Step-by-Step Case Study Walkthrough: Baseline vs Surge</a:t>
             </a:r>
           </a:p>
         </p:txBody>
@@ -3428,7 +3457,7 @@
         <p:spPr>
           <a:xfrm>
             <a:off x="731520" y="1463040"/>
-            <a:ext cx="10698480" cy="4754880"/>
+            <a:ext cx="5120640" cy="4754880"/>
           </a:xfrm>
           <a:prstGeom prst="roundRect">
             <a:avLst/>
@@ -3473,7 +3502,7 @@
         <p:spPr>
           <a:xfrm>
             <a:off x="914400" y="1600200"/>
-            <a:ext cx="10332720" cy="411480"/>
+            <a:ext cx="4754880" cy="411480"/>
           </a:xfrm>
           <a:prstGeom prst="rect">
             <a:avLst/>
@@ -3487,14 +3516,14 @@
           <a:lstStyle/>
           <a:p>
             <a:pPr>
-              <a:defRPr sz="1400" b="1">
+              <a:defRPr sz="1300" b="1">
                 <a:solidFill>
                   <a:srgbClr val="3B82F6"/>
                 </a:solidFill>
               </a:defRPr>
             </a:pPr>
             <a:r>
-              <a:t>Interactive Client-Side Web Application Architecture</a:t>
+              <a:t>Phase 1: Baseline State &amp; Initial Query</a:t>
             </a:r>
           </a:p>
         </p:txBody>
@@ -3507,8 +3536,8 @@
         </p:nvSpPr>
         <p:spPr>
           <a:xfrm>
-            <a:off x="1005840" y="2103120"/>
-            <a:ext cx="10149840" cy="3840480"/>
+            <a:off x="914400" y="2011680"/>
+            <a:ext cx="4754880" cy="4023360"/>
           </a:xfrm>
           <a:prstGeom prst="rect">
             <a:avLst/>
@@ -3524,91 +3553,483 @@
           <a:p>
             <a:pPr>
               <a:spcAft>
-                <a:spcPts val="800"/>
-              </a:spcAft>
-              <a:defRPr sz="1300">
-                <a:solidFill>
-                  <a:srgbClr val="F8FAFC"/>
-                </a:solidFill>
-              </a:defRPr>
-            </a:pPr>
-            <a:r>
-              <a:t>• Zero Backend Dependency: Engineered with standard HTML5, modern CSS3, and vanilla ES6 JavaScript. Runs instantly in any standard web browser.</a:t>
-            </a:r>
-          </a:p>
-          <a:p>
-            <a:pPr>
-              <a:spcAft>
-                <a:spcPts val="800"/>
-              </a:spcAft>
-              <a:defRPr sz="1300">
-                <a:solidFill>
-                  <a:srgbClr val="F8FAFC"/>
-                </a:solidFill>
-              </a:defRPr>
-            </a:pPr>
-            <a:r>
-              <a:t>• Dynamic KPI Summary Cards: Live metrics displaying total network volume (prefixSum(8)), active corridor density, and dynamic threshold state.</a:t>
-            </a:r>
-          </a:p>
-          <a:p>
-            <a:pPr>
-              <a:spcAft>
-                <a:spcPts val="800"/>
-              </a:spcAft>
-              <a:defRPr sz="1300">
-                <a:solidFill>
-                  <a:srgbClr val="F8FAFC"/>
-                </a:solidFill>
-              </a:defRPr>
-            </a:pPr>
-            <a:r>
-              <a:t>• Interactive Segment Cards: Visual road cards for Segments 1 to 8 showing current traffic volume, corridor naming, and vehicle density progress meters.</a:t>
-            </a:r>
-          </a:p>
-          <a:p>
-            <a:pPr>
-              <a:spcAft>
-                <a:spcPts val="800"/>
-              </a:spcAft>
-              <a:defRPr sz="1300">
-                <a:solidFill>
-                  <a:srgbClr val="F8FAFC"/>
-                </a:solidFill>
-              </a:defRPr>
-            </a:pPr>
-            <a:r>
-              <a:t>• Real-Time Fenwick Tree Inspector: Comprehensive table detailing 1-based index, binary representation, lowbit(i), covered intervals, formulas, and stored values.</a:t>
-            </a:r>
-          </a:p>
-          <a:p>
-            <a:pPr>
-              <a:spcAft>
-                <a:spcPts val="800"/>
-              </a:spcAft>
-              <a:defRPr sz="1300">
-                <a:solidFill>
-                  <a:srgbClr val="F8FAFC"/>
-                </a:solidFill>
-              </a:defRPr>
-            </a:pPr>
-            <a:r>
-              <a:t>• Traversed Node Highlighting: Visual highlights indicating exactly which BIT tree ancestors are updated during point updates or prefix queries.</a:t>
-            </a:r>
-          </a:p>
-          <a:p>
-            <a:pPr>
-              <a:spcAft>
-                <a:spcPts val="800"/>
-              </a:spcAft>
-              <a:defRPr sz="1300">
-                <a:solidFill>
-                  <a:srgbClr val="F8FAFC"/>
-                </a:solidFill>
-              </a:defRPr>
-            </a:pPr>
-            <a:r>
-              <a:t>• Audited Execution Log: Chronological audit trail recording all initialization, update, range query, and threshold classification operations.</a:t>
+                <a:spcPts val="300"/>
+              </a:spcAft>
+              <a:defRPr sz="1100">
+                <a:solidFill>
+                  <a:srgbClr val="F8FAFC"/>
+                </a:solidFill>
+              </a:defRPr>
+            </a:pPr>
+            <a:r>
+              <a:t>Initial Traffic Counts [1..8]:</a:t>
+            </a:r>
+          </a:p>
+          <a:p>
+            <a:pPr>
+              <a:spcAft>
+                <a:spcPts val="300"/>
+              </a:spcAft>
+              <a:defRPr sz="1100">
+                <a:solidFill>
+                  <a:srgbClr val="F8FAFC"/>
+                </a:solidFill>
+              </a:defRPr>
+            </a:pPr>
+            <a:r>
+              <a:t>  [12, 7, 15, 9, 20, 5, 11, 8]</a:t>
+            </a:r>
+          </a:p>
+          <a:p>
+            <a:pPr>
+              <a:spcAft>
+                <a:spcPts val="300"/>
+              </a:spcAft>
+              <a:defRPr sz="1100">
+                <a:solidFill>
+                  <a:srgbClr val="F8FAFC"/>
+                </a:solidFill>
+              </a:defRPr>
+            </a:pPr>
+            <a:r>
+              <a:t>Constructed Initial BIT Array [1..8]:</a:t>
+            </a:r>
+          </a:p>
+          <a:p>
+            <a:pPr>
+              <a:spcAft>
+                <a:spcPts val="300"/>
+              </a:spcAft>
+              <a:defRPr sz="1100">
+                <a:solidFill>
+                  <a:srgbClr val="F8FAFC"/>
+                </a:solidFill>
+              </a:defRPr>
+            </a:pPr>
+            <a:r>
+              <a:t>  [12, 19, 15, 43, 20, 25, 11, 87]</a:t>
+            </a:r>
+          </a:p>
+          <a:p>
+            <a:pPr>
+              <a:spcAft>
+                <a:spcPts val="300"/>
+              </a:spcAft>
+              <a:defRPr sz="1100">
+                <a:solidFill>
+                  <a:srgbClr val="10B981"/>
+                </a:solidFill>
+              </a:defRPr>
+            </a:pPr>
+            <a:r>
+              <a:t>Total Corridor Traffic: prefixSum(8) = 87 veh [PASS]</a:t>
+            </a:r>
+          </a:p>
+          <a:p>
+            <a:pPr>
+              <a:spcAft>
+                <a:spcPts val="300"/>
+              </a:spcAft>
+              <a:defRPr sz="1100">
+                <a:solidFill>
+                  <a:srgbClr val="F8FAFC"/>
+                </a:solidFill>
+              </a:defRPr>
+            </a:pPr>
+          </a:p>
+          <a:p>
+            <a:pPr>
+              <a:spcAft>
+                <a:spcPts val="300"/>
+              </a:spcAft>
+              <a:defRPr sz="1100">
+                <a:solidFill>
+                  <a:srgbClr val="F8FAFC"/>
+                </a:solidFill>
+              </a:defRPr>
+            </a:pPr>
+            <a:r>
+              <a:t>Query Corridor [3..6] (Threshold = 55):</a:t>
+            </a:r>
+          </a:p>
+          <a:p>
+            <a:pPr>
+              <a:spcAft>
+                <a:spcPts val="300"/>
+              </a:spcAft>
+              <a:defRPr sz="1100">
+                <a:solidFill>
+                  <a:srgbClr val="F8FAFC"/>
+                </a:solidFill>
+              </a:defRPr>
+            </a:pPr>
+            <a:r>
+              <a:t>  prefixSum(6) = bit[6] + bit[4] = 25 + 43 = 68</a:t>
+            </a:r>
+          </a:p>
+          <a:p>
+            <a:pPr>
+              <a:spcAft>
+                <a:spcPts val="300"/>
+              </a:spcAft>
+              <a:defRPr sz="1100">
+                <a:solidFill>
+                  <a:srgbClr val="F8FAFC"/>
+                </a:solidFill>
+              </a:defRPr>
+            </a:pPr>
+            <a:r>
+              <a:t>  prefixSum(2) = bit[2] = 19</a:t>
+            </a:r>
+          </a:p>
+          <a:p>
+            <a:pPr>
+              <a:spcAft>
+                <a:spcPts val="300"/>
+              </a:spcAft>
+              <a:defRPr sz="1100">
+                <a:solidFill>
+                  <a:srgbClr val="F8FAFC"/>
+                </a:solidFill>
+              </a:defRPr>
+            </a:pPr>
+            <a:r>
+              <a:t>  rangeSum(3, 6) = 68 - 19 = 49 vehicles.</a:t>
+            </a:r>
+          </a:p>
+          <a:p>
+            <a:pPr>
+              <a:spcAft>
+                <a:spcPts val="300"/>
+              </a:spcAft>
+              <a:defRPr sz="1100">
+                <a:solidFill>
+                  <a:srgbClr val="F8FAFC"/>
+                </a:solidFill>
+              </a:defRPr>
+            </a:pPr>
+          </a:p>
+          <a:p>
+            <a:pPr>
+              <a:spcAft>
+                <a:spcPts val="300"/>
+              </a:spcAft>
+              <a:defRPr sz="1100">
+                <a:solidFill>
+                  <a:srgbClr val="10B981"/>
+                </a:solidFill>
+              </a:defRPr>
+            </a:pPr>
+            <a:r>
+              <a:t>Verdict: 49 &lt; 55 --&gt; NORMAL [VERIFIED]</a:t>
+            </a:r>
+          </a:p>
+        </p:txBody>
+      </p:sp>
+      <p:sp>
+        <p:nvSpPr>
+          <p:cNvPr id="7" name="Rounded Rectangle 6"/>
+          <p:cNvSpPr/>
+          <p:nvPr/>
+        </p:nvSpPr>
+        <p:spPr>
+          <a:xfrm>
+            <a:off x="6217920" y="1463040"/>
+            <a:ext cx="5212080" cy="4754880"/>
+          </a:xfrm>
+          <a:prstGeom prst="roundRect">
+            <a:avLst/>
+          </a:prstGeom>
+          <a:solidFill>
+            <a:srgbClr val="1E293B"/>
+          </a:solidFill>
+          <a:ln w="19050">
+            <a:solidFill>
+              <a:srgbClr val="334155"/>
+            </a:solidFill>
+          </a:ln>
+        </p:spPr>
+        <p:style>
+          <a:lnRef idx="1">
+            <a:schemeClr val="accent1"/>
+          </a:lnRef>
+          <a:fillRef idx="3">
+            <a:schemeClr val="accent1"/>
+          </a:fillRef>
+          <a:effectRef idx="2">
+            <a:schemeClr val="accent1"/>
+          </a:effectRef>
+          <a:fontRef idx="minor">
+            <a:schemeClr val="lt1"/>
+          </a:fontRef>
+        </p:style>
+        <p:txBody>
+          <a:bodyPr rtlCol="0" anchor="ctr"/>
+          <a:lstStyle/>
+          <a:p>
+            <a:pPr algn="ctr"/>
+          </a:p>
+        </p:txBody>
+      </p:sp>
+      <p:sp>
+        <p:nvSpPr>
+          <p:cNvPr id="8" name="TextBox 7"/>
+          <p:cNvSpPr txBox="1"/>
+          <p:nvPr/>
+        </p:nvSpPr>
+        <p:spPr>
+          <a:xfrm>
+            <a:off x="6400800" y="1600200"/>
+            <a:ext cx="4846320" cy="411480"/>
+          </a:xfrm>
+          <a:prstGeom prst="rect">
+            <a:avLst/>
+          </a:prstGeom>
+          <a:noFill/>
+        </p:spPr>
+        <p:txBody>
+          <a:bodyPr wrap="square">
+            <a:spAutoFit/>
+          </a:bodyPr>
+          <a:lstStyle/>
+          <a:p>
+            <a:pPr>
+              <a:defRPr sz="1300" b="1">
+                <a:solidFill>
+                  <a:srgbClr val="3B82F6"/>
+                </a:solidFill>
+              </a:defRPr>
+            </a:pPr>
+            <a:r>
+              <a:t>Phase 2: Dynamic Surge &amp; Re-Query</a:t>
+            </a:r>
+          </a:p>
+        </p:txBody>
+      </p:sp>
+      <p:sp>
+        <p:nvSpPr>
+          <p:cNvPr id="9" name="TextBox 8"/>
+          <p:cNvSpPr txBox="1"/>
+          <p:nvPr/>
+        </p:nvSpPr>
+        <p:spPr>
+          <a:xfrm>
+            <a:off x="6400800" y="2011680"/>
+            <a:ext cx="4846320" cy="4023360"/>
+          </a:xfrm>
+          <a:prstGeom prst="rect">
+            <a:avLst/>
+          </a:prstGeom>
+          <a:noFill/>
+        </p:spPr>
+        <p:txBody>
+          <a:bodyPr wrap="square">
+            <a:spAutoFit/>
+          </a:bodyPr>
+          <a:lstStyle/>
+          <a:p/>
+          <a:p>
+            <a:pPr>
+              <a:spcAft>
+                <a:spcPts val="300"/>
+              </a:spcAft>
+              <a:defRPr sz="1100">
+                <a:solidFill>
+                  <a:srgbClr val="F8FAFC"/>
+                </a:solidFill>
+              </a:defRPr>
+            </a:pPr>
+            <a:r>
+              <a:t>Point Update: Segment 5 updated from 20 to 34</a:t>
+            </a:r>
+          </a:p>
+          <a:p>
+            <a:pPr>
+              <a:spcAft>
+                <a:spcPts val="300"/>
+              </a:spcAft>
+              <a:defRPr sz="1100">
+                <a:solidFill>
+                  <a:srgbClr val="F8FAFC"/>
+                </a:solidFill>
+              </a:defRPr>
+            </a:pPr>
+            <a:r>
+              <a:t>Delta: 34 - 20 = +14 vehicles.</a:t>
+            </a:r>
+          </a:p>
+          <a:p>
+            <a:pPr>
+              <a:spcAft>
+                <a:spcPts val="300"/>
+              </a:spcAft>
+              <a:defRPr sz="1100">
+                <a:solidFill>
+                  <a:srgbClr val="F8FAFC"/>
+                </a:solidFill>
+              </a:defRPr>
+            </a:pPr>
+            <a:r>
+              <a:t>Ancestor Traversal Path: bit[5], bit[6], bit[8]</a:t>
+            </a:r>
+          </a:p>
+          <a:p>
+            <a:pPr>
+              <a:spcAft>
+                <a:spcPts val="300"/>
+              </a:spcAft>
+              <a:defRPr sz="1100">
+                <a:solidFill>
+                  <a:srgbClr val="F8FAFC"/>
+                </a:solidFill>
+              </a:defRPr>
+            </a:pPr>
+            <a:r>
+              <a:t>Updated Traffic Counts [1..8]:</a:t>
+            </a:r>
+          </a:p>
+          <a:p>
+            <a:pPr>
+              <a:spcAft>
+                <a:spcPts val="300"/>
+              </a:spcAft>
+              <a:defRPr sz="1100">
+                <a:solidFill>
+                  <a:srgbClr val="F8FAFC"/>
+                </a:solidFill>
+              </a:defRPr>
+            </a:pPr>
+            <a:r>
+              <a:t>  [12, 7, 15, 9, 34, 5, 11, 8]</a:t>
+            </a:r>
+          </a:p>
+          <a:p>
+            <a:pPr>
+              <a:spcAft>
+                <a:spcPts val="300"/>
+              </a:spcAft>
+              <a:defRPr sz="1100">
+                <a:solidFill>
+                  <a:srgbClr val="F8FAFC"/>
+                </a:solidFill>
+              </a:defRPr>
+            </a:pPr>
+            <a:r>
+              <a:t>Updated BIT Array [1..8]:</a:t>
+            </a:r>
+          </a:p>
+          <a:p>
+            <a:pPr>
+              <a:spcAft>
+                <a:spcPts val="300"/>
+              </a:spcAft>
+              <a:defRPr sz="1100">
+                <a:solidFill>
+                  <a:srgbClr val="10B981"/>
+                </a:solidFill>
+              </a:defRPr>
+            </a:pPr>
+            <a:r>
+              <a:t>  [12, 19, 15, 43, 34, 39, 11, 101] [PASS]</a:t>
+            </a:r>
+          </a:p>
+          <a:p>
+            <a:pPr>
+              <a:spcAft>
+                <a:spcPts val="300"/>
+              </a:spcAft>
+              <a:defRPr sz="1100">
+                <a:solidFill>
+                  <a:srgbClr val="F8FAFC"/>
+                </a:solidFill>
+              </a:defRPr>
+            </a:pPr>
+          </a:p>
+          <a:p>
+            <a:pPr>
+              <a:spcAft>
+                <a:spcPts val="300"/>
+              </a:spcAft>
+              <a:defRPr sz="1100">
+                <a:solidFill>
+                  <a:srgbClr val="F8FAFC"/>
+                </a:solidFill>
+              </a:defRPr>
+            </a:pPr>
+            <a:r>
+              <a:t>Re-Query Corridor [3..6] (Threshold = 55):</a:t>
+            </a:r>
+          </a:p>
+          <a:p>
+            <a:pPr>
+              <a:spcAft>
+                <a:spcPts val="300"/>
+              </a:spcAft>
+              <a:defRPr sz="1100">
+                <a:solidFill>
+                  <a:srgbClr val="F8FAFC"/>
+                </a:solidFill>
+              </a:defRPr>
+            </a:pPr>
+            <a:r>
+              <a:t>  prefixSum(6) = bit[6] + bit[4] = 39 + 43 = 82</a:t>
+            </a:r>
+          </a:p>
+          <a:p>
+            <a:pPr>
+              <a:spcAft>
+                <a:spcPts val="300"/>
+              </a:spcAft>
+              <a:defRPr sz="1100">
+                <a:solidFill>
+                  <a:srgbClr val="F8FAFC"/>
+                </a:solidFill>
+              </a:defRPr>
+            </a:pPr>
+            <a:r>
+              <a:t>  prefixSum(2) = bit[2] = 19</a:t>
+            </a:r>
+          </a:p>
+          <a:p>
+            <a:pPr>
+              <a:spcAft>
+                <a:spcPts val="300"/>
+              </a:spcAft>
+              <a:defRPr sz="1100">
+                <a:solidFill>
+                  <a:srgbClr val="F8FAFC"/>
+                </a:solidFill>
+              </a:defRPr>
+            </a:pPr>
+            <a:r>
+              <a:t>  rangeSum(3, 6) = 82 - 19 = 63 vehicles.</a:t>
+            </a:r>
+          </a:p>
+          <a:p>
+            <a:pPr>
+              <a:spcAft>
+                <a:spcPts val="300"/>
+              </a:spcAft>
+              <a:defRPr sz="1100">
+                <a:solidFill>
+                  <a:srgbClr val="F8FAFC"/>
+                </a:solidFill>
+              </a:defRPr>
+            </a:pPr>
+          </a:p>
+          <a:p>
+            <a:pPr>
+              <a:spcAft>
+                <a:spcPts val="300"/>
+              </a:spcAft>
+              <a:defRPr sz="1100">
+                <a:solidFill>
+                  <a:srgbClr val="EF4444"/>
+                </a:solidFill>
+              </a:defRPr>
+            </a:pPr>
+            <a:r>
+              <a:t>Verdict: 63 &gt;= 55 --&gt; POTENTIALLY CONGESTED [VERIFIED]</a:t>
             </a:r>
           </a:p>
         </p:txBody>
@@ -3669,7 +4090,7 @@
               </a:defRPr>
             </a:pPr>
             <a:r>
-              <a:t>DSA CASE STUDY EVALUATION</a:t>
+              <a:t>FRONTEND DASHBOARD</a:t>
             </a:r>
           </a:p>
         </p:txBody>
@@ -3704,7 +4125,7 @@
               </a:defRPr>
             </a:pPr>
             <a:r>
-              <a:t>Algorithmic Complexity &amp; Theoretical Proofs</a:t>
+              <a:t>FlowGrid Web Dashboard: Interface &amp; Features</a:t>
             </a:r>
           </a:p>
         </p:txBody>
@@ -3777,14 +4198,14 @@
           <a:lstStyle/>
           <a:p>
             <a:pPr>
-              <a:defRPr sz="1400" b="1">
+              <a:defRPr sz="1300" b="1">
                 <a:solidFill>
                   <a:srgbClr val="3B82F6"/>
                 </a:solidFill>
               </a:defRPr>
             </a:pPr>
             <a:r>
-              <a:t>Time &amp; Space Bounds</a:t>
+              <a:t>Visual Interactive Components</a:t>
             </a:r>
           </a:p>
         </p:txBody>
@@ -3814,166 +4235,61 @@
           <a:p>
             <a:pPr>
               <a:spcAft>
-                <a:spcPts val="600"/>
-              </a:spcAft>
-              <a:defRPr sz="1200">
-                <a:solidFill>
-                  <a:srgbClr val="F8FAFC"/>
-                </a:solidFill>
-              </a:defRPr>
-            </a:pPr>
-            <a:r>
-              <a:t>• Point Update (update / setCount): O(log n)</a:t>
-            </a:r>
-          </a:p>
-          <a:p>
-            <a:pPr>
-              <a:spcAft>
-                <a:spcPts val="600"/>
-              </a:spcAft>
-              <a:defRPr sz="1200">
-                <a:solidFill>
-                  <a:srgbClr val="F8FAFC"/>
-                </a:solidFill>
-              </a:defRPr>
-            </a:pPr>
-            <a:r>
-              <a:t>•   - Maximum number of set bits in integer n is floor(log2(n)) + 1.</a:t>
-            </a:r>
-          </a:p>
-          <a:p>
-            <a:pPr>
-              <a:spcAft>
-                <a:spcPts val="600"/>
-              </a:spcAft>
-              <a:defRPr sz="1200">
-                <a:solidFill>
-                  <a:srgbClr val="F8FAFC"/>
-                </a:solidFill>
-              </a:defRPr>
-            </a:pPr>
-            <a:r>
-              <a:t>•   - Each step adds lowbit(i), strictly moving to higher powers of 2.</a:t>
-            </a:r>
-          </a:p>
-          <a:p>
-            <a:pPr>
-              <a:spcAft>
-                <a:spcPts val="600"/>
-              </a:spcAft>
-              <a:defRPr sz="1200">
-                <a:solidFill>
-                  <a:srgbClr val="F8FAFC"/>
-                </a:solidFill>
-              </a:defRPr>
-            </a:pPr>
-            <a:r>
-              <a:t>• Prefix Sum Query (prefixSum): O(log n)</a:t>
-            </a:r>
-          </a:p>
-          <a:p>
-            <a:pPr>
-              <a:spcAft>
-                <a:spcPts val="600"/>
-              </a:spcAft>
-              <a:defRPr sz="1200">
-                <a:solidFill>
-                  <a:srgbClr val="F8FAFC"/>
-                </a:solidFill>
-              </a:defRPr>
-            </a:pPr>
-            <a:r>
-              <a:t>•   - Each step strips the lowest set bit from index i via i -= lowbit(i).</a:t>
-            </a:r>
-          </a:p>
-          <a:p>
-            <a:pPr>
-              <a:spcAft>
-                <a:spcPts val="600"/>
-              </a:spcAft>
-              <a:defRPr sz="1200">
-                <a:solidFill>
-                  <a:srgbClr val="F8FAFC"/>
-                </a:solidFill>
-              </a:defRPr>
-            </a:pPr>
-            <a:r>
-              <a:t>•   - Maximum loop iterations &lt;= log2(n).</a:t>
-            </a:r>
-          </a:p>
-          <a:p>
-            <a:pPr>
-              <a:spcAft>
-                <a:spcPts val="600"/>
-              </a:spcAft>
-              <a:defRPr sz="1200">
-                <a:solidFill>
-                  <a:srgbClr val="F8FAFC"/>
-                </a:solidFill>
-              </a:defRPr>
-            </a:pPr>
-            <a:r>
-              <a:t>• Range Sum Query (rangeSum): O(log n)</a:t>
-            </a:r>
-          </a:p>
-          <a:p>
-            <a:pPr>
-              <a:spcAft>
-                <a:spcPts val="600"/>
-              </a:spcAft>
-              <a:defRPr sz="1200">
-                <a:solidFill>
-                  <a:srgbClr val="F8FAFC"/>
-                </a:solidFill>
-              </a:defRPr>
-            </a:pPr>
-            <a:r>
-              <a:t>•   - Evaluates two prefix sums: 2 * O(log n) = O(log n).</a:t>
-            </a:r>
-          </a:p>
-          <a:p>
-            <a:pPr>
-              <a:spcAft>
-                <a:spcPts val="600"/>
-              </a:spcAft>
-              <a:defRPr sz="1200">
-                <a:solidFill>
-                  <a:srgbClr val="F8FAFC"/>
-                </a:solidFill>
-              </a:defRPr>
-            </a:pPr>
-            <a:r>
-              <a:t>• Fenwick Tree Construction: O(n)</a:t>
-            </a:r>
-          </a:p>
-          <a:p>
-            <a:pPr>
-              <a:spcAft>
-                <a:spcPts val="600"/>
-              </a:spcAft>
-              <a:defRPr sz="1200">
-                <a:solidFill>
-                  <a:srgbClr val="F8FAFC"/>
-                </a:solidFill>
-              </a:defRPr>
-            </a:pPr>
-            <a:r>
-              <a:t>•   - Linear forward-propagation builds tree in O(n) without n * log n overhead.</a:t>
-            </a:r>
-          </a:p>
-          <a:p>
-            <a:pPr>
-              <a:spcAft>
-                <a:spcPts val="600"/>
-              </a:spcAft>
-              <a:defRPr sz="1200">
-                <a:solidFill>
-                  <a:srgbClr val="F8FAFC"/>
-                </a:solidFill>
-              </a:defRPr>
-            </a:pPr>
-            <a:r>
-              <a:t>• Space Complexity: O(n) contiguous array storage.</a:t>
+                <a:spcPts val="800"/>
+              </a:spcAft>
+              <a:defRPr sz="1100">
+                <a:solidFill>
+                  <a:srgbClr val="F8FAFC"/>
+                </a:solidFill>
+              </a:defRPr>
+            </a:pPr>
+            <a:r>
+              <a:t>• 8 Road Segment Cards: Real-world naming (North Arterial, Central Expressway, etc.), vehicle count, and capacity progress bar.</a:t>
+            </a:r>
+          </a:p>
+          <a:p>
+            <a:pPr>
+              <a:spcAft>
+                <a:spcPts val="800"/>
+              </a:spcAft>
+              <a:defRPr sz="1100">
+                <a:solidFill>
+                  <a:srgbClr val="F8FAFC"/>
+                </a:solidFill>
+              </a:defRPr>
+            </a:pPr>
+            <a:r>
+              <a:t>• Interactive Click-to-Select: Clicking any road segment card automatically selects it in the Point Update panel with a turquoise glow.</a:t>
+            </a:r>
+          </a:p>
+          <a:p>
+            <a:pPr>
+              <a:spcAft>
+                <a:spcPts val="800"/>
+              </a:spcAft>
+              <a:defRPr sz="1100">
+                <a:solidFill>
+                  <a:srgbClr val="F8FAFC"/>
+                </a:solidFill>
+              </a:defRPr>
+            </a:pPr>
+            <a:r>
+              <a:t>• Active Range Markers: Segment cards within active corridor [L..R] display distinct [L], [R], and In Range badges.</a:t>
+            </a:r>
+          </a:p>
+          <a:p>
+            <a:pPr>
+              <a:spcAft>
+                <a:spcPts val="800"/>
+              </a:spcAft>
+              <a:defRPr sz="1100">
+                <a:solidFill>
+                  <a:srgbClr val="F8FAFC"/>
+                </a:solidFill>
+              </a:defRPr>
+            </a:pPr>
+            <a:r>
+              <a:t>• Live Backend Status Pill: Top navbar displays real-time connection status ('C++ Fenwick Core: Connected').</a:t>
             </a:r>
           </a:p>
         </p:txBody>
@@ -4046,14 +4362,14 @@
           <a:lstStyle/>
           <a:p>
             <a:pPr>
-              <a:defRPr sz="1400" b="1">
+              <a:defRPr sz="1300" b="1">
                 <a:solidFill>
                   <a:srgbClr val="3B82F6"/>
                 </a:solidFill>
               </a:defRPr>
             </a:pPr>
             <a:r>
-              <a:t>Practical Hardware &amp; Cache Benefits</a:t>
+              <a:t>Structural Inspector &amp; Execution Logs</a:t>
             </a:r>
           </a:p>
         </p:txBody>
@@ -4083,121 +4399,61 @@
           <a:p>
             <a:pPr>
               <a:spcAft>
-                <a:spcPts val="600"/>
-              </a:spcAft>
-              <a:defRPr sz="1200">
-                <a:solidFill>
-                  <a:srgbClr val="94A3B8"/>
-                </a:solidFill>
-              </a:defRPr>
-            </a:pPr>
-            <a:r>
-              <a:t>Contiguous Memory Locality:</a:t>
-            </a:r>
-          </a:p>
-          <a:p>
-            <a:pPr>
-              <a:spcAft>
-                <a:spcPts val="600"/>
-              </a:spcAft>
-              <a:defRPr sz="1200">
-                <a:solidFill>
-                  <a:srgbClr val="F8FAFC"/>
-                </a:solidFill>
-              </a:defRPr>
-            </a:pPr>
-            <a:r>
-              <a:t>  Unlike pointer-based Segment Trees or AVL trees that incur frequent CPU cache misses, Fenwick Trees live inside a single flat array.</a:t>
-            </a:r>
-          </a:p>
-          <a:p>
-            <a:pPr>
-              <a:spcAft>
-                <a:spcPts val="600"/>
-              </a:spcAft>
-              <a:defRPr sz="1200">
-                <a:solidFill>
-                  <a:srgbClr val="94A3B8"/>
-                </a:solidFill>
-              </a:defRPr>
-            </a:pPr>
-            <a:r>
-              <a:t>Bitwise Hardware Acceleration:</a:t>
-            </a:r>
-          </a:p>
-          <a:p>
-            <a:pPr>
-              <a:spcAft>
-                <a:spcPts val="600"/>
-              </a:spcAft>
-              <a:defRPr sz="1200">
-                <a:solidFill>
-                  <a:srgbClr val="F8FAFC"/>
-                </a:solidFill>
-              </a:defRPr>
-            </a:pPr>
-            <a:r>
-              <a:t>  The core index transitions i += (i &amp; -i) compile to single-cycle assembly instructions (BLSI, AND, NEG), making it exceptionally fast on modern CPUs.</a:t>
-            </a:r>
-          </a:p>
-          <a:p>
-            <a:pPr>
-              <a:spcAft>
-                <a:spcPts val="600"/>
-              </a:spcAft>
-              <a:defRPr sz="1200">
-                <a:solidFill>
-                  <a:srgbClr val="94A3B8"/>
-                </a:solidFill>
-              </a:defRPr>
-            </a:pPr>
-            <a:r>
-              <a:t>Minimal Memory Footprint:</a:t>
-            </a:r>
-          </a:p>
-          <a:p>
-            <a:pPr>
-              <a:spcAft>
-                <a:spcPts val="600"/>
-              </a:spcAft>
-              <a:defRPr sz="1200">
-                <a:solidFill>
-                  <a:srgbClr val="F8FAFC"/>
-                </a:solidFill>
-              </a:defRPr>
-            </a:pPr>
-            <a:r>
-              <a:t>  Requires only (n + 1) integer slots compared to 4n for Segment Trees.</a:t>
-            </a:r>
-          </a:p>
-          <a:p>
-            <a:pPr>
-              <a:spcAft>
-                <a:spcPts val="600"/>
-              </a:spcAft>
-              <a:defRPr sz="1200">
-                <a:solidFill>
-                  <a:srgbClr val="94A3B8"/>
-                </a:solidFill>
-              </a:defRPr>
-            </a:pPr>
-            <a:r>
-              <a:t>Ideal for Embedded Traffic Controllers:</a:t>
-            </a:r>
-          </a:p>
-          <a:p>
-            <a:pPr>
-              <a:spcAft>
-                <a:spcPts val="600"/>
-              </a:spcAft>
-              <a:defRPr sz="1200">
-                <a:solidFill>
-                  <a:srgbClr val="F8FAFC"/>
-                </a:solidFill>
-              </a:defRPr>
-            </a:pPr>
-            <a:r>
-              <a:t>  Low memory requirements allow deployment on roadside IoT microcontrollers.</a:t>
+                <a:spcPts val="800"/>
+              </a:spcAft>
+              <a:defRPr sz="1100">
+                <a:solidFill>
+                  <a:srgbClr val="F8FAFC"/>
+                </a:solidFill>
+              </a:defRPr>
+            </a:pPr>
+            <a:r>
+              <a:t>• BIT Array Structural Inspector: Interactive table showing binary notation, lowbit(i), covered interval, mathematical formula, and stored node value.</a:t>
+            </a:r>
+          </a:p>
+          <a:p>
+            <a:pPr>
+              <a:spcAft>
+                <a:spcPts val="800"/>
+              </a:spcAft>
+              <a:defRPr sz="1100">
+                <a:solidFill>
+                  <a:srgbClr val="F8FAFC"/>
+                </a:solidFill>
+              </a:defRPr>
+            </a:pPr>
+            <a:r>
+              <a:t>• Live Ancestor Tracing: Ancestor nodes (bit[5], bit[6], bit[8]) highlight across the table and hierarchy view during updates.</a:t>
+            </a:r>
+          </a:p>
+          <a:p>
+            <a:pPr>
+              <a:spcAft>
+                <a:spcPts val="800"/>
+              </a:spcAft>
+              <a:defRPr sz="1100">
+                <a:solidFill>
+                  <a:srgbClr val="F8FAFC"/>
+                </a:solidFill>
+              </a:defRPr>
+            </a:pPr>
+            <a:r>
+              <a:t>• Tree Hierarchy Cards: Visual breakdown of Global Root (2^3), Branch Roots (2^2), Sub-roots (2^1), and Leaves (2^0).</a:t>
+            </a:r>
+          </a:p>
+          <a:p>
+            <a:pPr>
+              <a:spcAft>
+                <a:spcPts val="800"/>
+              </a:spcAft>
+              <a:defRPr sz="1100">
+                <a:solidFill>
+                  <a:srgbClr val="F8FAFC"/>
+                </a:solidFill>
+              </a:defRPr>
+            </a:pPr>
+            <a:r>
+              <a:t>• Audit Log Feed: Timestamped chronological record of all initialization, update, range query, and classification events.</a:t>
             </a:r>
           </a:p>
         </p:txBody>
@@ -4258,7 +4514,7 @@
               </a:defRPr>
             </a:pPr>
             <a:r>
-              <a:t>DSA CASE STUDY EVALUATION</a:t>
+              <a:t>FULL-STACK ARCHITECTURE</a:t>
             </a:r>
           </a:p>
         </p:txBody>
@@ -4293,7 +4549,7 @@
               </a:defRPr>
             </a:pPr>
             <a:r>
-              <a:t>Empirical Testing &amp; Rigorous Verification</a:t>
+              <a:t>Full-Stack Integration: Python Server &amp; C++ CLI</a:t>
             </a:r>
           </a:p>
         </p:txBody>
@@ -4307,7 +4563,7 @@
         <p:spPr>
           <a:xfrm>
             <a:off x="731520" y="1463040"/>
-            <a:ext cx="10698480" cy="4754880"/>
+            <a:ext cx="5120640" cy="4754880"/>
           </a:xfrm>
           <a:prstGeom prst="roundRect">
             <a:avLst/>
@@ -4352,7 +4608,7 @@
         <p:spPr>
           <a:xfrm>
             <a:off x="914400" y="1600200"/>
-            <a:ext cx="10332720" cy="411480"/>
+            <a:ext cx="4754880" cy="411480"/>
           </a:xfrm>
           <a:prstGeom prst="rect">
             <a:avLst/>
@@ -4366,14 +4622,14 @@
           <a:lstStyle/>
           <a:p>
             <a:pPr>
-              <a:defRPr sz="1400" b="1">
+              <a:defRPr sz="1300" b="1">
                 <a:solidFill>
                   <a:srgbClr val="3B82F6"/>
                 </a:solidFill>
               </a:defRPr>
             </a:pPr>
             <a:r>
-              <a:t>Test Matrix &amp; Actual Execution Results</a:t>
+              <a:t>Python HTTP Server (server.py)</a:t>
             </a:r>
           </a:p>
         </p:txBody>
@@ -4386,8 +4642,8 @@
         </p:nvSpPr>
         <p:spPr>
           <a:xfrm>
-            <a:off x="1005840" y="2103120"/>
-            <a:ext cx="10149840" cy="3840480"/>
+            <a:off x="914400" y="2011680"/>
+            <a:ext cx="4754880" cy="4023360"/>
           </a:xfrm>
           <a:prstGeom prst="rect">
             <a:avLst/>
@@ -4403,106 +4659,255 @@
           <a:p>
             <a:pPr>
               <a:spcAft>
-                <a:spcPts val="400"/>
-              </a:spcAft>
-              <a:defRPr sz="1100">
-                <a:solidFill>
-                  <a:srgbClr val="F8FAFC"/>
-                </a:solidFill>
-              </a:defRPr>
-            </a:pPr>
-            <a:r>
-              <a:t>• Test Case 1 (O(n) Build &amp; Initial BIT): Initial traffic array [12, 7, 15, 9, 20, 5, 11, 8] -&gt; BIT: [12, 19, 15, 43, 20, 25, 11, 87]. Prefix total = 87. -&gt; PASSED [100% Match]</a:t>
-            </a:r>
-          </a:p>
-          <a:p>
-            <a:pPr>
-              <a:spcAft>
-                <a:spcPts val="400"/>
-              </a:spcAft>
-              <a:defRPr sz="1100">
-                <a:solidFill>
-                  <a:srgbClr val="F8FAFC"/>
-                </a:solidFill>
-              </a:defRPr>
-            </a:pPr>
-            <a:r>
-              <a:t>• Test Case 2 (Baseline Range Query [3..6]): Query sum returned exactly 49. Evaluated against threshold 55 -&gt; Classified as NORMAL. -&gt; PASSED [100% Match]</a:t>
-            </a:r>
-          </a:p>
-          <a:p>
-            <a:pPr>
-              <a:spcAft>
-                <a:spcPts val="400"/>
-              </a:spcAft>
-              <a:defRPr sz="1100">
-                <a:solidFill>
-                  <a:srgbClr val="F8FAFC"/>
-                </a:solidFill>
-              </a:defRPr>
-            </a:pPr>
-            <a:r>
-              <a:t>• Test Case 3 (Dynamic Point Update Seg 5): Segment 5 updated from 20 to 34 (delta +14). BIT: [12, 19, 15, 43, 34, 39, 11, 101]. -&gt; PASSED [100% Match]</a:t>
-            </a:r>
-          </a:p>
-          <a:p>
-            <a:pPr>
-              <a:spcAft>
-                <a:spcPts val="400"/>
-              </a:spcAft>
-              <a:defRPr sz="1100">
-                <a:solidFill>
-                  <a:srgbClr val="F8FAFC"/>
-                </a:solidFill>
-              </a:defRPr>
-            </a:pPr>
-            <a:r>
-              <a:t>• Test Case 4 (Congestion Re-Query [3..6]): Corridor volume evaluated to 63 (&gt; 55) -&gt; Classified as POTENTIALLY CONGESTED. -&gt; PASSED [100% Match]</a:t>
-            </a:r>
-          </a:p>
-          <a:p>
-            <a:pPr>
-              <a:spcAft>
-                <a:spcPts val="400"/>
-              </a:spcAft>
-              <a:defRPr sz="1100">
-                <a:solidFill>
-                  <a:srgbClr val="F8FAFC"/>
-                </a:solidFill>
-              </a:defRPr>
-            </a:pPr>
-            <a:r>
-              <a:t>• Test Case 5 (Edge Case: Single Segment): rangeSum(5, 5) evaluated to 34, matching updated point count exactly. -&gt; PASSED [100% Match]</a:t>
-            </a:r>
-          </a:p>
-          <a:p>
-            <a:pPr>
-              <a:spcAft>
-                <a:spcPts val="400"/>
-              </a:spcAft>
-              <a:defRPr sz="1100">
-                <a:solidFill>
-                  <a:srgbClr val="F8FAFC"/>
-                </a:solidFill>
-              </a:defRPr>
-            </a:pPr>
-            <a:r>
-              <a:t>• Test Case 6 (Zero Traffic &amp; Inverted Bounds): setCount(1, 0) updated successfully. Inverted range [6..3] and out-of-bounds indices rejected gracefully. -&gt; PASSED [100% Match]</a:t>
-            </a:r>
-          </a:p>
-          <a:p>
-            <a:pPr>
-              <a:spcAft>
-                <a:spcPts val="400"/>
-              </a:spcAft>
-              <a:defRPr sz="1100">
-                <a:solidFill>
-                  <a:srgbClr val="F8FAFC"/>
-                </a:solidFill>
-              </a:defRPr>
-            </a:pPr>
-            <a:r>
-              <a:t>• Test Case 7 (Threshold Boundary Equality): When volume equals threshold (63 == 63), classified as NORMAL (condition: volume &gt; threshold). -&gt; PASSED [100% Match]</a:t>
+                <a:spcPts val="800"/>
+              </a:spcAft>
+              <a:defRPr sz="1100">
+                <a:solidFill>
+                  <a:srgbClr val="F8FAFC"/>
+                </a:solidFill>
+              </a:defRPr>
+            </a:pPr>
+            <a:r>
+              <a:t>• Standard Library Architecture: Zero external pip dependencies; uses http.server and subprocess for lightweight local deployment.</a:t>
+            </a:r>
+          </a:p>
+          <a:p>
+            <a:pPr>
+              <a:spcAft>
+                <a:spcPts val="800"/>
+              </a:spcAft>
+              <a:defRPr sz="1100">
+                <a:solidFill>
+                  <a:srgbClr val="F8FAFC"/>
+                </a:solidFill>
+              </a:defRPr>
+            </a:pPr>
+            <a:r>
+              <a:t>• Static Asset Delivery: Serves app/index.html, style.css, and script.js seamlessly on port 8000.</a:t>
+            </a:r>
+          </a:p>
+          <a:p>
+            <a:pPr>
+              <a:spcAft>
+                <a:spcPts val="800"/>
+              </a:spcAft>
+              <a:defRPr sz="1100">
+                <a:solidFill>
+                  <a:srgbClr val="F8FAFC"/>
+                </a:solidFill>
+              </a:defRPr>
+            </a:pPr>
+            <a:r>
+              <a:t>• State Management: Tracks current 8-segment traffic vector [12, 7, 15, 9, 20, 5, 11, 8] across HTTP requests.</a:t>
+            </a:r>
+          </a:p>
+          <a:p>
+            <a:pPr>
+              <a:spcAft>
+                <a:spcPts val="800"/>
+              </a:spcAft>
+              <a:defRPr sz="1100">
+                <a:solidFill>
+                  <a:srgbClr val="F8FAFC"/>
+                </a:solidFill>
+              </a:defRPr>
+            </a:pPr>
+            <a:r>
+              <a:t>• Robust Input Validation: Validates corridor range (1 &lt;= L &lt;= R &lt;= 8) and non-negative counts before spawning subprocess.</a:t>
+            </a:r>
+          </a:p>
+        </p:txBody>
+      </p:sp>
+      <p:sp>
+        <p:nvSpPr>
+          <p:cNvPr id="7" name="Rounded Rectangle 6"/>
+          <p:cNvSpPr/>
+          <p:nvPr/>
+        </p:nvSpPr>
+        <p:spPr>
+          <a:xfrm>
+            <a:off x="6217920" y="1463040"/>
+            <a:ext cx="5212080" cy="4754880"/>
+          </a:xfrm>
+          <a:prstGeom prst="roundRect">
+            <a:avLst/>
+          </a:prstGeom>
+          <a:solidFill>
+            <a:srgbClr val="1E293B"/>
+          </a:solidFill>
+          <a:ln w="19050">
+            <a:solidFill>
+              <a:srgbClr val="334155"/>
+            </a:solidFill>
+          </a:ln>
+        </p:spPr>
+        <p:style>
+          <a:lnRef idx="1">
+            <a:schemeClr val="accent1"/>
+          </a:lnRef>
+          <a:fillRef idx="3">
+            <a:schemeClr val="accent1"/>
+          </a:fillRef>
+          <a:effectRef idx="2">
+            <a:schemeClr val="accent1"/>
+          </a:effectRef>
+          <a:fontRef idx="minor">
+            <a:schemeClr val="lt1"/>
+          </a:fontRef>
+        </p:style>
+        <p:txBody>
+          <a:bodyPr rtlCol="0" anchor="ctr"/>
+          <a:lstStyle/>
+          <a:p>
+            <a:pPr algn="ctr"/>
+          </a:p>
+        </p:txBody>
+      </p:sp>
+      <p:sp>
+        <p:nvSpPr>
+          <p:cNvPr id="8" name="TextBox 7"/>
+          <p:cNvSpPr txBox="1"/>
+          <p:nvPr/>
+        </p:nvSpPr>
+        <p:spPr>
+          <a:xfrm>
+            <a:off x="6400800" y="1600200"/>
+            <a:ext cx="4846320" cy="411480"/>
+          </a:xfrm>
+          <a:prstGeom prst="rect">
+            <a:avLst/>
+          </a:prstGeom>
+          <a:noFill/>
+        </p:spPr>
+        <p:txBody>
+          <a:bodyPr wrap="square">
+            <a:spAutoFit/>
+          </a:bodyPr>
+          <a:lstStyle/>
+          <a:p>
+            <a:pPr>
+              <a:defRPr sz="1300" b="1">
+                <a:solidFill>
+                  <a:srgbClr val="3B82F6"/>
+                </a:solidFill>
+              </a:defRPr>
+            </a:pPr>
+            <a:r>
+              <a:t>REST API Endpoints &amp; C++ CLI Bridge</a:t>
+            </a:r>
+          </a:p>
+        </p:txBody>
+      </p:sp>
+      <p:sp>
+        <p:nvSpPr>
+          <p:cNvPr id="9" name="TextBox 8"/>
+          <p:cNvSpPr txBox="1"/>
+          <p:nvPr/>
+        </p:nvSpPr>
+        <p:spPr>
+          <a:xfrm>
+            <a:off x="6400800" y="2011680"/>
+            <a:ext cx="4846320" cy="4023360"/>
+          </a:xfrm>
+          <a:prstGeom prst="rect">
+            <a:avLst/>
+          </a:prstGeom>
+          <a:noFill/>
+        </p:spPr>
+        <p:txBody>
+          <a:bodyPr wrap="square">
+            <a:spAutoFit/>
+          </a:bodyPr>
+          <a:lstStyle/>
+          <a:p/>
+          <a:p>
+            <a:pPr>
+              <a:spcAft>
+                <a:spcPts val="500"/>
+              </a:spcAft>
+              <a:defRPr sz="1100">
+                <a:solidFill>
+                  <a:srgbClr val="06B6D4"/>
+                </a:solidFill>
+              </a:defRPr>
+            </a:pPr>
+            <a:r>
+              <a:t>• GET /api/status: Returns backend health, binary path, and online indicator.</a:t>
+            </a:r>
+          </a:p>
+          <a:p>
+            <a:pPr>
+              <a:spcAft>
+                <a:spcPts val="500"/>
+              </a:spcAft>
+              <a:defRPr sz="1100">
+                <a:solidFill>
+                  <a:srgbClr val="06B6D4"/>
+                </a:solidFill>
+              </a:defRPr>
+            </a:pPr>
+            <a:r>
+              <a:t>• GET /api/state: Queries C++ --state and returns current traffic counts and BIT array.</a:t>
+            </a:r>
+          </a:p>
+          <a:p>
+            <a:pPr>
+              <a:spcAft>
+                <a:spcPts val="500"/>
+              </a:spcAft>
+              <a:defRPr sz="1100">
+                <a:solidFill>
+                  <a:srgbClr val="06B6D4"/>
+                </a:solidFill>
+              </a:defRPr>
+            </a:pPr>
+            <a:r>
+              <a:t>• POST /api/query: Accepts {left, right, threshold}, executes traffic_analytics.exe --query, and returns sum, status, and prefix breakdown.</a:t>
+            </a:r>
+          </a:p>
+          <a:p>
+            <a:pPr>
+              <a:spcAft>
+                <a:spcPts val="500"/>
+              </a:spcAft>
+              <a:defRPr sz="1100">
+                <a:solidFill>
+                  <a:srgbClr val="06B6D4"/>
+                </a:solidFill>
+              </a:defRPr>
+            </a:pPr>
+            <a:r>
+              <a:t>• POST /api/update: Accepts {segment, newCount}, executes traffic_analytics.exe --update, and returns updated arrays and ancestor path.</a:t>
+            </a:r>
+          </a:p>
+          <a:p>
+            <a:pPr>
+              <a:spcAft>
+                <a:spcPts val="500"/>
+              </a:spcAft>
+              <a:defRPr sz="1100">
+                <a:solidFill>
+                  <a:srgbClr val="06B6D4"/>
+                </a:solidFill>
+              </a:defRPr>
+            </a:pPr>
+            <a:r>
+              <a:t>• POST /api/reset: Restores benchmark initial state (87 veh).</a:t>
+            </a:r>
+          </a:p>
+          <a:p>
+            <a:pPr>
+              <a:spcAft>
+                <a:spcPts val="500"/>
+              </a:spcAft>
+              <a:defRPr sz="1100">
+                <a:solidFill>
+                  <a:srgbClr val="F8FAFC"/>
+                </a:solidFill>
+              </a:defRPr>
+            </a:pPr>
+            <a:r>
+              <a:t>• C++ CLI Output: Structured JSON emitted directly to stdout.</a:t>
             </a:r>
           </a:p>
         </p:txBody>
@@ -4563,7 +4968,7 @@
               </a:defRPr>
             </a:pPr>
             <a:r>
-              <a:t>DSA CASE STUDY EVALUATION</a:t>
+              <a:t>COMPLEXITY ANALYSIS</a:t>
             </a:r>
           </a:p>
         </p:txBody>
@@ -4598,21 +5003,519 @@
               </a:defRPr>
             </a:pPr>
             <a:r>
-              <a:t>Limitations &amp; Future Roadmap</a:t>
-            </a:r>
-          </a:p>
-        </p:txBody>
-      </p:sp>
-      <p:sp>
-        <p:nvSpPr>
-          <p:cNvPr id="4" name="Rounded Rectangle 3"/>
+              <a:t>Algorithmic Complexity Analysis &amp; Theoretical Proofs</a:t>
+            </a:r>
+          </a:p>
+        </p:txBody>
+      </p:sp>
+      <p:graphicFrame>
+        <p:nvGraphicFramePr>
+          <p:cNvPr id="4" name="Table 3"/>
+          <p:cNvGraphicFramePr>
+            <a:graphicFrameLocks noGrp="1"/>
+          </p:cNvGraphicFramePr>
+          <p:nvPr/>
+        </p:nvGraphicFramePr>
+        <p:xfrm>
+          <a:off x="731520" y="1463040"/>
+          <a:ext cx="10698480" cy="3291840"/>
+        </p:xfrm>
+        <a:graphic>
+          <a:graphicData uri="http://schemas.openxmlformats.org/drawingml/2006/table">
+            <a:tbl>
+              <a:tblPr firstRow="1" bandRow="1">
+                <a:tableStyleId>{5C22544A-7EE6-4342-B048-85BDC9FD1C3A}</a:tableStyleId>
+              </a:tblPr>
+              <a:tblGrid>
+                <a:gridCol w="2674620"/>
+                <a:gridCol w="2674620"/>
+                <a:gridCol w="2674620"/>
+                <a:gridCol w="2674620"/>
+              </a:tblGrid>
+              <a:tr h="658368">
+                <a:tc>
+                  <a:txBody>
+                    <a:bodyPr/>
+                    <a:lstStyle/>
+                    <a:p>
+                      <a:pPr>
+                        <a:defRPr sz="1200" b="1">
+                          <a:solidFill>
+                            <a:srgbClr val="06B6D4"/>
+                          </a:solidFill>
+                        </a:defRPr>
+                      </a:pPr>
+                      <a:r>
+                        <a:t>Operation</a:t>
+                      </a:r>
+                    </a:p>
+                  </a:txBody>
+                  <a:tcPr>
+                    <a:solidFill>
+                      <a:srgbClr val="1E293B"/>
+                    </a:solidFill>
+                  </a:tcPr>
+                </a:tc>
+                <a:tc>
+                  <a:txBody>
+                    <a:bodyPr/>
+                    <a:lstStyle/>
+                    <a:p>
+                      <a:pPr>
+                        <a:defRPr sz="1200" b="1">
+                          <a:solidFill>
+                            <a:srgbClr val="06B6D4"/>
+                          </a:solidFill>
+                        </a:defRPr>
+                      </a:pPr>
+                      <a:r>
+                        <a:t>Time Complexity</a:t>
+                      </a:r>
+                    </a:p>
+                  </a:txBody>
+                  <a:tcPr>
+                    <a:solidFill>
+                      <a:srgbClr val="1E293B"/>
+                    </a:solidFill>
+                  </a:tcPr>
+                </a:tc>
+                <a:tc>
+                  <a:txBody>
+                    <a:bodyPr/>
+                    <a:lstStyle/>
+                    <a:p>
+                      <a:pPr>
+                        <a:defRPr sz="1200" b="1">
+                          <a:solidFill>
+                            <a:srgbClr val="06B6D4"/>
+                          </a:solidFill>
+                        </a:defRPr>
+                      </a:pPr>
+                      <a:r>
+                        <a:t>Auxiliary Space</a:t>
+                      </a:r>
+                    </a:p>
+                  </a:txBody>
+                  <a:tcPr>
+                    <a:solidFill>
+                      <a:srgbClr val="1E293B"/>
+                    </a:solidFill>
+                  </a:tcPr>
+                </a:tc>
+                <a:tc>
+                  <a:txBody>
+                    <a:bodyPr/>
+                    <a:lstStyle/>
+                    <a:p>
+                      <a:pPr>
+                        <a:defRPr sz="1200" b="1">
+                          <a:solidFill>
+                            <a:srgbClr val="06B6D4"/>
+                          </a:solidFill>
+                        </a:defRPr>
+                      </a:pPr>
+                      <a:r>
+                        <a:t>Theoretical Proof Summary</a:t>
+                      </a:r>
+                    </a:p>
+                  </a:txBody>
+                  <a:tcPr>
+                    <a:solidFill>
+                      <a:srgbClr val="1E293B"/>
+                    </a:solidFill>
+                  </a:tcPr>
+                </a:tc>
+              </a:tr>
+              <a:tr h="658368">
+                <a:tc>
+                  <a:txBody>
+                    <a:bodyPr/>
+                    <a:lstStyle/>
+                    <a:p>
+                      <a:pPr>
+                        <a:defRPr sz="1100">
+                          <a:solidFill>
+                            <a:srgbClr val="F8FAFC"/>
+                          </a:solidFill>
+                        </a:defRPr>
+                      </a:pPr>
+                      <a:r>
+                        <a:t>Tree Build (buildFenwick)</a:t>
+                      </a:r>
+                    </a:p>
+                  </a:txBody>
+                  <a:tcPr>
+                    <a:solidFill>
+                      <a:srgbClr val="1E293B"/>
+                    </a:solidFill>
+                  </a:tcPr>
+                </a:tc>
+                <a:tc>
+                  <a:txBody>
+                    <a:bodyPr/>
+                    <a:lstStyle/>
+                    <a:p>
+                      <a:pPr>
+                        <a:defRPr sz="1100">
+                          <a:solidFill>
+                            <a:srgbClr val="10B981"/>
+                          </a:solidFill>
+                        </a:defRPr>
+                      </a:pPr>
+                      <a:r>
+                        <a:t>O(n)</a:t>
+                      </a:r>
+                    </a:p>
+                  </a:txBody>
+                  <a:tcPr>
+                    <a:solidFill>
+                      <a:srgbClr val="1E293B"/>
+                    </a:solidFill>
+                  </a:tcPr>
+                </a:tc>
+                <a:tc>
+                  <a:txBody>
+                    <a:bodyPr/>
+                    <a:lstStyle/>
+                    <a:p>
+                      <a:pPr>
+                        <a:defRPr sz="1100">
+                          <a:solidFill>
+                            <a:srgbClr val="F8FAFC"/>
+                          </a:solidFill>
+                        </a:defRPr>
+                      </a:pPr>
+                      <a:r>
+                        <a:t>O(n)</a:t>
+                      </a:r>
+                    </a:p>
+                  </a:txBody>
+                  <a:tcPr>
+                    <a:solidFill>
+                      <a:srgbClr val="1E293B"/>
+                    </a:solidFill>
+                  </a:tcPr>
+                </a:tc>
+                <a:tc>
+                  <a:txBody>
+                    <a:bodyPr/>
+                    <a:lstStyle/>
+                    <a:p>
+                      <a:pPr>
+                        <a:defRPr sz="1100">
+                          <a:solidFill>
+                            <a:srgbClr val="F8FAFC"/>
+                          </a:solidFill>
+                        </a:defRPr>
+                      </a:pPr>
+                      <a:r>
+                        <a:t>Forward-propagation pushes bit[i] to parent i + lowbit(i); exactly n iterations.</a:t>
+                      </a:r>
+                    </a:p>
+                  </a:txBody>
+                  <a:tcPr>
+                    <a:solidFill>
+                      <a:srgbClr val="1E293B"/>
+                    </a:solidFill>
+                  </a:tcPr>
+                </a:tc>
+              </a:tr>
+              <a:tr h="658368">
+                <a:tc>
+                  <a:txBody>
+                    <a:bodyPr/>
+                    <a:lstStyle/>
+                    <a:p>
+                      <a:pPr>
+                        <a:defRPr sz="1100">
+                          <a:solidFill>
+                            <a:srgbClr val="F8FAFC"/>
+                          </a:solidFill>
+                        </a:defRPr>
+                      </a:pPr>
+                      <a:r>
+                        <a:t>Point Update (update / setCount)</a:t>
+                      </a:r>
+                    </a:p>
+                  </a:txBody>
+                  <a:tcPr>
+                    <a:solidFill>
+                      <a:srgbClr val="1E293B"/>
+                    </a:solidFill>
+                  </a:tcPr>
+                </a:tc>
+                <a:tc>
+                  <a:txBody>
+                    <a:bodyPr/>
+                    <a:lstStyle/>
+                    <a:p>
+                      <a:pPr>
+                        <a:defRPr sz="1100">
+                          <a:solidFill>
+                            <a:srgbClr val="10B981"/>
+                          </a:solidFill>
+                        </a:defRPr>
+                      </a:pPr>
+                      <a:r>
+                        <a:t>O(log n)</a:t>
+                      </a:r>
+                    </a:p>
+                  </a:txBody>
+                  <a:tcPr>
+                    <a:solidFill>
+                      <a:srgbClr val="1E293B"/>
+                    </a:solidFill>
+                  </a:tcPr>
+                </a:tc>
+                <a:tc>
+                  <a:txBody>
+                    <a:bodyPr/>
+                    <a:lstStyle/>
+                    <a:p>
+                      <a:pPr>
+                        <a:defRPr sz="1100">
+                          <a:solidFill>
+                            <a:srgbClr val="F8FAFC"/>
+                          </a:solidFill>
+                        </a:defRPr>
+                      </a:pPr>
+                      <a:r>
+                        <a:t>O(1)</a:t>
+                      </a:r>
+                    </a:p>
+                  </a:txBody>
+                  <a:tcPr>
+                    <a:solidFill>
+                      <a:srgbClr val="1E293B"/>
+                    </a:solidFill>
+                  </a:tcPr>
+                </a:tc>
+                <a:tc>
+                  <a:txBody>
+                    <a:bodyPr/>
+                    <a:lstStyle/>
+                    <a:p>
+                      <a:pPr>
+                        <a:defRPr sz="1100">
+                          <a:solidFill>
+                            <a:srgbClr val="F8FAFC"/>
+                          </a:solidFill>
+                        </a:defRPr>
+                      </a:pPr>
+                      <a:r>
+                        <a:t>Advances via i += lowbit(i); loops at most floor(log2 n) + 1 times.</a:t>
+                      </a:r>
+                    </a:p>
+                  </a:txBody>
+                  <a:tcPr>
+                    <a:solidFill>
+                      <a:srgbClr val="1E293B"/>
+                    </a:solidFill>
+                  </a:tcPr>
+                </a:tc>
+              </a:tr>
+              <a:tr h="658368">
+                <a:tc>
+                  <a:txBody>
+                    <a:bodyPr/>
+                    <a:lstStyle/>
+                    <a:p>
+                      <a:pPr>
+                        <a:defRPr sz="1100">
+                          <a:solidFill>
+                            <a:srgbClr val="F8FAFC"/>
+                          </a:solidFill>
+                        </a:defRPr>
+                      </a:pPr>
+                      <a:r>
+                        <a:t>Prefix Sum Query (prefixSum)</a:t>
+                      </a:r>
+                    </a:p>
+                  </a:txBody>
+                  <a:tcPr>
+                    <a:solidFill>
+                      <a:srgbClr val="1E293B"/>
+                    </a:solidFill>
+                  </a:tcPr>
+                </a:tc>
+                <a:tc>
+                  <a:txBody>
+                    <a:bodyPr/>
+                    <a:lstStyle/>
+                    <a:p>
+                      <a:pPr>
+                        <a:defRPr sz="1100">
+                          <a:solidFill>
+                            <a:srgbClr val="10B981"/>
+                          </a:solidFill>
+                        </a:defRPr>
+                      </a:pPr>
+                      <a:r>
+                        <a:t>O(log n)</a:t>
+                      </a:r>
+                    </a:p>
+                  </a:txBody>
+                  <a:tcPr>
+                    <a:solidFill>
+                      <a:srgbClr val="1E293B"/>
+                    </a:solidFill>
+                  </a:tcPr>
+                </a:tc>
+                <a:tc>
+                  <a:txBody>
+                    <a:bodyPr/>
+                    <a:lstStyle/>
+                    <a:p>
+                      <a:pPr>
+                        <a:defRPr sz="1100">
+                          <a:solidFill>
+                            <a:srgbClr val="F8FAFC"/>
+                          </a:solidFill>
+                        </a:defRPr>
+                      </a:pPr>
+                      <a:r>
+                        <a:t>O(1)</a:t>
+                      </a:r>
+                    </a:p>
+                  </a:txBody>
+                  <a:tcPr>
+                    <a:solidFill>
+                      <a:srgbClr val="1E293B"/>
+                    </a:solidFill>
+                  </a:tcPr>
+                </a:tc>
+                <a:tc>
+                  <a:txBody>
+                    <a:bodyPr/>
+                    <a:lstStyle/>
+                    <a:p>
+                      <a:pPr>
+                        <a:defRPr sz="1100">
+                          <a:solidFill>
+                            <a:srgbClr val="F8FAFC"/>
+                          </a:solidFill>
+                        </a:defRPr>
+                      </a:pPr>
+                      <a:r>
+                        <a:t>Strips lowest set bit via i -= lowbit(i); loops at most log2 n times.</a:t>
+                      </a:r>
+                    </a:p>
+                  </a:txBody>
+                  <a:tcPr>
+                    <a:solidFill>
+                      <a:srgbClr val="1E293B"/>
+                    </a:solidFill>
+                  </a:tcPr>
+                </a:tc>
+              </a:tr>
+              <a:tr h="658368">
+                <a:tc>
+                  <a:txBody>
+                    <a:bodyPr/>
+                    <a:lstStyle/>
+                    <a:p>
+                      <a:pPr>
+                        <a:defRPr sz="1100">
+                          <a:solidFill>
+                            <a:srgbClr val="F8FAFC"/>
+                          </a:solidFill>
+                        </a:defRPr>
+                      </a:pPr>
+                      <a:r>
+                        <a:t>Range Query (rangeSum)</a:t>
+                      </a:r>
+                    </a:p>
+                  </a:txBody>
+                  <a:tcPr>
+                    <a:solidFill>
+                      <a:srgbClr val="1E293B"/>
+                    </a:solidFill>
+                  </a:tcPr>
+                </a:tc>
+                <a:tc>
+                  <a:txBody>
+                    <a:bodyPr/>
+                    <a:lstStyle/>
+                    <a:p>
+                      <a:pPr>
+                        <a:defRPr sz="1100">
+                          <a:solidFill>
+                            <a:srgbClr val="10B981"/>
+                          </a:solidFill>
+                        </a:defRPr>
+                      </a:pPr>
+                      <a:r>
+                        <a:t>O(log n)</a:t>
+                      </a:r>
+                    </a:p>
+                  </a:txBody>
+                  <a:tcPr>
+                    <a:solidFill>
+                      <a:srgbClr val="1E293B"/>
+                    </a:solidFill>
+                  </a:tcPr>
+                </a:tc>
+                <a:tc>
+                  <a:txBody>
+                    <a:bodyPr/>
+                    <a:lstStyle/>
+                    <a:p>
+                      <a:pPr>
+                        <a:defRPr sz="1100">
+                          <a:solidFill>
+                            <a:srgbClr val="F8FAFC"/>
+                          </a:solidFill>
+                        </a:defRPr>
+                      </a:pPr>
+                      <a:r>
+                        <a:t>O(1)</a:t>
+                      </a:r>
+                    </a:p>
+                  </a:txBody>
+                  <a:tcPr>
+                    <a:solidFill>
+                      <a:srgbClr val="1E293B"/>
+                    </a:solidFill>
+                  </a:tcPr>
+                </a:tc>
+                <a:tc>
+                  <a:txBody>
+                    <a:bodyPr/>
+                    <a:lstStyle/>
+                    <a:p>
+                      <a:pPr>
+                        <a:defRPr sz="1100">
+                          <a:solidFill>
+                            <a:srgbClr val="F8FAFC"/>
+                          </a:solidFill>
+                        </a:defRPr>
+                      </a:pPr>
+                      <a:r>
+                        <a:t>Difference of two prefix sums: 2 * O(log n) = O(log n).</a:t>
+                      </a:r>
+                    </a:p>
+                  </a:txBody>
+                  <a:tcPr>
+                    <a:solidFill>
+                      <a:srgbClr val="1E293B"/>
+                    </a:solidFill>
+                  </a:tcPr>
+                </a:tc>
+              </a:tr>
+            </a:tbl>
+          </a:graphicData>
+        </a:graphic>
+      </p:graphicFrame>
+      <p:sp>
+        <p:nvSpPr>
+          <p:cNvPr id="5" name="Rounded Rectangle 4"/>
           <p:cNvSpPr/>
           <p:nvPr/>
         </p:nvSpPr>
         <p:spPr>
           <a:xfrm>
-            <a:off x="731520" y="1463040"/>
-            <a:ext cx="5120640" cy="4754880"/>
+            <a:off x="731520" y="5029200"/>
+            <a:ext cx="10698480" cy="1371600"/>
           </a:xfrm>
           <a:prstGeom prst="roundRect">
             <a:avLst/>
@@ -4650,14 +5553,14 @@
       </p:sp>
       <p:sp>
         <p:nvSpPr>
-          <p:cNvPr id="5" name="TextBox 4"/>
+          <p:cNvPr id="6" name="TextBox 5"/>
           <p:cNvSpPr txBox="1"/>
           <p:nvPr/>
         </p:nvSpPr>
         <p:spPr>
           <a:xfrm>
-            <a:off x="914400" y="1600200"/>
-            <a:ext cx="4754880" cy="411480"/>
+            <a:off x="914400" y="5166360"/>
+            <a:ext cx="10332720" cy="411480"/>
           </a:xfrm>
           <a:prstGeom prst="rect">
             <a:avLst/>
@@ -4671,28 +5574,28 @@
           <a:lstStyle/>
           <a:p>
             <a:pPr>
-              <a:defRPr sz="1400" b="1">
+              <a:defRPr sz="1300" b="1">
                 <a:solidFill>
                   <a:srgbClr val="3B82F6"/>
                 </a:solidFill>
               </a:defRPr>
             </a:pPr>
             <a:r>
-              <a:t>Current System Limitations</a:t>
-            </a:r>
-          </a:p>
-        </p:txBody>
-      </p:sp>
-      <p:sp>
-        <p:nvSpPr>
-          <p:cNvPr id="6" name="TextBox 5"/>
+              <a:t>Hardware &amp; CPU Cache Locality Advantages</a:t>
+            </a:r>
+          </a:p>
+        </p:txBody>
+      </p:sp>
+      <p:sp>
+        <p:nvSpPr>
+          <p:cNvPr id="7" name="TextBox 6"/>
           <p:cNvSpPr txBox="1"/>
           <p:nvPr/>
         </p:nvSpPr>
         <p:spPr>
           <a:xfrm>
-            <a:off x="914400" y="2011680"/>
-            <a:ext cx="4754880" cy="4023360"/>
+            <a:off x="914400" y="5394960"/>
+            <a:ext cx="10332720" cy="914400"/>
           </a:xfrm>
           <a:prstGeom prst="rect">
             <a:avLst/>
@@ -4700,7 +5603,7 @@
           <a:noFill/>
         </p:spPr>
         <p:txBody>
-          <a:bodyPr wrap="square">
+          <a:bodyPr wrap="none">
             <a:spAutoFit/>
           </a:bodyPr>
           <a:lstStyle/>
@@ -4708,225 +5611,46 @@
           <a:p>
             <a:pPr>
               <a:spcAft>
-                <a:spcPts val="800"/>
-              </a:spcAft>
-              <a:defRPr sz="1200">
-                <a:solidFill>
-                  <a:srgbClr val="F8FAFC"/>
-                </a:solidFill>
-              </a:defRPr>
-            </a:pPr>
-            <a:r>
-              <a:t>• Linear Grid Topology: Current 1D Fenwick Tree assumes linear sequential road corridors. Real-world metropolitan networks feature complex graph topologies and intersections.</a:t>
-            </a:r>
-          </a:p>
-          <a:p>
-            <a:pPr>
-              <a:spcAft>
-                <a:spcPts val="800"/>
-              </a:spcAft>
-              <a:defRPr sz="1200">
-                <a:solidFill>
-                  <a:srgbClr val="F8FAFC"/>
-                </a:solidFill>
-              </a:defRPr>
-            </a:pPr>
-            <a:r>
-              <a:t>• Static Segment Count: Fixed n array size. Inserting or deleting road segments dynamically requires array reallocation.</a:t>
-            </a:r>
-          </a:p>
-          <a:p>
-            <a:pPr>
-              <a:spcAft>
-                <a:spcPts val="800"/>
-              </a:spcAft>
-              <a:defRPr sz="1200">
-                <a:solidFill>
-                  <a:srgbClr val="F8FAFC"/>
-                </a:solidFill>
-              </a:defRPr>
-            </a:pPr>
-            <a:r>
-              <a:t>• Single-Dimension Metric: Monitors aggregate vehicle count only, without factoring speed, vehicle classification (trucks vs cars), or weather conditions.</a:t>
-            </a:r>
-          </a:p>
-          <a:p>
-            <a:pPr>
-              <a:spcAft>
-                <a:spcPts val="800"/>
-              </a:spcAft>
-              <a:defRPr sz="1200">
-                <a:solidFill>
-                  <a:srgbClr val="F8FAFC"/>
-                </a:solidFill>
-              </a:defRPr>
-            </a:pPr>
-            <a:r>
-              <a:t>• Point Update / Range Query Asymmetry: While point updates are fast, range updates (adding delta to an entire range) require dual-tree difference encoding.</a:t>
-            </a:r>
-          </a:p>
-        </p:txBody>
-      </p:sp>
-      <p:sp>
-        <p:nvSpPr>
-          <p:cNvPr id="7" name="Rounded Rectangle 6"/>
-          <p:cNvSpPr/>
-          <p:nvPr/>
-        </p:nvSpPr>
-        <p:spPr>
-          <a:xfrm>
-            <a:off x="6217920" y="1463040"/>
-            <a:ext cx="5212080" cy="4754880"/>
-          </a:xfrm>
-          <a:prstGeom prst="roundRect">
-            <a:avLst/>
-          </a:prstGeom>
-          <a:solidFill>
-            <a:srgbClr val="1E293B"/>
-          </a:solidFill>
-          <a:ln w="19050">
-            <a:solidFill>
-              <a:srgbClr val="334155"/>
-            </a:solidFill>
-          </a:ln>
-        </p:spPr>
-        <p:style>
-          <a:lnRef idx="1">
-            <a:schemeClr val="accent1"/>
-          </a:lnRef>
-          <a:fillRef idx="3">
-            <a:schemeClr val="accent1"/>
-          </a:fillRef>
-          <a:effectRef idx="2">
-            <a:schemeClr val="accent1"/>
-          </a:effectRef>
-          <a:fontRef idx="minor">
-            <a:schemeClr val="lt1"/>
-          </a:fontRef>
-        </p:style>
-        <p:txBody>
-          <a:bodyPr rtlCol="0" anchor="ctr"/>
-          <a:lstStyle/>
-          <a:p>
-            <a:pPr algn="ctr"/>
-          </a:p>
-        </p:txBody>
-      </p:sp>
-      <p:sp>
-        <p:nvSpPr>
-          <p:cNvPr id="8" name="TextBox 7"/>
-          <p:cNvSpPr txBox="1"/>
-          <p:nvPr/>
-        </p:nvSpPr>
-        <p:spPr>
-          <a:xfrm>
-            <a:off x="6400800" y="1600200"/>
-            <a:ext cx="4846320" cy="411480"/>
-          </a:xfrm>
-          <a:prstGeom prst="rect">
-            <a:avLst/>
-          </a:prstGeom>
-          <a:noFill/>
-        </p:spPr>
-        <p:txBody>
-          <a:bodyPr wrap="square">
-            <a:spAutoFit/>
-          </a:bodyPr>
-          <a:lstStyle/>
-          <a:p>
-            <a:pPr>
-              <a:defRPr sz="1400" b="1">
-                <a:solidFill>
-                  <a:srgbClr val="3B82F6"/>
-                </a:solidFill>
-              </a:defRPr>
-            </a:pPr>
-            <a:r>
-              <a:t>Future Engineering Roadmap</a:t>
-            </a:r>
-          </a:p>
-        </p:txBody>
-      </p:sp>
-      <p:sp>
-        <p:nvSpPr>
-          <p:cNvPr id="9" name="TextBox 8"/>
-          <p:cNvSpPr txBox="1"/>
-          <p:nvPr/>
-        </p:nvSpPr>
-        <p:spPr>
-          <a:xfrm>
-            <a:off x="6400800" y="2011680"/>
-            <a:ext cx="4846320" cy="4023360"/>
-          </a:xfrm>
-          <a:prstGeom prst="rect">
-            <a:avLst/>
-          </a:prstGeom>
-          <a:noFill/>
-        </p:spPr>
-        <p:txBody>
-          <a:bodyPr wrap="square">
-            <a:spAutoFit/>
-          </a:bodyPr>
-          <a:lstStyle/>
-          <a:p/>
-          <a:p>
-            <a:pPr>
-              <a:spcAft>
-                <a:spcPts val="800"/>
-              </a:spcAft>
-              <a:defRPr sz="1200">
-                <a:solidFill>
-                  <a:srgbClr val="94A3B8"/>
-                </a:solidFill>
-              </a:defRPr>
-            </a:pPr>
-            <a:r>
-              <a:t>• 2D Fenwick Tree Extension: Extend data structure to a 2D BIT for spatial grid monitoring (intersections and multi-lane urban grids) in O(log^2 n) time.</a:t>
-            </a:r>
-          </a:p>
-          <a:p>
-            <a:pPr>
-              <a:spcAft>
-                <a:spcPts val="800"/>
-              </a:spcAft>
-              <a:defRPr sz="1200">
-                <a:solidFill>
-                  <a:srgbClr val="F8FAFC"/>
-                </a:solidFill>
-              </a:defRPr>
-            </a:pPr>
-            <a:r>
-              <a:t>• Dual-Tree Range Update Support: Incorporate two BITs to support O(log n) range updates and O(log n) range queries simultaneously.</a:t>
-            </a:r>
-          </a:p>
-          <a:p>
-            <a:pPr>
-              <a:spcAft>
-                <a:spcPts val="800"/>
-              </a:spcAft>
-              <a:defRPr sz="1200">
-                <a:solidFill>
-                  <a:srgbClr val="F8FAFC"/>
-                </a:solidFill>
-              </a:defRPr>
-            </a:pPr>
-            <a:r>
-              <a:t>• Machine Learning Inflow Forecasting: Integrate lightweight predictive models to anticipate congestion thresholds 15 minutes before physical gridlock occurs.</a:t>
-            </a:r>
-          </a:p>
-          <a:p>
-            <a:pPr>
-              <a:spcAft>
-                <a:spcPts val="800"/>
-              </a:spcAft>
-              <a:defRPr sz="1200">
-                <a:solidFill>
-                  <a:srgbClr val="F8FAFC"/>
-                </a:solidFill>
-              </a:defRPr>
-            </a:pPr>
-            <a:r>
-              <a:t>• WebSocket Real-Time Sensor Telemetry: Connect edge IoT sensors via live WebSockets directly into the FlowGrid analytics dashboard.</a:t>
+                <a:spcPts val="200"/>
+              </a:spcAft>
+              <a:defRPr sz="1100">
+                <a:solidFill>
+                  <a:srgbClr val="F8FAFC"/>
+                </a:solidFill>
+              </a:defRPr>
+            </a:pPr>
+            <a:r>
+              <a:t>• Contiguous Memory Locality: Stored in a single flat array; zero CPU pointer chasing or cache thrashing.</a:t>
+            </a:r>
+          </a:p>
+          <a:p>
+            <a:pPr>
+              <a:spcAft>
+                <a:spcPts val="200"/>
+              </a:spcAft>
+              <a:defRPr sz="1100">
+                <a:solidFill>
+                  <a:srgbClr val="F8FAFC"/>
+                </a:solidFill>
+              </a:defRPr>
+            </a:pPr>
+            <a:r>
+              <a:t>• Bitwise Hardware Acceleration: lowbit(x) compiles to single-cycle machine instructions (AND, NEG, BLSI).</a:t>
+            </a:r>
+          </a:p>
+          <a:p>
+            <a:pPr>
+              <a:spcAft>
+                <a:spcPts val="200"/>
+              </a:spcAft>
+              <a:defRPr sz="1100">
+                <a:solidFill>
+                  <a:srgbClr val="F8FAFC"/>
+                </a:solidFill>
+              </a:defRPr>
+            </a:pPr>
+            <a:r>
+              <a:t>• Minimal Auxiliary Footprint: Requires only (n + 1) integer slots compared to 4n for Segment Trees.</a:t>
             </a:r>
           </a:p>
         </p:txBody>
@@ -4987,7 +5711,7 @@
               </a:defRPr>
             </a:pPr>
             <a:r>
-              <a:t>DSA CASE STUDY EVALUATION</a:t>
+              <a:t>TESTING &amp; VALIDATION</a:t>
             </a:r>
           </a:p>
         </p:txBody>
@@ -5022,7 +5746,7 @@
               </a:defRPr>
             </a:pPr>
             <a:r>
-              <a:t>Conclusion &amp; Evaluation Summary</a:t>
+              <a:t>Empirical Verification: 32/32 Automated Tests Passed</a:t>
             </a:r>
           </a:p>
         </p:txBody>
@@ -5036,7 +5760,7 @@
         <p:spPr>
           <a:xfrm>
             <a:off x="731520" y="1463040"/>
-            <a:ext cx="10698480" cy="4754880"/>
+            <a:ext cx="5120640" cy="4754880"/>
           </a:xfrm>
           <a:prstGeom prst="roundRect">
             <a:avLst/>
@@ -5081,7 +5805,7 @@
         <p:spPr>
           <a:xfrm>
             <a:off x="914400" y="1600200"/>
-            <a:ext cx="10332720" cy="411480"/>
+            <a:ext cx="4754880" cy="411480"/>
           </a:xfrm>
           <a:prstGeom prst="rect">
             <a:avLst/>
@@ -5095,14 +5819,14 @@
           <a:lstStyle/>
           <a:p>
             <a:pPr>
-              <a:defRPr sz="1400" b="1">
+              <a:defRPr sz="1300" b="1">
                 <a:solidFill>
                   <a:srgbClr val="3B82F6"/>
                 </a:solidFill>
               </a:defRPr>
             </a:pPr>
             <a:r>
-              <a:t>Key Takeaways &amp; Evaluation Readiness</a:t>
+              <a:t>Automated Test Suite (tests/test_flowgrid.py)</a:t>
             </a:r>
           </a:p>
         </p:txBody>
@@ -5115,8 +5839,8 @@
         </p:nvSpPr>
         <p:spPr>
           <a:xfrm>
-            <a:off x="1005840" y="2103120"/>
-            <a:ext cx="10149840" cy="3840480"/>
+            <a:off x="914400" y="2011680"/>
+            <a:ext cx="4754880" cy="4023360"/>
           </a:xfrm>
           <a:prstGeom prst="rect">
             <a:avLst/>
@@ -5132,76 +5856,1148 @@
           <a:p>
             <a:pPr>
               <a:spcAft>
-                <a:spcPts val="1200"/>
-              </a:spcAft>
+                <a:spcPts val="600"/>
+              </a:spcAft>
+              <a:defRPr sz="1100">
+                <a:solidFill>
+                  <a:srgbClr val="10B981"/>
+                </a:solidFill>
+              </a:defRPr>
+            </a:pPr>
+            <a:r>
+              <a:t>• Execution Outcome: 32 PASSED, 0 FAILED (100% Precision).</a:t>
+            </a:r>
+          </a:p>
+          <a:p>
+            <a:pPr>
+              <a:spcAft>
+                <a:spcPts val="600"/>
+              </a:spcAft>
+              <a:defRPr sz="1100">
+                <a:solidFill>
+                  <a:srgbClr val="F8FAFC"/>
+                </a:solidFill>
+              </a:defRPr>
+            </a:pPr>
+            <a:r>
+              <a:t>• Test Group 1 (Construction): O(n) forward propagation verified; computed BIT matches expected [12, 19, 15, 43, 20, 25, 11, 87]; total volume = 87 veh.</a:t>
+            </a:r>
+          </a:p>
+          <a:p>
+            <a:pPr>
+              <a:spcAft>
+                <a:spcPts val="600"/>
+              </a:spcAft>
+              <a:defRPr sz="1100">
+                <a:solidFill>
+                  <a:srgbClr val="F8FAFC"/>
+                </a:solidFill>
+              </a:defRPr>
+            </a:pPr>
+            <a:r>
+              <a:t>• Test Group 2 (Prefix Sums): Decompositions verified across all indices [1..1] through [1..8].</a:t>
+            </a:r>
+          </a:p>
+          <a:p>
+            <a:pPr>
+              <a:spcAft>
+                <a:spcPts val="600"/>
+              </a:spcAft>
+              <a:defRPr sz="1100">
+                <a:solidFill>
+                  <a:srgbClr val="F8FAFC"/>
+                </a:solidFill>
+              </a:defRPr>
+            </a:pPr>
+            <a:r>
+              <a:t>• Test Group 3 (Range Sums): Baseline [3..6] = 49 veh, single segment [5..5] = 20 veh, full corridor [1..8] = 87 veh.</a:t>
+            </a:r>
+          </a:p>
+          <a:p>
+            <a:pPr>
+              <a:spcAft>
+                <a:spcPts val="600"/>
+              </a:spcAft>
+              <a:defRPr sz="1100">
+                <a:solidFill>
+                  <a:srgbClr val="F8FAFC"/>
+                </a:solidFill>
+              </a:defRPr>
+            </a:pPr>
+            <a:r>
+              <a:t>• Test Group 4 (Point Updates): Traversal path [5, 6, 8] verified; raw array and BIT updated correctly.</a:t>
+            </a:r>
+          </a:p>
+        </p:txBody>
+      </p:sp>
+      <p:sp>
+        <p:nvSpPr>
+          <p:cNvPr id="7" name="Rounded Rectangle 6"/>
+          <p:cNvSpPr/>
+          <p:nvPr/>
+        </p:nvSpPr>
+        <p:spPr>
+          <a:xfrm>
+            <a:off x="6217920" y="1463040"/>
+            <a:ext cx="5212080" cy="4754880"/>
+          </a:xfrm>
+          <a:prstGeom prst="roundRect">
+            <a:avLst/>
+          </a:prstGeom>
+          <a:solidFill>
+            <a:srgbClr val="1E293B"/>
+          </a:solidFill>
+          <a:ln w="19050">
+            <a:solidFill>
+              <a:srgbClr val="334155"/>
+            </a:solidFill>
+          </a:ln>
+        </p:spPr>
+        <p:style>
+          <a:lnRef idx="1">
+            <a:schemeClr val="accent1"/>
+          </a:lnRef>
+          <a:fillRef idx="3">
+            <a:schemeClr val="accent1"/>
+          </a:fillRef>
+          <a:effectRef idx="2">
+            <a:schemeClr val="accent1"/>
+          </a:effectRef>
+          <a:fontRef idx="minor">
+            <a:schemeClr val="lt1"/>
+          </a:fontRef>
+        </p:style>
+        <p:txBody>
+          <a:bodyPr rtlCol="0" anchor="ctr"/>
+          <a:lstStyle/>
+          <a:p>
+            <a:pPr algn="ctr"/>
+          </a:p>
+        </p:txBody>
+      </p:sp>
+      <p:sp>
+        <p:nvSpPr>
+          <p:cNvPr id="8" name="TextBox 7"/>
+          <p:cNvSpPr txBox="1"/>
+          <p:nvPr/>
+        </p:nvSpPr>
+        <p:spPr>
+          <a:xfrm>
+            <a:off x="6400800" y="1600200"/>
+            <a:ext cx="4846320" cy="411480"/>
+          </a:xfrm>
+          <a:prstGeom prst="rect">
+            <a:avLst/>
+          </a:prstGeom>
+          <a:noFill/>
+        </p:spPr>
+        <p:txBody>
+          <a:bodyPr wrap="square">
+            <a:spAutoFit/>
+          </a:bodyPr>
+          <a:lstStyle/>
+          <a:p>
+            <a:pPr>
               <a:defRPr sz="1300" b="1">
                 <a:solidFill>
+                  <a:srgbClr val="3B82F6"/>
+                </a:solidFill>
+              </a:defRPr>
+            </a:pPr>
+            <a:r>
+              <a:t>Safety, Boundary &amp; API Integration Tests</a:t>
+            </a:r>
+          </a:p>
+        </p:txBody>
+      </p:sp>
+      <p:sp>
+        <p:nvSpPr>
+          <p:cNvPr id="9" name="TextBox 8"/>
+          <p:cNvSpPr txBox="1"/>
+          <p:nvPr/>
+        </p:nvSpPr>
+        <p:spPr>
+          <a:xfrm>
+            <a:off x="6400800" y="2011680"/>
+            <a:ext cx="4846320" cy="4023360"/>
+          </a:xfrm>
+          <a:prstGeom prst="rect">
+            <a:avLst/>
+          </a:prstGeom>
+          <a:noFill/>
+        </p:spPr>
+        <p:txBody>
+          <a:bodyPr wrap="square">
+            <a:spAutoFit/>
+          </a:bodyPr>
+          <a:lstStyle/>
+          <a:p/>
+          <a:p>
+            <a:pPr>
+              <a:spcAft>
+                <a:spcPts val="400"/>
+              </a:spcAft>
+              <a:defRPr sz="1100">
+                <a:solidFill>
+                  <a:srgbClr val="F8FAFC"/>
+                </a:solidFill>
+              </a:defRPr>
+            </a:pPr>
+            <a:r>
+              <a:t>• Test Group 5 (Post-Update Query): Re-evaluation of [3..6] returns exactly 63 veh.</a:t>
+            </a:r>
+          </a:p>
+          <a:p>
+            <a:pPr>
+              <a:spcAft>
+                <a:spcPts val="400"/>
+              </a:spcAft>
+              <a:defRPr sz="1100">
+                <a:solidFill>
+                  <a:srgbClr val="F8FAFC"/>
+                </a:solidFill>
+              </a:defRPr>
+            </a:pPr>
+            <a:r>
+              <a:t>• Test Group 6 (Congestion Logic): Below threshold (49 &lt; 55 -&gt; NORMAL), at boundary (55 == 55 -&gt; POTENTIALLY CONGESTED), above threshold (63 &gt;= 55 -&gt; POTENTIALLY CONGESTED).</a:t>
+            </a:r>
+          </a:p>
+          <a:p>
+            <a:pPr>
+              <a:spcAft>
+                <a:spcPts val="400"/>
+              </a:spcAft>
+              <a:defRPr sz="1100">
+                <a:solidFill>
+                  <a:srgbClr val="F8FAFC"/>
+                </a:solidFill>
+              </a:defRPr>
+            </a:pPr>
+            <a:r>
+              <a:t>• Test Group 7 (Boundary Validations): Inverted range [6..3], out-of-bounds indices (10), and negative counts (-10) rejected gracefully.</a:t>
+            </a:r>
+          </a:p>
+          <a:p>
+            <a:pPr>
+              <a:spcAft>
+                <a:spcPts val="400"/>
+              </a:spcAft>
+              <a:defRPr sz="1100">
+                <a:solidFill>
+                  <a:srgbClr val="F8FAFC"/>
+                </a:solidFill>
+              </a:defRPr>
+            </a:pPr>
+            <a:r>
+              <a:t>• Test Group 8 (Repeated Updates): 3 sequential updates maintain cumulative consistency (107 veh).</a:t>
+            </a:r>
+          </a:p>
+          <a:p>
+            <a:pPr>
+              <a:spcAft>
+                <a:spcPts val="400"/>
+              </a:spcAft>
+              <a:defRPr sz="1100">
+                <a:solidFill>
+                  <a:srgbClr val="F8FAFC"/>
+                </a:solidFill>
+              </a:defRPr>
+            </a:pPr>
+            <a:r>
+              <a:t>• Test Group 9 (HTTP REST API): Validated /api/status, /api/state, /api/query, /api/update, /api/reset.</a:t>
+            </a:r>
+          </a:p>
+          <a:p>
+            <a:pPr>
+              <a:spcAft>
+                <a:spcPts val="400"/>
+              </a:spcAft>
+              <a:defRPr sz="1100">
+                <a:solidFill>
+                  <a:srgbClr val="F8FAFC"/>
+                </a:solidFill>
+              </a:defRPr>
+            </a:pPr>
+            <a:r>
+              <a:t>• Test Group 11 (C++ Benchmark): Default argc == 1 non-menu benchmark runs end-to-end.</a:t>
+            </a:r>
+          </a:p>
+        </p:txBody>
+      </p:sp>
+    </p:spTree>
+  </p:cSld>
+  <p:clrMapOvr>
+    <a:masterClrMapping/>
+  </p:clrMapOvr>
+</p:sld>
+</file>
+
+<file path=ppt/slides/slide15.xml><?xml version="1.0" encoding="utf-8"?>
+<p:sld xmlns:a="http://schemas.openxmlformats.org/drawingml/2006/main" xmlns:p="http://schemas.openxmlformats.org/presentationml/2006/main" xmlns:r="http://schemas.openxmlformats.org/officeDocument/2006/relationships">
+  <p:cSld>
+    <p:bg>
+      <p:bgPr>
+        <a:solidFill>
+          <a:srgbClr val="0F172A"/>
+        </a:solidFill>
+        <a:effectLst/>
+      </p:bgPr>
+    </p:bg>
+    <p:spTree>
+      <p:nvGrpSpPr>
+        <p:cNvPr id="1" name=""/>
+        <p:cNvGrpSpPr/>
+        <p:nvPr/>
+      </p:nvGrpSpPr>
+      <p:grpSpPr/>
+      <p:sp>
+        <p:nvSpPr>
+          <p:cNvPr id="2" name="TextBox 1"/>
+          <p:cNvSpPr txBox="1"/>
+          <p:nvPr/>
+        </p:nvSpPr>
+        <p:spPr>
+          <a:xfrm>
+            <a:off x="731520" y="365760"/>
+            <a:ext cx="10698480" cy="320040"/>
+          </a:xfrm>
+          <a:prstGeom prst="rect">
+            <a:avLst/>
+          </a:prstGeom>
+          <a:noFill/>
+        </p:spPr>
+        <p:txBody>
+          <a:bodyPr wrap="square">
+            <a:spAutoFit/>
+          </a:bodyPr>
+          <a:lstStyle/>
+          <a:p>
+            <a:pPr>
+              <a:defRPr sz="1000" b="1">
+                <a:solidFill>
+                  <a:srgbClr val="06B6D4"/>
+                </a:solidFill>
+              </a:defRPr>
+            </a:pPr>
+            <a:r>
+              <a:t>SCALABILITY &amp; ROADMAP</a:t>
+            </a:r>
+          </a:p>
+        </p:txBody>
+      </p:sp>
+      <p:sp>
+        <p:nvSpPr>
+          <p:cNvPr id="3" name="TextBox 2"/>
+          <p:cNvSpPr txBox="1"/>
+          <p:nvPr/>
+        </p:nvSpPr>
+        <p:spPr>
+          <a:xfrm>
+            <a:off x="731520" y="640080"/>
+            <a:ext cx="10698480" cy="640080"/>
+          </a:xfrm>
+          <a:prstGeom prst="rect">
+            <a:avLst/>
+          </a:prstGeom>
+          <a:noFill/>
+        </p:spPr>
+        <p:txBody>
+          <a:bodyPr wrap="square">
+            <a:spAutoFit/>
+          </a:bodyPr>
+          <a:lstStyle/>
+          <a:p>
+            <a:pPr>
+              <a:defRPr sz="2200" b="1">
+                <a:solidFill>
+                  <a:srgbClr val="F8FAFC"/>
+                </a:solidFill>
+              </a:defRPr>
+            </a:pPr>
+            <a:r>
+              <a:t>Limitations &amp; Future Roadmap</a:t>
+            </a:r>
+          </a:p>
+        </p:txBody>
+      </p:sp>
+      <p:sp>
+        <p:nvSpPr>
+          <p:cNvPr id="4" name="Rounded Rectangle 3"/>
+          <p:cNvSpPr/>
+          <p:nvPr/>
+        </p:nvSpPr>
+        <p:spPr>
+          <a:xfrm>
+            <a:off x="731520" y="1463040"/>
+            <a:ext cx="5120640" cy="4754880"/>
+          </a:xfrm>
+          <a:prstGeom prst="roundRect">
+            <a:avLst/>
+          </a:prstGeom>
+          <a:solidFill>
+            <a:srgbClr val="1E293B"/>
+          </a:solidFill>
+          <a:ln w="19050">
+            <a:solidFill>
+              <a:srgbClr val="334155"/>
+            </a:solidFill>
+          </a:ln>
+        </p:spPr>
+        <p:style>
+          <a:lnRef idx="1">
+            <a:schemeClr val="accent1"/>
+          </a:lnRef>
+          <a:fillRef idx="3">
+            <a:schemeClr val="accent1"/>
+          </a:fillRef>
+          <a:effectRef idx="2">
+            <a:schemeClr val="accent1"/>
+          </a:effectRef>
+          <a:fontRef idx="minor">
+            <a:schemeClr val="lt1"/>
+          </a:fontRef>
+        </p:style>
+        <p:txBody>
+          <a:bodyPr rtlCol="0" anchor="ctr"/>
+          <a:lstStyle/>
+          <a:p>
+            <a:pPr algn="ctr"/>
+          </a:p>
+        </p:txBody>
+      </p:sp>
+      <p:sp>
+        <p:nvSpPr>
+          <p:cNvPr id="5" name="TextBox 4"/>
+          <p:cNvSpPr txBox="1"/>
+          <p:nvPr/>
+        </p:nvSpPr>
+        <p:spPr>
+          <a:xfrm>
+            <a:off x="914400" y="1600200"/>
+            <a:ext cx="4754880" cy="411480"/>
+          </a:xfrm>
+          <a:prstGeom prst="rect">
+            <a:avLst/>
+          </a:prstGeom>
+          <a:noFill/>
+        </p:spPr>
+        <p:txBody>
+          <a:bodyPr wrap="square">
+            <a:spAutoFit/>
+          </a:bodyPr>
+          <a:lstStyle/>
+          <a:p>
+            <a:pPr>
+              <a:defRPr sz="1300" b="1">
+                <a:solidFill>
+                  <a:srgbClr val="3B82F6"/>
+                </a:solidFill>
+              </a:defRPr>
+            </a:pPr>
+            <a:r>
+              <a:t>Current System Limitations</a:t>
+            </a:r>
+          </a:p>
+        </p:txBody>
+      </p:sp>
+      <p:sp>
+        <p:nvSpPr>
+          <p:cNvPr id="6" name="TextBox 5"/>
+          <p:cNvSpPr txBox="1"/>
+          <p:nvPr/>
+        </p:nvSpPr>
+        <p:spPr>
+          <a:xfrm>
+            <a:off x="914400" y="2011680"/>
+            <a:ext cx="4754880" cy="4023360"/>
+          </a:xfrm>
+          <a:prstGeom prst="rect">
+            <a:avLst/>
+          </a:prstGeom>
+          <a:noFill/>
+        </p:spPr>
+        <p:txBody>
+          <a:bodyPr wrap="square">
+            <a:spAutoFit/>
+          </a:bodyPr>
+          <a:lstStyle/>
+          <a:p/>
+          <a:p>
+            <a:pPr>
+              <a:spcAft>
+                <a:spcPts val="800"/>
+              </a:spcAft>
+              <a:defRPr sz="1100">
+                <a:solidFill>
+                  <a:srgbClr val="F8FAFC"/>
+                </a:solidFill>
+              </a:defRPr>
+            </a:pPr>
+            <a:r>
+              <a:t>• 1D Linear Corridor Topology: Current implementation assumes a linear sequence of road segments. Metropolitan networks contain complex graph intersections and multi-arterial grids.</a:t>
+            </a:r>
+          </a:p>
+          <a:p>
+            <a:pPr>
+              <a:spcAft>
+                <a:spcPts val="800"/>
+              </a:spcAft>
+              <a:defRPr sz="1100">
+                <a:solidFill>
+                  <a:srgbClr val="F8FAFC"/>
+                </a:solidFill>
+              </a:defRPr>
+            </a:pPr>
+            <a:r>
+              <a:t>• Fixed Segment Array Capacity: Initialized for fixed size n = 8. Dynamically adding road segments requires vector reallocation.</a:t>
+            </a:r>
+          </a:p>
+          <a:p>
+            <a:pPr>
+              <a:spcAft>
+                <a:spcPts val="800"/>
+              </a:spcAft>
+              <a:defRPr sz="1100">
+                <a:solidFill>
+                  <a:srgbClr val="F8FAFC"/>
+                </a:solidFill>
+              </a:defRPr>
+            </a:pPr>
+            <a:r>
+              <a:t>• Single Vehicle Count Metric: Tracks aggregate vehicular count only, without factoring vehicle classes (trucks vs cars) or speed.</a:t>
+            </a:r>
+          </a:p>
+          <a:p>
+            <a:pPr>
+              <a:spcAft>
+                <a:spcPts val="800"/>
+              </a:spcAft>
+              <a:defRPr sz="1100">
+                <a:solidFill>
+                  <a:srgbClr val="F8FAFC"/>
+                </a:solidFill>
+              </a:defRPr>
+            </a:pPr>
+            <a:r>
+              <a:t>• Point Update Asymmetry: Optimized for point updates. Range updates (adding delta to an entire range) require dual-tree difference encoding.</a:t>
+            </a:r>
+          </a:p>
+        </p:txBody>
+      </p:sp>
+      <p:sp>
+        <p:nvSpPr>
+          <p:cNvPr id="7" name="Rounded Rectangle 6"/>
+          <p:cNvSpPr/>
+          <p:nvPr/>
+        </p:nvSpPr>
+        <p:spPr>
+          <a:xfrm>
+            <a:off x="6217920" y="1463040"/>
+            <a:ext cx="5212080" cy="4754880"/>
+          </a:xfrm>
+          <a:prstGeom prst="roundRect">
+            <a:avLst/>
+          </a:prstGeom>
+          <a:solidFill>
+            <a:srgbClr val="1E293B"/>
+          </a:solidFill>
+          <a:ln w="19050">
+            <a:solidFill>
+              <a:srgbClr val="334155"/>
+            </a:solidFill>
+          </a:ln>
+        </p:spPr>
+        <p:style>
+          <a:lnRef idx="1">
+            <a:schemeClr val="accent1"/>
+          </a:lnRef>
+          <a:fillRef idx="3">
+            <a:schemeClr val="accent1"/>
+          </a:fillRef>
+          <a:effectRef idx="2">
+            <a:schemeClr val="accent1"/>
+          </a:effectRef>
+          <a:fontRef idx="minor">
+            <a:schemeClr val="lt1"/>
+          </a:fontRef>
+        </p:style>
+        <p:txBody>
+          <a:bodyPr rtlCol="0" anchor="ctr"/>
+          <a:lstStyle/>
+          <a:p>
+            <a:pPr algn="ctr"/>
+          </a:p>
+        </p:txBody>
+      </p:sp>
+      <p:sp>
+        <p:nvSpPr>
+          <p:cNvPr id="8" name="TextBox 7"/>
+          <p:cNvSpPr txBox="1"/>
+          <p:nvPr/>
+        </p:nvSpPr>
+        <p:spPr>
+          <a:xfrm>
+            <a:off x="6400800" y="1600200"/>
+            <a:ext cx="4846320" cy="411480"/>
+          </a:xfrm>
+          <a:prstGeom prst="rect">
+            <a:avLst/>
+          </a:prstGeom>
+          <a:noFill/>
+        </p:spPr>
+        <p:txBody>
+          <a:bodyPr wrap="square">
+            <a:spAutoFit/>
+          </a:bodyPr>
+          <a:lstStyle/>
+          <a:p>
+            <a:pPr>
+              <a:defRPr sz="1300" b="1">
+                <a:solidFill>
+                  <a:srgbClr val="3B82F6"/>
+                </a:solidFill>
+              </a:defRPr>
+            </a:pPr>
+            <a:r>
+              <a:t>Future Engineering Roadmap</a:t>
+            </a:r>
+          </a:p>
+        </p:txBody>
+      </p:sp>
+      <p:sp>
+        <p:nvSpPr>
+          <p:cNvPr id="9" name="TextBox 8"/>
+          <p:cNvSpPr txBox="1"/>
+          <p:nvPr/>
+        </p:nvSpPr>
+        <p:spPr>
+          <a:xfrm>
+            <a:off x="6400800" y="2011680"/>
+            <a:ext cx="4846320" cy="4023360"/>
+          </a:xfrm>
+          <a:prstGeom prst="rect">
+            <a:avLst/>
+          </a:prstGeom>
+          <a:noFill/>
+        </p:spPr>
+        <p:txBody>
+          <a:bodyPr wrap="square">
+            <a:spAutoFit/>
+          </a:bodyPr>
+          <a:lstStyle/>
+          <a:p/>
+          <a:p>
+            <a:pPr>
+              <a:spcAft>
+                <a:spcPts val="800"/>
+              </a:spcAft>
+              <a:defRPr sz="1100">
+                <a:solidFill>
+                  <a:srgbClr val="06B6D4"/>
+                </a:solidFill>
+              </a:defRPr>
+            </a:pPr>
+            <a:r>
+              <a:t>• 2D Fenwick Tree Extension: Extend to 2D Binary Indexed Trees to monitor spatial M x N road grids and multi-directional intersections in O(log^2 n) time.</a:t>
+            </a:r>
+          </a:p>
+          <a:p>
+            <a:pPr>
+              <a:spcAft>
+                <a:spcPts val="800"/>
+              </a:spcAft>
+              <a:defRPr sz="1100">
+                <a:solidFill>
+                  <a:srgbClr val="F8FAFC"/>
+                </a:solidFill>
+              </a:defRPr>
+            </a:pPr>
+            <a:r>
+              <a:t>• Dual-Tree Difference Encoding: Maintain two BITs (D[i] and D[i] * i) to support simultaneous O(log n) range updates and range queries.</a:t>
+            </a:r>
+          </a:p>
+          <a:p>
+            <a:pPr>
+              <a:spcAft>
+                <a:spcPts val="800"/>
+              </a:spcAft>
+              <a:defRPr sz="1100">
+                <a:solidFill>
+                  <a:srgbClr val="F8FAFC"/>
+                </a:solidFill>
+              </a:defRPr>
+            </a:pPr>
+            <a:r>
+              <a:t>• Predictive Machine Learning Forecasting: Couple BIT cumulative volume with ARIMA/LSTM time-series models to anticipate congestion 15 minutes ahead.</a:t>
+            </a:r>
+          </a:p>
+          <a:p>
+            <a:pPr>
+              <a:spcAft>
+                <a:spcPts val="800"/>
+              </a:spcAft>
+              <a:defRPr sz="1100">
+                <a:solidFill>
+                  <a:srgbClr val="F8FAFC"/>
+                </a:solidFill>
+              </a:defRPr>
+            </a:pPr>
+            <a:r>
+              <a:t>• IoT Telemetry Integration: Ingest physical roadside induction loop sensor feeds via live WebSockets directly into the dashboard.</a:t>
+            </a:r>
+          </a:p>
+        </p:txBody>
+      </p:sp>
+    </p:spTree>
+  </p:cSld>
+  <p:clrMapOvr>
+    <a:masterClrMapping/>
+  </p:clrMapOvr>
+</p:sld>
+</file>
+
+<file path=ppt/slides/slide16.xml><?xml version="1.0" encoding="utf-8"?>
+<p:sld xmlns:a="http://schemas.openxmlformats.org/drawingml/2006/main" xmlns:p="http://schemas.openxmlformats.org/presentationml/2006/main" xmlns:r="http://schemas.openxmlformats.org/officeDocument/2006/relationships">
+  <p:cSld>
+    <p:bg>
+      <p:bgPr>
+        <a:solidFill>
+          <a:srgbClr val="0F172A"/>
+        </a:solidFill>
+        <a:effectLst/>
+      </p:bgPr>
+    </p:bg>
+    <p:spTree>
+      <p:nvGrpSpPr>
+        <p:cNvPr id="1" name=""/>
+        <p:cNvGrpSpPr/>
+        <p:nvPr/>
+      </p:nvGrpSpPr>
+      <p:grpSpPr/>
+      <p:sp>
+        <p:nvSpPr>
+          <p:cNvPr id="2" name="TextBox 1"/>
+          <p:cNvSpPr txBox="1"/>
+          <p:nvPr/>
+        </p:nvSpPr>
+        <p:spPr>
+          <a:xfrm>
+            <a:off x="731520" y="365760"/>
+            <a:ext cx="10698480" cy="320040"/>
+          </a:xfrm>
+          <a:prstGeom prst="rect">
+            <a:avLst/>
+          </a:prstGeom>
+          <a:noFill/>
+        </p:spPr>
+        <p:txBody>
+          <a:bodyPr wrap="square">
+            <a:spAutoFit/>
+          </a:bodyPr>
+          <a:lstStyle/>
+          <a:p>
+            <a:pPr>
+              <a:defRPr sz="1000" b="1">
+                <a:solidFill>
+                  <a:srgbClr val="06B6D4"/>
+                </a:solidFill>
+              </a:defRPr>
+            </a:pPr>
+            <a:r>
+              <a:t>CONCLUSION &amp; REFERENCES</a:t>
+            </a:r>
+          </a:p>
+        </p:txBody>
+      </p:sp>
+      <p:sp>
+        <p:nvSpPr>
+          <p:cNvPr id="3" name="TextBox 2"/>
+          <p:cNvSpPr txBox="1"/>
+          <p:nvPr/>
+        </p:nvSpPr>
+        <p:spPr>
+          <a:xfrm>
+            <a:off x="731520" y="640080"/>
+            <a:ext cx="10698480" cy="640080"/>
+          </a:xfrm>
+          <a:prstGeom prst="rect">
+            <a:avLst/>
+          </a:prstGeom>
+          <a:noFill/>
+        </p:spPr>
+        <p:txBody>
+          <a:bodyPr wrap="square">
+            <a:spAutoFit/>
+          </a:bodyPr>
+          <a:lstStyle/>
+          <a:p>
+            <a:pPr>
+              <a:defRPr sz="2200" b="1">
+                <a:solidFill>
+                  <a:srgbClr val="F8FAFC"/>
+                </a:solidFill>
+              </a:defRPr>
+            </a:pPr>
+            <a:r>
+              <a:t>Conclusion, Viva Summary &amp; Academic References</a:t>
+            </a:r>
+          </a:p>
+        </p:txBody>
+      </p:sp>
+      <p:sp>
+        <p:nvSpPr>
+          <p:cNvPr id="4" name="Rounded Rectangle 3"/>
+          <p:cNvSpPr/>
+          <p:nvPr/>
+        </p:nvSpPr>
+        <p:spPr>
+          <a:xfrm>
+            <a:off x="731520" y="1463040"/>
+            <a:ext cx="5120640" cy="4754880"/>
+          </a:xfrm>
+          <a:prstGeom prst="roundRect">
+            <a:avLst/>
+          </a:prstGeom>
+          <a:solidFill>
+            <a:srgbClr val="1E293B"/>
+          </a:solidFill>
+          <a:ln w="19050">
+            <a:solidFill>
+              <a:srgbClr val="334155"/>
+            </a:solidFill>
+          </a:ln>
+        </p:spPr>
+        <p:style>
+          <a:lnRef idx="1">
+            <a:schemeClr val="accent1"/>
+          </a:lnRef>
+          <a:fillRef idx="3">
+            <a:schemeClr val="accent1"/>
+          </a:fillRef>
+          <a:effectRef idx="2">
+            <a:schemeClr val="accent1"/>
+          </a:effectRef>
+          <a:fontRef idx="minor">
+            <a:schemeClr val="lt1"/>
+          </a:fontRef>
+        </p:style>
+        <p:txBody>
+          <a:bodyPr rtlCol="0" anchor="ctr"/>
+          <a:lstStyle/>
+          <a:p>
+            <a:pPr algn="ctr"/>
+          </a:p>
+        </p:txBody>
+      </p:sp>
+      <p:sp>
+        <p:nvSpPr>
+          <p:cNvPr id="5" name="TextBox 4"/>
+          <p:cNvSpPr txBox="1"/>
+          <p:nvPr/>
+        </p:nvSpPr>
+        <p:spPr>
+          <a:xfrm>
+            <a:off x="914400" y="1600200"/>
+            <a:ext cx="4754880" cy="411480"/>
+          </a:xfrm>
+          <a:prstGeom prst="rect">
+            <a:avLst/>
+          </a:prstGeom>
+          <a:noFill/>
+        </p:spPr>
+        <p:txBody>
+          <a:bodyPr wrap="square">
+            <a:spAutoFit/>
+          </a:bodyPr>
+          <a:lstStyle/>
+          <a:p>
+            <a:pPr>
+              <a:defRPr sz="1300" b="1">
+                <a:solidFill>
+                  <a:srgbClr val="3B82F6"/>
+                </a:solidFill>
+              </a:defRPr>
+            </a:pPr>
+            <a:r>
+              <a:t>Key Accomplishments &amp; Evaluation Summary</a:t>
+            </a:r>
+          </a:p>
+        </p:txBody>
+      </p:sp>
+      <p:sp>
+        <p:nvSpPr>
+          <p:cNvPr id="6" name="TextBox 5"/>
+          <p:cNvSpPr txBox="1"/>
+          <p:nvPr/>
+        </p:nvSpPr>
+        <p:spPr>
+          <a:xfrm>
+            <a:off x="914400" y="2011680"/>
+            <a:ext cx="4754880" cy="4023360"/>
+          </a:xfrm>
+          <a:prstGeom prst="rect">
+            <a:avLst/>
+          </a:prstGeom>
+          <a:noFill/>
+        </p:spPr>
+        <p:txBody>
+          <a:bodyPr wrap="square">
+            <a:spAutoFit/>
+          </a:bodyPr>
+          <a:lstStyle/>
+          <a:p/>
+          <a:p>
+            <a:pPr>
+              <a:spcAft>
+                <a:spcPts val="800"/>
+              </a:spcAft>
+              <a:defRPr sz="1100" b="1">
+                <a:solidFill>
                   <a:srgbClr val="10B981"/>
                 </a:solidFill>
               </a:defRPr>
             </a:pPr>
             <a:r>
-              <a:t>✓ Non-Menu-Driven Automated Execution: Both the C++ core and Web dashboard execute robust, automated verification sequences with zero fragile menu prompts.</a:t>
-            </a:r>
-          </a:p>
-          <a:p>
-            <a:pPr>
-              <a:spcAft>
-                <a:spcPts val="1200"/>
-              </a:spcAft>
+              <a:t>✓ Complete 4-Member Collaboration: Seamlessly synthesizes Member 1 (data), Member 2 (core BIT), Member 3 (queries &amp; demo), and Member 4 (dashboard &amp; server).</a:t>
+            </a:r>
+          </a:p>
+          <a:p>
+            <a:pPr>
+              <a:spcAft>
+                <a:spcPts val="800"/>
+              </a:spcAft>
+              <a:defRPr sz="1100" b="1">
+                <a:solidFill>
+                  <a:srgbClr val="10B981"/>
+                </a:solidFill>
+              </a:defRPr>
+            </a:pPr>
+            <a:r>
+              <a:t>✓ Production-Grade Algorithmic Rigor: 32 automated tests verify 100% mathematical and logical parity across C++ and web tiers.</a:t>
+            </a:r>
+          </a:p>
+          <a:p>
+            <a:pPr>
+              <a:spcAft>
+                <a:spcPts val="800"/>
+              </a:spcAft>
+              <a:defRPr sz="1100" b="1">
+                <a:solidFill>
+                  <a:srgbClr val="10B981"/>
+                </a:solidFill>
+              </a:defRPr>
+            </a:pPr>
+            <a:r>
+              <a:t>✓ Sub-Linear Operational Speed: O(log n) dynamic updates and range queries executed on flat, cache-friendly arrays.</a:t>
+            </a:r>
+          </a:p>
+          <a:p>
+            <a:pPr>
+              <a:spcAft>
+                <a:spcPts val="800"/>
+              </a:spcAft>
+              <a:defRPr sz="1100" b="1">
+                <a:solidFill>
+                  <a:srgbClr val="10B981"/>
+                </a:solidFill>
+              </a:defRPr>
+            </a:pPr>
+            <a:r>
+              <a:t>✓ Standardized Congestion Logic: Strictly enforces Volume &lt; 55 -&gt; NORMAL, Volume &gt;= 55 -&gt; POTENTIALLY CONGESTED.</a:t>
+            </a:r>
+          </a:p>
+          <a:p>
+            <a:pPr>
+              <a:spcAft>
+                <a:spcPts val="800"/>
+              </a:spcAft>
+              <a:defRPr sz="1100" b="1">
+                <a:solidFill>
+                  <a:srgbClr val="10B981"/>
+                </a:solidFill>
+              </a:defRPr>
+            </a:pPr>
+            <a:r>
+              <a:t>✓ Academic Viva Ready: Complete documentation, verified test suite, C++ benchmark, and interactive dashboard fully prepared.</a:t>
+            </a:r>
+          </a:p>
+        </p:txBody>
+      </p:sp>
+      <p:sp>
+        <p:nvSpPr>
+          <p:cNvPr id="7" name="Rounded Rectangle 6"/>
+          <p:cNvSpPr/>
+          <p:nvPr/>
+        </p:nvSpPr>
+        <p:spPr>
+          <a:xfrm>
+            <a:off x="6217920" y="1463040"/>
+            <a:ext cx="5212080" cy="4754880"/>
+          </a:xfrm>
+          <a:prstGeom prst="roundRect">
+            <a:avLst/>
+          </a:prstGeom>
+          <a:solidFill>
+            <a:srgbClr val="1E293B"/>
+          </a:solidFill>
+          <a:ln w="19050">
+            <a:solidFill>
+              <a:srgbClr val="334155"/>
+            </a:solidFill>
+          </a:ln>
+        </p:spPr>
+        <p:style>
+          <a:lnRef idx="1">
+            <a:schemeClr val="accent1"/>
+          </a:lnRef>
+          <a:fillRef idx="3">
+            <a:schemeClr val="accent1"/>
+          </a:fillRef>
+          <a:effectRef idx="2">
+            <a:schemeClr val="accent1"/>
+          </a:effectRef>
+          <a:fontRef idx="minor">
+            <a:schemeClr val="lt1"/>
+          </a:fontRef>
+        </p:style>
+        <p:txBody>
+          <a:bodyPr rtlCol="0" anchor="ctr"/>
+          <a:lstStyle/>
+          <a:p>
+            <a:pPr algn="ctr"/>
+          </a:p>
+        </p:txBody>
+      </p:sp>
+      <p:sp>
+        <p:nvSpPr>
+          <p:cNvPr id="8" name="TextBox 7"/>
+          <p:cNvSpPr txBox="1"/>
+          <p:nvPr/>
+        </p:nvSpPr>
+        <p:spPr>
+          <a:xfrm>
+            <a:off x="6400800" y="1600200"/>
+            <a:ext cx="4846320" cy="411480"/>
+          </a:xfrm>
+          <a:prstGeom prst="rect">
+            <a:avLst/>
+          </a:prstGeom>
+          <a:noFill/>
+        </p:spPr>
+        <p:txBody>
+          <a:bodyPr wrap="square">
+            <a:spAutoFit/>
+          </a:bodyPr>
+          <a:lstStyle/>
+          <a:p>
+            <a:pPr>
               <a:defRPr sz="1300" b="1">
                 <a:solidFill>
-                  <a:srgbClr val="10B981"/>
-                </a:solidFill>
-              </a:defRPr>
-            </a:pPr>
-            <a:r>
-              <a:t>✓ Rigorous Algorithmic Precision: All expected values (Initial BIT [12, 19, 15, 43, 20, 25, 11, 87], rangeSum = 49 NORMAL, Updated BIT [12, 19, 15, 43, 34, 39, 11, 101], rangeSum = 63 POTENTIALLY CONGESTED) verified to 100% precision.</a:t>
-            </a:r>
-          </a:p>
-          <a:p>
-            <a:pPr>
-              <a:spcAft>
-                <a:spcPts val="1200"/>
-              </a:spcAft>
-              <a:defRPr sz="1300" b="1">
-                <a:solidFill>
-                  <a:srgbClr val="10B981"/>
-                </a:solidFill>
-              </a:defRPr>
-            </a:pPr>
-            <a:r>
-              <a:t>✓ Dual-Implementation Fidelity: Independent C++ and JavaScript implementations provide both high-performance compiled logic and intuitive visual interaction.</a:t>
-            </a:r>
-          </a:p>
-          <a:p>
-            <a:pPr>
-              <a:spcAft>
-                <a:spcPts val="1200"/>
-              </a:spcAft>
-              <a:defRPr sz="1300" b="1">
-                <a:solidFill>
-                  <a:srgbClr val="10B981"/>
-                </a:solidFill>
-              </a:defRPr>
-            </a:pPr>
-            <a:r>
-              <a:t>✓ Production-Grade Edge Handling: Complete validation against out-of-bounds queries, negative vehicle numbers, inverted ranges, and exact threshold equality.</a:t>
-            </a:r>
-          </a:p>
-          <a:p>
-            <a:pPr>
-              <a:spcAft>
-                <a:spcPts val="1200"/>
-              </a:spcAft>
-              <a:defRPr sz="1300" b="1">
-                <a:solidFill>
-                  <a:srgbClr val="10B981"/>
-                </a:solidFill>
-              </a:defRPr>
-            </a:pPr>
-            <a:r>
-              <a:t>✓ Evaluation Ready: Code, documentation, test suite, and presentation are fully prepared for academic viva examination.</a:t>
+                  <a:srgbClr val="3B82F6"/>
+                </a:solidFill>
+              </a:defRPr>
+            </a:pPr>
+            <a:r>
+              <a:t>Academic &amp; Technical References</a:t>
+            </a:r>
+          </a:p>
+        </p:txBody>
+      </p:sp>
+      <p:sp>
+        <p:nvSpPr>
+          <p:cNvPr id="9" name="TextBox 8"/>
+          <p:cNvSpPr txBox="1"/>
+          <p:nvPr/>
+        </p:nvSpPr>
+        <p:spPr>
+          <a:xfrm>
+            <a:off x="6400800" y="2011680"/>
+            <a:ext cx="4846320" cy="4023360"/>
+          </a:xfrm>
+          <a:prstGeom prst="rect">
+            <a:avLst/>
+          </a:prstGeom>
+          <a:noFill/>
+        </p:spPr>
+        <p:txBody>
+          <a:bodyPr wrap="square">
+            <a:spAutoFit/>
+          </a:bodyPr>
+          <a:lstStyle/>
+          <a:p/>
+          <a:p>
+            <a:pPr>
+              <a:spcAft>
+                <a:spcPts val="800"/>
+              </a:spcAft>
+              <a:defRPr sz="1100">
+                <a:solidFill>
+                  <a:srgbClr val="F8FAFC"/>
+                </a:solidFill>
+              </a:defRPr>
+            </a:pPr>
+            <a:r>
+              <a:t>1. Peter M. Fenwick (1994). 'A New Data Structure for Cumulative Frequency Tables'. Software: Practice and Experience, 24(3), pp. 327–336.</a:t>
+            </a:r>
+          </a:p>
+          <a:p>
+            <a:pPr>
+              <a:spcAft>
+                <a:spcPts val="800"/>
+              </a:spcAft>
+              <a:defRPr sz="1100">
+                <a:solidFill>
+                  <a:srgbClr val="F8FAFC"/>
+                </a:solidFill>
+              </a:defRPr>
+            </a:pPr>
+            <a:r>
+              <a:t>2. Thomas H. Cormen, Charles E. Leiserson, Ronald L. Rivest, Clifford Stein (2022). 'Introduction to Algorithms' (CLRS), 4th Edition, MIT Press.</a:t>
+            </a:r>
+          </a:p>
+          <a:p>
+            <a:pPr>
+              <a:spcAft>
+                <a:spcPts val="800"/>
+              </a:spcAft>
+              <a:defRPr sz="1100">
+                <a:solidFill>
+                  <a:srgbClr val="F8FAFC"/>
+                </a:solidFill>
+              </a:defRPr>
+            </a:pPr>
+            <a:r>
+              <a:t>3. Donald E. Knuth (1997). 'The Art of Computer Programming, Volume 3: Sorting and Searching', 2nd Edition, Addison-Wesley.</a:t>
+            </a:r>
+          </a:p>
+          <a:p>
+            <a:pPr>
+              <a:spcAft>
+                <a:spcPts val="800"/>
+              </a:spcAft>
+              <a:defRPr sz="1100">
+                <a:solidFill>
+                  <a:srgbClr val="F8FAFC"/>
+                </a:solidFill>
+              </a:defRPr>
+            </a:pPr>
+            <a:r>
+              <a:t>4. ISO/IEC 14882:2017. 'Programming Languages — C++ (C++17 Standard Specification)', International Organization for Standardization.</a:t>
+            </a:r>
+          </a:p>
+          <a:p>
+            <a:pPr>
+              <a:spcAft>
+                <a:spcPts val="800"/>
+              </a:spcAft>
+              <a:defRPr sz="1100">
+                <a:solidFill>
+                  <a:srgbClr val="F8FAFC"/>
+                </a:solidFill>
+              </a:defRPr>
+            </a:pPr>
+            <a:r>
+              <a:t>5. Python Software Foundation. 'Python 3 Standard Library Documentation: http.server and subprocess modules', docs.python.org.</a:t>
             </a:r>
           </a:p>
         </p:txBody>
@@ -5262,7 +7058,7 @@
               </a:defRPr>
             </a:pPr>
             <a:r>
-              <a:t>DSA CASE STUDY EVALUATION</a:t>
+              <a:t>TEAM RESPONSIBILITIES</a:t>
             </a:r>
           </a:p>
         </p:txBody>
@@ -5297,7 +7093,7 @@
               </a:defRPr>
             </a:pPr>
             <a:r>
-              <a:t>Problem Statement: Dynamic Urban Traffic Monitoring</a:t>
+              <a:t>Four-Member Collaborative Architecture &amp; Division of Work</a:t>
             </a:r>
           </a:p>
         </p:txBody>
@@ -5311,7 +7107,7 @@
         <p:spPr>
           <a:xfrm>
             <a:off x="731520" y="1463040"/>
-            <a:ext cx="5120640" cy="4754880"/>
+            <a:ext cx="5212080" cy="2286000"/>
           </a:xfrm>
           <a:prstGeom prst="roundRect">
             <a:avLst/>
@@ -5356,7 +7152,7 @@
         <p:spPr>
           <a:xfrm>
             <a:off x="914400" y="1600200"/>
-            <a:ext cx="4754880" cy="411480"/>
+            <a:ext cx="4846320" cy="411480"/>
           </a:xfrm>
           <a:prstGeom prst="rect">
             <a:avLst/>
@@ -5370,14 +7166,14 @@
           <a:lstStyle/>
           <a:p>
             <a:pPr>
-              <a:defRPr sz="1400" b="1">
+              <a:defRPr sz="1300" b="1">
                 <a:solidFill>
                   <a:srgbClr val="3B82F6"/>
                 </a:solidFill>
               </a:defRPr>
             </a:pPr>
             <a:r>
-              <a:t>The Urban Congestion Challenge</a:t>
+              <a:t>Member 1: Data Management &amp; Tree Initialization</a:t>
             </a:r>
           </a:p>
         </p:txBody>
@@ -5390,8 +7186,8 @@
         </p:nvSpPr>
         <p:spPr>
           <a:xfrm>
-            <a:off x="914400" y="2011680"/>
-            <a:ext cx="4754880" cy="4023360"/>
+            <a:off x="914400" y="1965960"/>
+            <a:ext cx="4846320" cy="1645920"/>
           </a:xfrm>
           <a:prstGeom prst="rect">
             <a:avLst/>
@@ -5403,65 +7199,49 @@
             <a:spAutoFit/>
           </a:bodyPr>
           <a:lstStyle/>
-          <a:p/>
-          <a:p>
-            <a:pPr>
-              <a:spcAft>
-                <a:spcPts val="1200"/>
-              </a:spcAft>
-              <a:defRPr sz="1300">
-                <a:solidFill>
-                  <a:srgbClr val="F8FAFC"/>
-                </a:solidFill>
-              </a:defRPr>
-            </a:pPr>
-            <a:r>
-              <a:t>• Metropolitan road corridors experience high volatility in vehicle density across adjoining segments.</a:t>
-            </a:r>
-          </a:p>
-          <a:p>
-            <a:pPr>
-              <a:spcAft>
-                <a:spcPts val="1200"/>
-              </a:spcAft>
-              <a:defRPr sz="1300">
-                <a:solidFill>
-                  <a:srgbClr val="F8FAFC"/>
-                </a:solidFill>
-              </a:defRPr>
-            </a:pPr>
-            <a:r>
-              <a:t>• Sensors, toll plazas, and inductive loops continuously emit real-time vehicle flow counts.</a:t>
-            </a:r>
-          </a:p>
-          <a:p>
-            <a:pPr>
-              <a:spcAft>
-                <a:spcPts val="1200"/>
-              </a:spcAft>
-              <a:defRPr sz="1300">
-                <a:solidFill>
-                  <a:srgbClr val="F8FAFC"/>
-                </a:solidFill>
-              </a:defRPr>
-            </a:pPr>
-            <a:r>
-              <a:t>• Traffic management authorities must constantly monitor aggregate congestion over flexible sub-corridors [L..R].</a:t>
-            </a:r>
-          </a:p>
-          <a:p>
-            <a:pPr>
-              <a:spcAft>
-                <a:spcPts val="1200"/>
-              </a:spcAft>
-              <a:defRPr sz="1300">
-                <a:solidFill>
-                  <a:srgbClr val="F8FAFC"/>
-                </a:solidFill>
-              </a:defRPr>
-            </a:pPr>
-            <a:r>
-              <a:t>• Threshold violations require immediate detection to trigger adaptive signal timing and diversion warnings.</a:t>
+          <a:p>
+            <a:pPr>
+              <a:spcAft>
+                <a:spcPts val="200"/>
+              </a:spcAft>
+              <a:defRPr sz="1000">
+                <a:solidFill>
+                  <a:srgbClr val="F8FAFC"/>
+                </a:solidFill>
+              </a:defRPr>
+            </a:pPr>
+            <a:r>
+              <a:t>• Formulated 1-based indexing representation for 8 corridor segments.</a:t>
+            </a:r>
+          </a:p>
+          <a:p>
+            <a:pPr>
+              <a:spcAft>
+                <a:spcPts val="200"/>
+              </a:spcAft>
+              <a:defRPr sz="1000">
+                <a:solidFill>
+                  <a:srgbClr val="F8FAFC"/>
+                </a:solidFill>
+              </a:defRPr>
+            </a:pPr>
+            <a:r>
+              <a:t>• Implemented initializeData() handling raw traffic counts vector.</a:t>
+            </a:r>
+          </a:p>
+          <a:p>
+            <a:pPr>
+              <a:spcAft>
+                <a:spcPts val="200"/>
+              </a:spcAft>
+              <a:defRPr sz="1000">
+                <a:solidFill>
+                  <a:srgbClr val="F8FAFC"/>
+                </a:solidFill>
+              </a:defRPr>
+            </a:pPr>
+            <a:r>
+              <a:t>• Engineered O(n) linear-time Fenwick Tree build (buildFenwick()) via forward-propagation technique, avoiding O(n log n) overhead.</a:t>
             </a:r>
           </a:p>
         </p:txBody>
@@ -5475,7 +7255,7 @@
         <p:spPr>
           <a:xfrm>
             <a:off x="6217920" y="1463040"/>
-            <a:ext cx="5212080" cy="4754880"/>
+            <a:ext cx="5212080" cy="2286000"/>
           </a:xfrm>
           <a:prstGeom prst="roundRect">
             <a:avLst/>
@@ -5534,14 +7314,14 @@
           <a:lstStyle/>
           <a:p>
             <a:pPr>
-              <a:defRPr sz="1400" b="1">
+              <a:defRPr sz="1300" b="1">
                 <a:solidFill>
                   <a:srgbClr val="3B82F6"/>
                 </a:solidFill>
               </a:defRPr>
             </a:pPr>
             <a:r>
-              <a:t>Algorithmic Inefficiency Bottlenecks</a:t>
+              <a:t>Member 2: Core Bitwise &amp; Tree Operations</a:t>
             </a:r>
           </a:p>
         </p:txBody>
@@ -5554,8 +7334,8 @@
         </p:nvSpPr>
         <p:spPr>
           <a:xfrm>
-            <a:off x="6400800" y="2011680"/>
-            <a:ext cx="4846320" cy="4023360"/>
+            <a:off x="6400800" y="1965960"/>
+            <a:ext cx="4846320" cy="1645920"/>
           </a:xfrm>
           <a:prstGeom prst="rect">
             <a:avLst/>
@@ -5567,65 +7347,375 @@
             <a:spAutoFit/>
           </a:bodyPr>
           <a:lstStyle/>
-          <a:p/>
-          <a:p>
-            <a:pPr>
-              <a:spcAft>
-                <a:spcPts val="1200"/>
-              </a:spcAft>
-              <a:defRPr sz="1300">
-                <a:solidFill>
-                  <a:srgbClr val="94A3B8"/>
-                </a:solidFill>
-              </a:defRPr>
-            </a:pPr>
-            <a:r>
-              <a:t>• Naive Array Approach: Point updates take O(1), but range queries require O(n) linear scans. Overwhelmed under thousands of queries.</a:t>
-            </a:r>
-          </a:p>
-          <a:p>
-            <a:pPr>
-              <a:spcAft>
-                <a:spcPts val="1200"/>
-              </a:spcAft>
-              <a:defRPr sz="1300">
-                <a:solidFill>
-                  <a:srgbClr val="94A3B8"/>
-                </a:solidFill>
-              </a:defRPr>
-            </a:pPr>
-            <a:r>
-              <a:t>• Static Prefix Sum Array: Range queries take O(1), but every single update cascades across the remaining array taking O(n). Inefficient for live streams.</a:t>
-            </a:r>
-          </a:p>
-          <a:p>
-            <a:pPr>
-              <a:spcAft>
-                <a:spcPts val="1200"/>
-              </a:spcAft>
-              <a:defRPr sz="1300">
-                <a:solidFill>
-                  <a:srgbClr val="94A3B8"/>
-                </a:solidFill>
-              </a:defRPr>
-            </a:pPr>
-            <a:r>
-              <a:t>• The Dilemma: Real-time intelligent transportation requires a balanced data structure that handles both dynamic updates and range queries sub-linearly.</a:t>
-            </a:r>
-          </a:p>
-          <a:p>
-            <a:pPr>
-              <a:spcAft>
-                <a:spcPts val="1200"/>
-              </a:spcAft>
-              <a:defRPr sz="1300">
-                <a:solidFill>
-                  <a:srgbClr val="94A3B8"/>
-                </a:solidFill>
-              </a:defRPr>
-            </a:pPr>
-            <a:r>
-              <a:t>• Critical Requirement: Standardized 1-based indexing with rigorous boundary safety.</a:t>
+          <a:p>
+            <a:pPr>
+              <a:spcAft>
+                <a:spcPts val="200"/>
+              </a:spcAft>
+              <a:defRPr sz="1000">
+                <a:solidFill>
+                  <a:srgbClr val="F8FAFC"/>
+                </a:solidFill>
+              </a:defRPr>
+            </a:pPr>
+            <a:r>
+              <a:t>• Implemented bitwise lowbit(x) = x &amp; (-x) isolating lowest set bit.</a:t>
+            </a:r>
+          </a:p>
+          <a:p>
+            <a:pPr>
+              <a:spcAft>
+                <a:spcPts val="200"/>
+              </a:spcAft>
+              <a:defRPr sz="1000">
+                <a:solidFill>
+                  <a:srgbClr val="F8FAFC"/>
+                </a:solidFill>
+              </a:defRPr>
+            </a:pPr>
+            <a:r>
+              <a:t>• Implemented O(log n) point updates: update(idx, delta) climbing tree.</a:t>
+            </a:r>
+          </a:p>
+          <a:p>
+            <a:pPr>
+              <a:spcAft>
+                <a:spcPts val="200"/>
+              </a:spcAft>
+              <a:defRPr sz="1000">
+                <a:solidFill>
+                  <a:srgbClr val="F8FAFC"/>
+                </a:solidFill>
+              </a:defRPr>
+            </a:pPr>
+            <a:r>
+              <a:t>• Implemented setCount(idx, newCount) absolute setting with delta calculation.</a:t>
+            </a:r>
+          </a:p>
+          <a:p>
+            <a:pPr>
+              <a:spcAft>
+                <a:spcPts val="200"/>
+              </a:spcAft>
+              <a:defRPr sz="1000">
+                <a:solidFill>
+                  <a:srgbClr val="F8FAFC"/>
+                </a:solidFill>
+              </a:defRPr>
+            </a:pPr>
+            <a:r>
+              <a:t>• Implemented O(log n) prefix sum accumulation: prefixSum(idx).</a:t>
+            </a:r>
+          </a:p>
+        </p:txBody>
+      </p:sp>
+      <p:sp>
+        <p:nvSpPr>
+          <p:cNvPr id="10" name="Rounded Rectangle 9"/>
+          <p:cNvSpPr/>
+          <p:nvPr/>
+        </p:nvSpPr>
+        <p:spPr>
+          <a:xfrm>
+            <a:off x="731520" y="3931920"/>
+            <a:ext cx="5212080" cy="2286000"/>
+          </a:xfrm>
+          <a:prstGeom prst="roundRect">
+            <a:avLst/>
+          </a:prstGeom>
+          <a:solidFill>
+            <a:srgbClr val="1E293B"/>
+          </a:solidFill>
+          <a:ln w="19050">
+            <a:solidFill>
+              <a:srgbClr val="334155"/>
+            </a:solidFill>
+          </a:ln>
+        </p:spPr>
+        <p:style>
+          <a:lnRef idx="1">
+            <a:schemeClr val="accent1"/>
+          </a:lnRef>
+          <a:fillRef idx="3">
+            <a:schemeClr val="accent1"/>
+          </a:fillRef>
+          <a:effectRef idx="2">
+            <a:schemeClr val="accent1"/>
+          </a:effectRef>
+          <a:fontRef idx="minor">
+            <a:schemeClr val="lt1"/>
+          </a:fontRef>
+        </p:style>
+        <p:txBody>
+          <a:bodyPr rtlCol="0" anchor="ctr"/>
+          <a:lstStyle/>
+          <a:p>
+            <a:pPr algn="ctr"/>
+          </a:p>
+        </p:txBody>
+      </p:sp>
+      <p:sp>
+        <p:nvSpPr>
+          <p:cNvPr id="11" name="TextBox 10"/>
+          <p:cNvSpPr txBox="1"/>
+          <p:nvPr/>
+        </p:nvSpPr>
+        <p:spPr>
+          <a:xfrm>
+            <a:off x="914400" y="4069080"/>
+            <a:ext cx="4846320" cy="411480"/>
+          </a:xfrm>
+          <a:prstGeom prst="rect">
+            <a:avLst/>
+          </a:prstGeom>
+          <a:noFill/>
+        </p:spPr>
+        <p:txBody>
+          <a:bodyPr wrap="square">
+            <a:spAutoFit/>
+          </a:bodyPr>
+          <a:lstStyle/>
+          <a:p>
+            <a:pPr>
+              <a:defRPr sz="1300" b="1">
+                <a:solidFill>
+                  <a:srgbClr val="3B82F6"/>
+                </a:solidFill>
+              </a:defRPr>
+            </a:pPr>
+            <a:r>
+              <a:t>Member 3: Range Queries &amp; Congestion Detection</a:t>
+            </a:r>
+          </a:p>
+        </p:txBody>
+      </p:sp>
+      <p:sp>
+        <p:nvSpPr>
+          <p:cNvPr id="12" name="TextBox 11"/>
+          <p:cNvSpPr txBox="1"/>
+          <p:nvPr/>
+        </p:nvSpPr>
+        <p:spPr>
+          <a:xfrm>
+            <a:off x="914400" y="4434840"/>
+            <a:ext cx="4846320" cy="1645920"/>
+          </a:xfrm>
+          <a:prstGeom prst="rect">
+            <a:avLst/>
+          </a:prstGeom>
+          <a:noFill/>
+        </p:spPr>
+        <p:txBody>
+          <a:bodyPr wrap="square">
+            <a:spAutoFit/>
+          </a:bodyPr>
+          <a:lstStyle/>
+          <a:p>
+            <a:pPr>
+              <a:spcAft>
+                <a:spcPts val="200"/>
+              </a:spcAft>
+              <a:defRPr sz="1000">
+                <a:solidFill>
+                  <a:srgbClr val="F8FAFC"/>
+                </a:solidFill>
+              </a:defRPr>
+            </a:pPr>
+            <a:r>
+              <a:t>• Implemented corridor range sum: rangeSum(L, R) = prefixSum(R) - prefixSum(L - 1).</a:t>
+            </a:r>
+          </a:p>
+          <a:p>
+            <a:pPr>
+              <a:spcAft>
+                <a:spcPts val="200"/>
+              </a:spcAft>
+              <a:defRPr sz="1000">
+                <a:solidFill>
+                  <a:srgbClr val="F8FAFC"/>
+                </a:solidFill>
+              </a:defRPr>
+            </a:pPr>
+            <a:r>
+              <a:t>• Implemented threshold classification: detectCongestion(sum, threshold).</a:t>
+            </a:r>
+          </a:p>
+          <a:p>
+            <a:pPr>
+              <a:spcAft>
+                <a:spcPts val="200"/>
+              </a:spcAft>
+              <a:defRPr sz="1000">
+                <a:solidFill>
+                  <a:srgbClr val="F8FAFC"/>
+                </a:solidFill>
+              </a:defRPr>
+            </a:pPr>
+            <a:r>
+              <a:t>• Authored non-menu-driven automated C++ demonstration (Steps 1 to 8).</a:t>
+            </a:r>
+          </a:p>
+        </p:txBody>
+      </p:sp>
+      <p:sp>
+        <p:nvSpPr>
+          <p:cNvPr id="13" name="Rounded Rectangle 12"/>
+          <p:cNvSpPr/>
+          <p:nvPr/>
+        </p:nvSpPr>
+        <p:spPr>
+          <a:xfrm>
+            <a:off x="6217920" y="3931920"/>
+            <a:ext cx="5212080" cy="2286000"/>
+          </a:xfrm>
+          <a:prstGeom prst="roundRect">
+            <a:avLst/>
+          </a:prstGeom>
+          <a:solidFill>
+            <a:srgbClr val="1E293B"/>
+          </a:solidFill>
+          <a:ln w="19050">
+            <a:solidFill>
+              <a:srgbClr val="334155"/>
+            </a:solidFill>
+          </a:ln>
+        </p:spPr>
+        <p:style>
+          <a:lnRef idx="1">
+            <a:schemeClr val="accent1"/>
+          </a:lnRef>
+          <a:fillRef idx="3">
+            <a:schemeClr val="accent1"/>
+          </a:fillRef>
+          <a:effectRef idx="2">
+            <a:schemeClr val="accent1"/>
+          </a:effectRef>
+          <a:fontRef idx="minor">
+            <a:schemeClr val="lt1"/>
+          </a:fontRef>
+        </p:style>
+        <p:txBody>
+          <a:bodyPr rtlCol="0" anchor="ctr"/>
+          <a:lstStyle/>
+          <a:p>
+            <a:pPr algn="ctr"/>
+          </a:p>
+        </p:txBody>
+      </p:sp>
+      <p:sp>
+        <p:nvSpPr>
+          <p:cNvPr id="14" name="TextBox 13"/>
+          <p:cNvSpPr txBox="1"/>
+          <p:nvPr/>
+        </p:nvSpPr>
+        <p:spPr>
+          <a:xfrm>
+            <a:off x="6400800" y="4069080"/>
+            <a:ext cx="4846320" cy="411480"/>
+          </a:xfrm>
+          <a:prstGeom prst="rect">
+            <a:avLst/>
+          </a:prstGeom>
+          <a:noFill/>
+        </p:spPr>
+        <p:txBody>
+          <a:bodyPr wrap="square">
+            <a:spAutoFit/>
+          </a:bodyPr>
+          <a:lstStyle/>
+          <a:p>
+            <a:pPr>
+              <a:defRPr sz="1300" b="1">
+                <a:solidFill>
+                  <a:srgbClr val="3B82F6"/>
+                </a:solidFill>
+              </a:defRPr>
+            </a:pPr>
+            <a:r>
+              <a:t>Member 4: Dashboard Integration, Testing &amp; Parity</a:t>
+            </a:r>
+          </a:p>
+        </p:txBody>
+      </p:sp>
+      <p:sp>
+        <p:nvSpPr>
+          <p:cNvPr id="15" name="TextBox 14"/>
+          <p:cNvSpPr txBox="1"/>
+          <p:nvPr/>
+        </p:nvSpPr>
+        <p:spPr>
+          <a:xfrm>
+            <a:off x="6400800" y="4434840"/>
+            <a:ext cx="4846320" cy="1645920"/>
+          </a:xfrm>
+          <a:prstGeom prst="rect">
+            <a:avLst/>
+          </a:prstGeom>
+          <a:noFill/>
+        </p:spPr>
+        <p:txBody>
+          <a:bodyPr wrap="square">
+            <a:spAutoFit/>
+          </a:bodyPr>
+          <a:lstStyle/>
+          <a:p>
+            <a:pPr>
+              <a:spcAft>
+                <a:spcPts val="200"/>
+              </a:spcAft>
+              <a:defRPr sz="1000">
+                <a:solidFill>
+                  <a:srgbClr val="F8FAFC"/>
+                </a:solidFill>
+              </a:defRPr>
+            </a:pPr>
+            <a:r>
+              <a:t>• Designed lightweight Python HTTP server (server.py) bridging browser to C++ binary.</a:t>
+            </a:r>
+          </a:p>
+          <a:p>
+            <a:pPr>
+              <a:spcAft>
+                <a:spcPts val="200"/>
+              </a:spcAft>
+              <a:defRPr sz="1000">
+                <a:solidFill>
+                  <a:srgbClr val="F8FAFC"/>
+                </a:solidFill>
+              </a:defRPr>
+            </a:pPr>
+            <a:r>
+              <a:t>• Enhanced web dashboard UI (card selection, active range tags, ancestor path tracing).</a:t>
+            </a:r>
+          </a:p>
+          <a:p>
+            <a:pPr>
+              <a:spcAft>
+                <a:spcPts val="200"/>
+              </a:spcAft>
+              <a:defRPr sz="1000">
+                <a:solidFill>
+                  <a:srgbClr val="F8FAFC"/>
+                </a:solidFill>
+              </a:defRPr>
+            </a:pPr>
+            <a:r>
+              <a:t>• Standardized threshold logic (&lt; 55 -&gt; NORMAL, &gt;= 55 -&gt; POTENTIALLY CONGESTED).</a:t>
+            </a:r>
+          </a:p>
+          <a:p>
+            <a:pPr>
+              <a:spcAft>
+                <a:spcPts val="200"/>
+              </a:spcAft>
+              <a:defRPr sz="1000">
+                <a:solidFill>
+                  <a:srgbClr val="F8FAFC"/>
+                </a:solidFill>
+              </a:defRPr>
+            </a:pPr>
+            <a:r>
+              <a:t>• Engineered comprehensive 32-case automated test suite (test_flowgrid.py).</a:t>
             </a:r>
           </a:p>
         </p:txBody>
@@ -5721,7 +7811,7 @@
               </a:defRPr>
             </a:pPr>
             <a:r>
-              <a:t>Project Objectives &amp; Scope</a:t>
+              <a:t>Problem Statement: Dynamic Urban Traffic Monitoring</a:t>
             </a:r>
           </a:p>
         </p:txBody>
@@ -5735,7 +7825,7 @@
         <p:spPr>
           <a:xfrm>
             <a:off x="731520" y="1463040"/>
-            <a:ext cx="5212080" cy="2194560"/>
+            <a:ext cx="5120640" cy="4754880"/>
           </a:xfrm>
           <a:prstGeom prst="roundRect">
             <a:avLst/>
@@ -5780,7 +7870,7 @@
         <p:spPr>
           <a:xfrm>
             <a:off x="914400" y="1600200"/>
-            <a:ext cx="4846320" cy="411480"/>
+            <a:ext cx="4754880" cy="411480"/>
           </a:xfrm>
           <a:prstGeom prst="rect">
             <a:avLst/>
@@ -5794,14 +7884,14 @@
           <a:lstStyle/>
           <a:p>
             <a:pPr>
-              <a:defRPr sz="1400" b="1">
+              <a:defRPr sz="1300" b="1">
                 <a:solidFill>
                   <a:srgbClr val="3B82F6"/>
                 </a:solidFill>
               </a:defRPr>
             </a:pPr>
             <a:r>
-              <a:t>1. Core DSA Implementation</a:t>
+              <a:t>The Urban Congestion Challenge</a:t>
             </a:r>
           </a:p>
         </p:txBody>
@@ -5814,8 +7904,8 @@
         </p:nvSpPr>
         <p:spPr>
           <a:xfrm>
-            <a:off x="914400" y="2057400"/>
-            <a:ext cx="4846320" cy="1463040"/>
+            <a:off x="914400" y="2011680"/>
+            <a:ext cx="4754880" cy="4023360"/>
           </a:xfrm>
           <a:prstGeom prst="rect">
             <a:avLst/>
@@ -5827,16 +7917,65 @@
             <a:spAutoFit/>
           </a:bodyPr>
           <a:lstStyle/>
-          <a:p>
-            <a:pPr>
-              <a:defRPr sz="1300">
-                <a:solidFill>
-                  <a:srgbClr val="F8FAFC"/>
-                </a:solidFill>
-              </a:defRPr>
-            </a:pPr>
-            <a:r>
-              <a:t>Design and verify a one-based Fenwick Tree (BIT) in standard C++ with zero menu-driven dependency, executing automated demonstration benchmarks.</a:t>
+          <a:p/>
+          <a:p>
+            <a:pPr>
+              <a:spcAft>
+                <a:spcPts val="1000"/>
+              </a:spcAft>
+              <a:defRPr sz="1200">
+                <a:solidFill>
+                  <a:srgbClr val="F8FAFC"/>
+                </a:solidFill>
+              </a:defRPr>
+            </a:pPr>
+            <a:r>
+              <a:t>• Metropolitan road corridors experience high volatility in vehicular density across adjoining segments due to rush hours, traffic signals, and incidents.</a:t>
+            </a:r>
+          </a:p>
+          <a:p>
+            <a:pPr>
+              <a:spcAft>
+                <a:spcPts val="1000"/>
+              </a:spcAft>
+              <a:defRPr sz="1200">
+                <a:solidFill>
+                  <a:srgbClr val="F8FAFC"/>
+                </a:solidFill>
+              </a:defRPr>
+            </a:pPr>
+            <a:r>
+              <a:t>• Road sensor counters report instantaneous volume changes that must be ingested without lagging.</a:t>
+            </a:r>
+          </a:p>
+          <a:p>
+            <a:pPr>
+              <a:spcAft>
+                <a:spcPts val="1000"/>
+              </a:spcAft>
+              <a:defRPr sz="1200">
+                <a:solidFill>
+                  <a:srgbClr val="F8FAFC"/>
+                </a:solidFill>
+              </a:defRPr>
+            </a:pPr>
+            <a:r>
+              <a:t>• Traffic management authorities need real-time cumulative volume queries over flexible sub-corridors [L..R] to deploy emergency signals and dynamic rerouting.</a:t>
+            </a:r>
+          </a:p>
+          <a:p>
+            <a:pPr>
+              <a:spcAft>
+                <a:spcPts val="1000"/>
+              </a:spcAft>
+              <a:defRPr sz="1200">
+                <a:solidFill>
+                  <a:srgbClr val="F8FAFC"/>
+                </a:solidFill>
+              </a:defRPr>
+            </a:pPr>
+            <a:r>
+              <a:t>• Threshold rule violations require immediate algorithmic detection to alert operators before physical gridlock occurs.</a:t>
             </a:r>
           </a:p>
         </p:txBody>
@@ -5850,7 +7989,7 @@
         <p:spPr>
           <a:xfrm>
             <a:off x="6217920" y="1463040"/>
-            <a:ext cx="5212080" cy="2194560"/>
+            <a:ext cx="5212080" cy="4754880"/>
           </a:xfrm>
           <a:prstGeom prst="roundRect">
             <a:avLst/>
@@ -5909,14 +8048,14 @@
           <a:lstStyle/>
           <a:p>
             <a:pPr>
-              <a:defRPr sz="1400" b="1">
+              <a:defRPr sz="1300" b="1">
                 <a:solidFill>
                   <a:srgbClr val="3B82F6"/>
                 </a:solidFill>
               </a:defRPr>
             </a:pPr>
             <a:r>
-              <a:t>2. Dual-Array Architecture</a:t>
+              <a:t>Algorithmic Inefficiency of Classical Arrays</a:t>
             </a:r>
           </a:p>
         </p:txBody>
@@ -5929,8 +8068,8 @@
         </p:nvSpPr>
         <p:spPr>
           <a:xfrm>
-            <a:off x="6400800" y="2057400"/>
-            <a:ext cx="4846320" cy="1463040"/>
+            <a:off x="6400800" y="2011680"/>
+            <a:ext cx="4846320" cy="4023360"/>
           </a:xfrm>
           <a:prstGeom prst="rect">
             <a:avLst/>
@@ -5942,246 +8081,65 @@
             <a:spAutoFit/>
           </a:bodyPr>
           <a:lstStyle/>
-          <a:p>
-            <a:pPr>
-              <a:defRPr sz="1300">
-                <a:solidFill>
-                  <a:srgbClr val="F8FAFC"/>
-                </a:solidFill>
-              </a:defRPr>
-            </a:pPr>
-            <a:r>
-              <a:t>Maintain clean architectural separation between raw traffic counts array (trafficCounts[1..n]) and the cumulative BIT array (bit[1..n]).</a:t>
-            </a:r>
-          </a:p>
-        </p:txBody>
-      </p:sp>
-      <p:sp>
-        <p:nvSpPr>
-          <p:cNvPr id="10" name="Rounded Rectangle 9"/>
-          <p:cNvSpPr/>
-          <p:nvPr/>
-        </p:nvSpPr>
-        <p:spPr>
-          <a:xfrm>
-            <a:off x="731520" y="3931920"/>
-            <a:ext cx="5212080" cy="2194560"/>
-          </a:xfrm>
-          <a:prstGeom prst="roundRect">
-            <a:avLst/>
-          </a:prstGeom>
-          <a:solidFill>
-            <a:srgbClr val="1E293B"/>
-          </a:solidFill>
-          <a:ln w="19050">
-            <a:solidFill>
-              <a:srgbClr val="334155"/>
-            </a:solidFill>
-          </a:ln>
-        </p:spPr>
-        <p:style>
-          <a:lnRef idx="1">
-            <a:schemeClr val="accent1"/>
-          </a:lnRef>
-          <a:fillRef idx="3">
-            <a:schemeClr val="accent1"/>
-          </a:fillRef>
-          <a:effectRef idx="2">
-            <a:schemeClr val="accent1"/>
-          </a:effectRef>
-          <a:fontRef idx="minor">
-            <a:schemeClr val="lt1"/>
-          </a:fontRef>
-        </p:style>
-        <p:txBody>
-          <a:bodyPr rtlCol="0" anchor="ctr"/>
-          <a:lstStyle/>
-          <a:p>
-            <a:pPr algn="ctr"/>
-          </a:p>
-        </p:txBody>
-      </p:sp>
-      <p:sp>
-        <p:nvSpPr>
-          <p:cNvPr id="11" name="TextBox 10"/>
-          <p:cNvSpPr txBox="1"/>
-          <p:nvPr/>
-        </p:nvSpPr>
-        <p:spPr>
-          <a:xfrm>
-            <a:off x="914400" y="4069080"/>
-            <a:ext cx="4846320" cy="411480"/>
-          </a:xfrm>
-          <a:prstGeom prst="rect">
-            <a:avLst/>
-          </a:prstGeom>
-          <a:noFill/>
-        </p:spPr>
-        <p:txBody>
-          <a:bodyPr wrap="square">
-            <a:spAutoFit/>
-          </a:bodyPr>
-          <a:lstStyle/>
-          <a:p>
-            <a:pPr>
-              <a:defRPr sz="1400" b="1">
-                <a:solidFill>
-                  <a:srgbClr val="3B82F6"/>
-                </a:solidFill>
-              </a:defRPr>
-            </a:pPr>
-            <a:r>
-              <a:t>3. Dynamic Point Updates</a:t>
-            </a:r>
-          </a:p>
-        </p:txBody>
-      </p:sp>
-      <p:sp>
-        <p:nvSpPr>
-          <p:cNvPr id="12" name="TextBox 11"/>
-          <p:cNvSpPr txBox="1"/>
-          <p:nvPr/>
-        </p:nvSpPr>
-        <p:spPr>
-          <a:xfrm>
-            <a:off x="914400" y="4526280"/>
-            <a:ext cx="4846320" cy="1463040"/>
-          </a:xfrm>
-          <a:prstGeom prst="rect">
-            <a:avLst/>
-          </a:prstGeom>
-          <a:noFill/>
-        </p:spPr>
-        <p:txBody>
-          <a:bodyPr wrap="square">
-            <a:spAutoFit/>
-          </a:bodyPr>
-          <a:lstStyle/>
-          <a:p>
-            <a:pPr>
-              <a:defRPr sz="1300">
-                <a:solidFill>
-                  <a:srgbClr val="F8FAFC"/>
-                </a:solidFill>
-              </a:defRPr>
-            </a:pPr>
-            <a:r>
-              <a:t>Implement O(log n) point update and setCount operations to dynamically handle traffic surges, bottlenecks, and sensor updates.</a:t>
-            </a:r>
-          </a:p>
-        </p:txBody>
-      </p:sp>
-      <p:sp>
-        <p:nvSpPr>
-          <p:cNvPr id="13" name="Rounded Rectangle 12"/>
-          <p:cNvSpPr/>
-          <p:nvPr/>
-        </p:nvSpPr>
-        <p:spPr>
-          <a:xfrm>
-            <a:off x="6217920" y="3931920"/>
-            <a:ext cx="5212080" cy="2194560"/>
-          </a:xfrm>
-          <a:prstGeom prst="roundRect">
-            <a:avLst/>
-          </a:prstGeom>
-          <a:solidFill>
-            <a:srgbClr val="1E293B"/>
-          </a:solidFill>
-          <a:ln w="19050">
-            <a:solidFill>
-              <a:srgbClr val="334155"/>
-            </a:solidFill>
-          </a:ln>
-        </p:spPr>
-        <p:style>
-          <a:lnRef idx="1">
-            <a:schemeClr val="accent1"/>
-          </a:lnRef>
-          <a:fillRef idx="3">
-            <a:schemeClr val="accent1"/>
-          </a:fillRef>
-          <a:effectRef idx="2">
-            <a:schemeClr val="accent1"/>
-          </a:effectRef>
-          <a:fontRef idx="minor">
-            <a:schemeClr val="lt1"/>
-          </a:fontRef>
-        </p:style>
-        <p:txBody>
-          <a:bodyPr rtlCol="0" anchor="ctr"/>
-          <a:lstStyle/>
-          <a:p>
-            <a:pPr algn="ctr"/>
-          </a:p>
-        </p:txBody>
-      </p:sp>
-      <p:sp>
-        <p:nvSpPr>
-          <p:cNvPr id="14" name="TextBox 13"/>
-          <p:cNvSpPr txBox="1"/>
-          <p:nvPr/>
-        </p:nvSpPr>
-        <p:spPr>
-          <a:xfrm>
-            <a:off x="6400800" y="4069080"/>
-            <a:ext cx="4846320" cy="411480"/>
-          </a:xfrm>
-          <a:prstGeom prst="rect">
-            <a:avLst/>
-          </a:prstGeom>
-          <a:noFill/>
-        </p:spPr>
-        <p:txBody>
-          <a:bodyPr wrap="square">
-            <a:spAutoFit/>
-          </a:bodyPr>
-          <a:lstStyle/>
-          <a:p>
-            <a:pPr>
-              <a:defRPr sz="1400" b="1">
-                <a:solidFill>
-                  <a:srgbClr val="3B82F6"/>
-                </a:solidFill>
-              </a:defRPr>
-            </a:pPr>
-            <a:r>
-              <a:t>4. Real-Time Thresholding</a:t>
-            </a:r>
-          </a:p>
-        </p:txBody>
-      </p:sp>
-      <p:sp>
-        <p:nvSpPr>
-          <p:cNvPr id="15" name="TextBox 14"/>
-          <p:cNvSpPr txBox="1"/>
-          <p:nvPr/>
-        </p:nvSpPr>
-        <p:spPr>
-          <a:xfrm>
-            <a:off x="6400800" y="4526280"/>
-            <a:ext cx="4846320" cy="1463040"/>
-          </a:xfrm>
-          <a:prstGeom prst="rect">
-            <a:avLst/>
-          </a:prstGeom>
-          <a:noFill/>
-        </p:spPr>
-        <p:txBody>
-          <a:bodyPr wrap="square">
-            <a:spAutoFit/>
-          </a:bodyPr>
-          <a:lstStyle/>
-          <a:p>
-            <a:pPr>
-              <a:defRPr sz="1300">
-                <a:solidFill>
-                  <a:srgbClr val="F8FAFC"/>
-                </a:solidFill>
-              </a:defRPr>
-            </a:pPr>
-            <a:r>
-              <a:t>Provide O(log n) range sum aggregation (rangeSum(L, R)) to classify corridor status as NORMAL or POTENTIALLY CONGESTED against threshold limits.</a:t>
+          <a:p/>
+          <a:p>
+            <a:pPr>
+              <a:spcAft>
+                <a:spcPts val="1000"/>
+              </a:spcAft>
+              <a:defRPr sz="1200">
+                <a:solidFill>
+                  <a:srgbClr val="94A3B8"/>
+                </a:solidFill>
+              </a:defRPr>
+            </a:pPr>
+            <a:r>
+              <a:t>• Naive Array Approach: Point updates take O(1), but range queries require O(n) linear scans. Severely degraded performance under thousands of queries.</a:t>
+            </a:r>
+          </a:p>
+          <a:p>
+            <a:pPr>
+              <a:spcAft>
+                <a:spcPts val="1000"/>
+              </a:spcAft>
+              <a:defRPr sz="1200">
+                <a:solidFill>
+                  <a:srgbClr val="94A3B8"/>
+                </a:solidFill>
+              </a:defRPr>
+            </a:pPr>
+            <a:r>
+              <a:t>• Static Prefix Sum Array: Range queries take O(1), but a single point update cascades across all subsequent indices, taking O(n) time. Unusable for live traffic streams.</a:t>
+            </a:r>
+          </a:p>
+          <a:p>
+            <a:pPr>
+              <a:spcAft>
+                <a:spcPts val="1000"/>
+              </a:spcAft>
+              <a:defRPr sz="1200">
+                <a:solidFill>
+                  <a:srgbClr val="94A3B8"/>
+                </a:solidFill>
+              </a:defRPr>
+            </a:pPr>
+            <a:r>
+              <a:t>• The Algorithmic Dilemma: Real-time traffic monitoring requires a balanced data structure supporting BOTH point updates and range queries sub-linearly in O(log n).</a:t>
+            </a:r>
+          </a:p>
+          <a:p>
+            <a:pPr>
+              <a:spcAft>
+                <a:spcPts val="1000"/>
+              </a:spcAft>
+              <a:defRPr sz="1200">
+                <a:solidFill>
+                  <a:srgbClr val="94A3B8"/>
+                </a:solidFill>
+              </a:defRPr>
+            </a:pPr>
+            <a:r>
+              <a:t>• Rigorous Constraints: Strict 1-based indexing, minimal auxiliary memory, zero pointer chasing, and robust boundary safety validation.</a:t>
             </a:r>
           </a:p>
         </p:txBody>
@@ -6277,7 +8235,7 @@
               </a:defRPr>
             </a:pPr>
             <a:r>
-              <a:t>Proposed Solution: FlowGrid Architecture</a:t>
+              <a:t>Project Objectives &amp; Scope of Engineering</a:t>
             </a:r>
           </a:p>
         </p:txBody>
@@ -6291,7 +8249,7 @@
         <p:spPr>
           <a:xfrm>
             <a:off x="731520" y="1463040"/>
-            <a:ext cx="10698480" cy="4754880"/>
+            <a:ext cx="5212080" cy="2286000"/>
           </a:xfrm>
           <a:prstGeom prst="roundRect">
             <a:avLst/>
@@ -6336,7 +8294,7 @@
         <p:spPr>
           <a:xfrm>
             <a:off x="914400" y="1600200"/>
-            <a:ext cx="10332720" cy="411480"/>
+            <a:ext cx="4846320" cy="411480"/>
           </a:xfrm>
           <a:prstGeom prst="rect">
             <a:avLst/>
@@ -6350,14 +8308,14 @@
           <a:lstStyle/>
           <a:p>
             <a:pPr>
-              <a:defRPr sz="1400" b="1">
+              <a:defRPr sz="1300" b="1">
                 <a:solidFill>
                   <a:srgbClr val="3B82F6"/>
                 </a:solidFill>
               </a:defRPr>
             </a:pPr>
             <a:r>
-              <a:t>System Pipeline &amp; Operational Workflow</a:t>
+              <a:t>1. Core C++17 Fenwick Tree Engine</a:t>
             </a:r>
           </a:p>
         </p:txBody>
@@ -6370,8 +8328,8 @@
         </p:nvSpPr>
         <p:spPr>
           <a:xfrm>
-            <a:off x="1005840" y="2103120"/>
-            <a:ext cx="10149840" cy="3840480"/>
+            <a:off x="914400" y="2057400"/>
+            <a:ext cx="4846320" cy="1554480"/>
           </a:xfrm>
           <a:prstGeom prst="rect">
             <a:avLst/>
@@ -6383,80 +8341,361 @@
             <a:spAutoFit/>
           </a:bodyPr>
           <a:lstStyle/>
-          <a:p/>
-          <a:p>
-            <a:pPr>
-              <a:spcAft>
-                <a:spcPts val="1000"/>
-              </a:spcAft>
-              <a:defRPr sz="1300">
-                <a:solidFill>
-                  <a:srgbClr val="F8FAFC"/>
-                </a:solidFill>
-              </a:defRPr>
-            </a:pPr>
-            <a:r>
-              <a:t>Layer 1: Sensor Inflow Array — Original vehicle counts stored in an independent vector trafficCounts[1..n]. Non-negative validation enforced.</a:t>
-            </a:r>
-          </a:p>
-          <a:p>
-            <a:pPr>
-              <a:spcAft>
-                <a:spcPts val="1000"/>
-              </a:spcAft>
-              <a:defRPr sz="1300">
-                <a:solidFill>
-                  <a:srgbClr val="F8FAFC"/>
-                </a:solidFill>
-              </a:defRPr>
-            </a:pPr>
-            <a:r>
-              <a:t>Layer 2: Fenwick Tree (BIT) Engine — Constructed in O(n) time. Implements bit[i] storing prefix intervals determined by the lowbit(i) = i &amp; (-i) bitwise operator.</a:t>
-            </a:r>
-          </a:p>
-          <a:p>
-            <a:pPr>
-              <a:spcAft>
-                <a:spcPts val="1000"/>
-              </a:spcAft>
-              <a:defRPr sz="1300">
-                <a:solidFill>
-                  <a:srgbClr val="F8FAFC"/>
-                </a:solidFill>
-              </a:defRPr>
-            </a:pPr>
-            <a:r>
-              <a:t>Layer 3: Analytical Query Layer — Corridor range query [L..R] computed in O(log n) time by evaluating prefixSum(R) - prefixSum(L - 1).</a:t>
-            </a:r>
-          </a:p>
-          <a:p>
-            <a:pPr>
-              <a:spcAft>
-                <a:spcPts val="1000"/>
-              </a:spcAft>
-              <a:defRPr sz="1300">
-                <a:solidFill>
-                  <a:srgbClr val="F8FAFC"/>
-                </a:solidFill>
-              </a:defRPr>
-            </a:pPr>
-            <a:r>
-              <a:t>Layer 4: Congestion Classifier — Compares aggregate vehicle volume against dynamic threshold. Emits NORMAL (&lt;= threshold) or POTENTIALLY CONGESTED (&gt; threshold).</a:t>
-            </a:r>
-          </a:p>
-          <a:p>
-            <a:pPr>
-              <a:spcAft>
-                <a:spcPts val="1000"/>
-              </a:spcAft>
-              <a:defRPr sz="1300">
-                <a:solidFill>
-                  <a:srgbClr val="F8FAFC"/>
-                </a:solidFill>
-              </a:defRPr>
-            </a:pPr>
-            <a:r>
-              <a:t>Layer 5: Presentation &amp; Dashboard — Standard automated C++ console benchmark paired with a client-side visual dashboard (FlowGrid) for intuitive demonstration.</a:t>
+          <a:p>
+            <a:pPr>
+              <a:defRPr sz="1200">
+                <a:solidFill>
+                  <a:srgbClr val="F8FAFC"/>
+                </a:solidFill>
+              </a:defRPr>
+            </a:pPr>
+            <a:r>
+              <a:t>Implement a mathematically verified, standard C++17 Binary Indexed Tree with strict 1-based indexing, boundary safety checks, and an automated non-menu benchmark suite.</a:t>
+            </a:r>
+          </a:p>
+        </p:txBody>
+      </p:sp>
+      <p:sp>
+        <p:nvSpPr>
+          <p:cNvPr id="7" name="Rounded Rectangle 6"/>
+          <p:cNvSpPr/>
+          <p:nvPr/>
+        </p:nvSpPr>
+        <p:spPr>
+          <a:xfrm>
+            <a:off x="6217920" y="1463040"/>
+            <a:ext cx="5212080" cy="2286000"/>
+          </a:xfrm>
+          <a:prstGeom prst="roundRect">
+            <a:avLst/>
+          </a:prstGeom>
+          <a:solidFill>
+            <a:srgbClr val="1E293B"/>
+          </a:solidFill>
+          <a:ln w="19050">
+            <a:solidFill>
+              <a:srgbClr val="334155"/>
+            </a:solidFill>
+          </a:ln>
+        </p:spPr>
+        <p:style>
+          <a:lnRef idx="1">
+            <a:schemeClr val="accent1"/>
+          </a:lnRef>
+          <a:fillRef idx="3">
+            <a:schemeClr val="accent1"/>
+          </a:fillRef>
+          <a:effectRef idx="2">
+            <a:schemeClr val="accent1"/>
+          </a:effectRef>
+          <a:fontRef idx="minor">
+            <a:schemeClr val="lt1"/>
+          </a:fontRef>
+        </p:style>
+        <p:txBody>
+          <a:bodyPr rtlCol="0" anchor="ctr"/>
+          <a:lstStyle/>
+          <a:p>
+            <a:pPr algn="ctr"/>
+          </a:p>
+        </p:txBody>
+      </p:sp>
+      <p:sp>
+        <p:nvSpPr>
+          <p:cNvPr id="8" name="TextBox 7"/>
+          <p:cNvSpPr txBox="1"/>
+          <p:nvPr/>
+        </p:nvSpPr>
+        <p:spPr>
+          <a:xfrm>
+            <a:off x="6400800" y="1600200"/>
+            <a:ext cx="4846320" cy="411480"/>
+          </a:xfrm>
+          <a:prstGeom prst="rect">
+            <a:avLst/>
+          </a:prstGeom>
+          <a:noFill/>
+        </p:spPr>
+        <p:txBody>
+          <a:bodyPr wrap="square">
+            <a:spAutoFit/>
+          </a:bodyPr>
+          <a:lstStyle/>
+          <a:p>
+            <a:pPr>
+              <a:defRPr sz="1300" b="1">
+                <a:solidFill>
+                  <a:srgbClr val="3B82F6"/>
+                </a:solidFill>
+              </a:defRPr>
+            </a:pPr>
+            <a:r>
+              <a:t>2. Dual-Array Architecture</a:t>
+            </a:r>
+          </a:p>
+        </p:txBody>
+      </p:sp>
+      <p:sp>
+        <p:nvSpPr>
+          <p:cNvPr id="9" name="TextBox 8"/>
+          <p:cNvSpPr txBox="1"/>
+          <p:nvPr/>
+        </p:nvSpPr>
+        <p:spPr>
+          <a:xfrm>
+            <a:off x="6400800" y="2057400"/>
+            <a:ext cx="4846320" cy="1554480"/>
+          </a:xfrm>
+          <a:prstGeom prst="rect">
+            <a:avLst/>
+          </a:prstGeom>
+          <a:noFill/>
+        </p:spPr>
+        <p:txBody>
+          <a:bodyPr wrap="square">
+            <a:spAutoFit/>
+          </a:bodyPr>
+          <a:lstStyle/>
+          <a:p>
+            <a:pPr>
+              <a:defRPr sz="1200">
+                <a:solidFill>
+                  <a:srgbClr val="F8FAFC"/>
+                </a:solidFill>
+              </a:defRPr>
+            </a:pPr>
+            <a:r>
+              <a:t>Maintain clean decoupling between raw traffic sensor counts (trafficCounts[1..n]) and pre-calculated partial sum nodes (bit[1..n]) using strictly O(n) space.</a:t>
+            </a:r>
+          </a:p>
+        </p:txBody>
+      </p:sp>
+      <p:sp>
+        <p:nvSpPr>
+          <p:cNvPr id="10" name="Rounded Rectangle 9"/>
+          <p:cNvSpPr/>
+          <p:nvPr/>
+        </p:nvSpPr>
+        <p:spPr>
+          <a:xfrm>
+            <a:off x="731520" y="3931920"/>
+            <a:ext cx="5212080" cy="2286000"/>
+          </a:xfrm>
+          <a:prstGeom prst="roundRect">
+            <a:avLst/>
+          </a:prstGeom>
+          <a:solidFill>
+            <a:srgbClr val="1E293B"/>
+          </a:solidFill>
+          <a:ln w="19050">
+            <a:solidFill>
+              <a:srgbClr val="334155"/>
+            </a:solidFill>
+          </a:ln>
+        </p:spPr>
+        <p:style>
+          <a:lnRef idx="1">
+            <a:schemeClr val="accent1"/>
+          </a:lnRef>
+          <a:fillRef idx="3">
+            <a:schemeClr val="accent1"/>
+          </a:fillRef>
+          <a:effectRef idx="2">
+            <a:schemeClr val="accent1"/>
+          </a:effectRef>
+          <a:fontRef idx="minor">
+            <a:schemeClr val="lt1"/>
+          </a:fontRef>
+        </p:style>
+        <p:txBody>
+          <a:bodyPr rtlCol="0" anchor="ctr"/>
+          <a:lstStyle/>
+          <a:p>
+            <a:pPr algn="ctr"/>
+          </a:p>
+        </p:txBody>
+      </p:sp>
+      <p:sp>
+        <p:nvSpPr>
+          <p:cNvPr id="11" name="TextBox 10"/>
+          <p:cNvSpPr txBox="1"/>
+          <p:nvPr/>
+        </p:nvSpPr>
+        <p:spPr>
+          <a:xfrm>
+            <a:off x="914400" y="4069080"/>
+            <a:ext cx="4846320" cy="411480"/>
+          </a:xfrm>
+          <a:prstGeom prst="rect">
+            <a:avLst/>
+          </a:prstGeom>
+          <a:noFill/>
+        </p:spPr>
+        <p:txBody>
+          <a:bodyPr wrap="square">
+            <a:spAutoFit/>
+          </a:bodyPr>
+          <a:lstStyle/>
+          <a:p>
+            <a:pPr>
+              <a:defRPr sz="1300" b="1">
+                <a:solidFill>
+                  <a:srgbClr val="3B82F6"/>
+                </a:solidFill>
+              </a:defRPr>
+            </a:pPr>
+            <a:r>
+              <a:t>3. Sub-Linear Operations (O(log n))</a:t>
+            </a:r>
+          </a:p>
+        </p:txBody>
+      </p:sp>
+      <p:sp>
+        <p:nvSpPr>
+          <p:cNvPr id="12" name="TextBox 11"/>
+          <p:cNvSpPr txBox="1"/>
+          <p:nvPr/>
+        </p:nvSpPr>
+        <p:spPr>
+          <a:xfrm>
+            <a:off x="914400" y="4526280"/>
+            <a:ext cx="4846320" cy="1554480"/>
+          </a:xfrm>
+          <a:prstGeom prst="rect">
+            <a:avLst/>
+          </a:prstGeom>
+          <a:noFill/>
+        </p:spPr>
+        <p:txBody>
+          <a:bodyPr wrap="square">
+            <a:spAutoFit/>
+          </a:bodyPr>
+          <a:lstStyle/>
+          <a:p>
+            <a:pPr>
+              <a:defRPr sz="1200">
+                <a:solidFill>
+                  <a:srgbClr val="F8FAFC"/>
+                </a:solidFill>
+              </a:defRPr>
+            </a:pPr>
+            <a:r>
+              <a:t>Guarantee O(log n) time bounds for point updates (update / setCount) and corridor range queries (rangeSum(L, R)) using lowbit binary decomposition.</a:t>
+            </a:r>
+          </a:p>
+        </p:txBody>
+      </p:sp>
+      <p:sp>
+        <p:nvSpPr>
+          <p:cNvPr id="13" name="Rounded Rectangle 12"/>
+          <p:cNvSpPr/>
+          <p:nvPr/>
+        </p:nvSpPr>
+        <p:spPr>
+          <a:xfrm>
+            <a:off x="6217920" y="3931920"/>
+            <a:ext cx="5212080" cy="2286000"/>
+          </a:xfrm>
+          <a:prstGeom prst="roundRect">
+            <a:avLst/>
+          </a:prstGeom>
+          <a:solidFill>
+            <a:srgbClr val="1E293B"/>
+          </a:solidFill>
+          <a:ln w="19050">
+            <a:solidFill>
+              <a:srgbClr val="334155"/>
+            </a:solidFill>
+          </a:ln>
+        </p:spPr>
+        <p:style>
+          <a:lnRef idx="1">
+            <a:schemeClr val="accent1"/>
+          </a:lnRef>
+          <a:fillRef idx="3">
+            <a:schemeClr val="accent1"/>
+          </a:fillRef>
+          <a:effectRef idx="2">
+            <a:schemeClr val="accent1"/>
+          </a:effectRef>
+          <a:fontRef idx="minor">
+            <a:schemeClr val="lt1"/>
+          </a:fontRef>
+        </p:style>
+        <p:txBody>
+          <a:bodyPr rtlCol="0" anchor="ctr"/>
+          <a:lstStyle/>
+          <a:p>
+            <a:pPr algn="ctr"/>
+          </a:p>
+        </p:txBody>
+      </p:sp>
+      <p:sp>
+        <p:nvSpPr>
+          <p:cNvPr id="14" name="TextBox 13"/>
+          <p:cNvSpPr txBox="1"/>
+          <p:nvPr/>
+        </p:nvSpPr>
+        <p:spPr>
+          <a:xfrm>
+            <a:off x="6400800" y="4069080"/>
+            <a:ext cx="4846320" cy="411480"/>
+          </a:xfrm>
+          <a:prstGeom prst="rect">
+            <a:avLst/>
+          </a:prstGeom>
+          <a:noFill/>
+        </p:spPr>
+        <p:txBody>
+          <a:bodyPr wrap="square">
+            <a:spAutoFit/>
+          </a:bodyPr>
+          <a:lstStyle/>
+          <a:p>
+            <a:pPr>
+              <a:defRPr sz="1300" b="1">
+                <a:solidFill>
+                  <a:srgbClr val="3B82F6"/>
+                </a:solidFill>
+              </a:defRPr>
+            </a:pPr>
+            <a:r>
+              <a:t>4. Full-Stack Dashboard Integration</a:t>
+            </a:r>
+          </a:p>
+        </p:txBody>
+      </p:sp>
+      <p:sp>
+        <p:nvSpPr>
+          <p:cNvPr id="15" name="TextBox 14"/>
+          <p:cNvSpPr txBox="1"/>
+          <p:nvPr/>
+        </p:nvSpPr>
+        <p:spPr>
+          <a:xfrm>
+            <a:off x="6400800" y="4526280"/>
+            <a:ext cx="4846320" cy="1554480"/>
+          </a:xfrm>
+          <a:prstGeom prst="rect">
+            <a:avLst/>
+          </a:prstGeom>
+          <a:noFill/>
+        </p:spPr>
+        <p:txBody>
+          <a:bodyPr wrap="square">
+            <a:spAutoFit/>
+          </a:bodyPr>
+          <a:lstStyle/>
+          <a:p>
+            <a:pPr>
+              <a:defRPr sz="1200">
+                <a:solidFill>
+                  <a:srgbClr val="F8FAFC"/>
+                </a:solidFill>
+              </a:defRPr>
+            </a:pPr>
+            <a:r>
+              <a:t>Integrate the compiled C++ binary with an interactive web dashboard via a lightweight standard-library Python HTTP server for live demonstration.</a:t>
             </a:r>
           </a:p>
         </p:txBody>
@@ -6517,7 +8756,282 @@
               </a:defRPr>
             </a:pPr>
             <a:r>
-              <a:t>DSA CASE STUDY EVALUATION</a:t>
+              <a:t>SYSTEM PIPELINE</a:t>
+            </a:r>
+          </a:p>
+        </p:txBody>
+      </p:sp>
+      <p:sp>
+        <p:nvSpPr>
+          <p:cNvPr id="3" name="TextBox 2"/>
+          <p:cNvSpPr txBox="1"/>
+          <p:nvPr/>
+        </p:nvSpPr>
+        <p:spPr>
+          <a:xfrm>
+            <a:off x="731520" y="640080"/>
+            <a:ext cx="10698480" cy="640080"/>
+          </a:xfrm>
+          <a:prstGeom prst="rect">
+            <a:avLst/>
+          </a:prstGeom>
+          <a:noFill/>
+        </p:spPr>
+        <p:txBody>
+          <a:bodyPr wrap="square">
+            <a:spAutoFit/>
+          </a:bodyPr>
+          <a:lstStyle/>
+          <a:p>
+            <a:pPr>
+              <a:defRPr sz="2200" b="1">
+                <a:solidFill>
+                  <a:srgbClr val="F8FAFC"/>
+                </a:solidFill>
+              </a:defRPr>
+            </a:pPr>
+            <a:r>
+              <a:t>Proposed Solution: 3-Tier FlowGrid Architecture</a:t>
+            </a:r>
+          </a:p>
+        </p:txBody>
+      </p:sp>
+      <p:sp>
+        <p:nvSpPr>
+          <p:cNvPr id="4" name="Rounded Rectangle 3"/>
+          <p:cNvSpPr/>
+          <p:nvPr/>
+        </p:nvSpPr>
+        <p:spPr>
+          <a:xfrm>
+            <a:off x="731520" y="1463040"/>
+            <a:ext cx="10698480" cy="4754880"/>
+          </a:xfrm>
+          <a:prstGeom prst="roundRect">
+            <a:avLst/>
+          </a:prstGeom>
+          <a:solidFill>
+            <a:srgbClr val="1E293B"/>
+          </a:solidFill>
+          <a:ln w="19050">
+            <a:solidFill>
+              <a:srgbClr val="334155"/>
+            </a:solidFill>
+          </a:ln>
+        </p:spPr>
+        <p:style>
+          <a:lnRef idx="1">
+            <a:schemeClr val="accent1"/>
+          </a:lnRef>
+          <a:fillRef idx="3">
+            <a:schemeClr val="accent1"/>
+          </a:fillRef>
+          <a:effectRef idx="2">
+            <a:schemeClr val="accent1"/>
+          </a:effectRef>
+          <a:fontRef idx="minor">
+            <a:schemeClr val="lt1"/>
+          </a:fontRef>
+        </p:style>
+        <p:txBody>
+          <a:bodyPr rtlCol="0" anchor="ctr"/>
+          <a:lstStyle/>
+          <a:p>
+            <a:pPr algn="ctr"/>
+          </a:p>
+        </p:txBody>
+      </p:sp>
+      <p:sp>
+        <p:nvSpPr>
+          <p:cNvPr id="5" name="TextBox 4"/>
+          <p:cNvSpPr txBox="1"/>
+          <p:nvPr/>
+        </p:nvSpPr>
+        <p:spPr>
+          <a:xfrm>
+            <a:off x="914400" y="1600200"/>
+            <a:ext cx="10332720" cy="411480"/>
+          </a:xfrm>
+          <a:prstGeom prst="rect">
+            <a:avLst/>
+          </a:prstGeom>
+          <a:noFill/>
+        </p:spPr>
+        <p:txBody>
+          <a:bodyPr wrap="square">
+            <a:spAutoFit/>
+          </a:bodyPr>
+          <a:lstStyle/>
+          <a:p>
+            <a:pPr>
+              <a:defRPr sz="1300" b="1">
+                <a:solidFill>
+                  <a:srgbClr val="3B82F6"/>
+                </a:solidFill>
+              </a:defRPr>
+            </a:pPr>
+            <a:r>
+              <a:t>End-to-End System Pipeline &amp; Technology Stack</a:t>
+            </a:r>
+          </a:p>
+        </p:txBody>
+      </p:sp>
+      <p:sp>
+        <p:nvSpPr>
+          <p:cNvPr id="6" name="TextBox 5"/>
+          <p:cNvSpPr txBox="1"/>
+          <p:nvPr/>
+        </p:nvSpPr>
+        <p:spPr>
+          <a:xfrm>
+            <a:off x="1005840" y="2011680"/>
+            <a:ext cx="10149840" cy="4023360"/>
+          </a:xfrm>
+          <a:prstGeom prst="rect">
+            <a:avLst/>
+          </a:prstGeom>
+          <a:noFill/>
+        </p:spPr>
+        <p:txBody>
+          <a:bodyPr wrap="square">
+            <a:spAutoFit/>
+          </a:bodyPr>
+          <a:lstStyle/>
+          <a:p/>
+          <a:p>
+            <a:pPr>
+              <a:spcAft>
+                <a:spcPts val="600"/>
+              </a:spcAft>
+              <a:defRPr sz="1100">
+                <a:solidFill>
+                  <a:srgbClr val="06B6D4"/>
+                </a:solidFill>
+              </a:defRPr>
+            </a:pPr>
+            <a:r>
+              <a:t>• Tier 1: Web Dashboard UI (Client Layer): Semantic HTML5, responsive dark-glassmorphism CSS3, and vanilla JavaScript. Features dynamic 8-segment road cards, active range tags ([L], [R], In Range), interactive card selection, and real-time ancestor update path highlighting.</a:t>
+            </a:r>
+          </a:p>
+          <a:p>
+            <a:pPr>
+              <a:spcAft>
+                <a:spcPts val="600"/>
+              </a:spcAft>
+              <a:defRPr sz="1100">
+                <a:solidFill>
+                  <a:srgbClr val="06B6D4"/>
+                </a:solidFill>
+              </a:defRPr>
+            </a:pPr>
+            <a:r>
+              <a:t>• Tier 2: Lightweight HTTP Bridge (server.py): Zero external Python dependencies (uses Python standard library http.server, subprocess, json). Serves static dashboard assets, manages persistent corridor state, and validates HTTP REST requests.</a:t>
+            </a:r>
+          </a:p>
+          <a:p>
+            <a:pPr>
+              <a:spcAft>
+                <a:spcPts val="600"/>
+              </a:spcAft>
+              <a:defRPr sz="1100">
+                <a:solidFill>
+                  <a:srgbClr val="06B6D4"/>
+                </a:solidFill>
+              </a:defRPr>
+            </a:pPr>
+            <a:r>
+              <a:t>• Tier 3: Core Fenwick Tree Engine (C++17 Binary): Compiled standalone binary (traffic_analytics.exe). Implements O(n) build, O(log n) updates and prefix/range queries, and congestion classification. Invoked via subprocess CLI JSON mode (--query, --update, --state).</a:t>
+            </a:r>
+          </a:p>
+          <a:p>
+            <a:pPr>
+              <a:spcAft>
+                <a:spcPts val="600"/>
+              </a:spcAft>
+              <a:defRPr sz="1100">
+                <a:solidFill>
+                  <a:srgbClr val="10B981"/>
+                </a:solidFill>
+              </a:defRPr>
+            </a:pPr>
+            <a:r>
+              <a:t>• Communication Flow: Browser fetch() -&gt; HTTP REST POST (/api/query, /api/update) -&gt; server.py subprocess -&gt; traffic_analytics.exe execution -&gt; JSON stdout response back to Dashboard.</a:t>
+            </a:r>
+          </a:p>
+          <a:p>
+            <a:pPr>
+              <a:spcAft>
+                <a:spcPts val="600"/>
+              </a:spcAft>
+              <a:defRPr sz="1100">
+                <a:solidFill>
+                  <a:srgbClr val="94A3B8"/>
+                </a:solidFill>
+              </a:defRPr>
+            </a:pPr>
+            <a:r>
+              <a:t>• Academic Simulation Note: Operates on simulated sensor volume data across 8 arterial segments for rigorous algorithmic demonstration and validation.</a:t>
+            </a:r>
+          </a:p>
+        </p:txBody>
+      </p:sp>
+    </p:spTree>
+  </p:cSld>
+  <p:clrMapOvr>
+    <a:masterClrMapping/>
+  </p:clrMapOvr>
+</p:sld>
+</file>
+
+<file path=ppt/slides/slide6.xml><?xml version="1.0" encoding="utf-8"?>
+<p:sld xmlns:a="http://schemas.openxmlformats.org/drawingml/2006/main" xmlns:p="http://schemas.openxmlformats.org/presentationml/2006/main" xmlns:r="http://schemas.openxmlformats.org/officeDocument/2006/relationships">
+  <p:cSld>
+    <p:bg>
+      <p:bgPr>
+        <a:solidFill>
+          <a:srgbClr val="0F172A"/>
+        </a:solidFill>
+        <a:effectLst/>
+      </p:bgPr>
+    </p:bg>
+    <p:spTree>
+      <p:nvGrpSpPr>
+        <p:cNvPr id="1" name=""/>
+        <p:cNvGrpSpPr/>
+        <p:nvPr/>
+      </p:nvGrpSpPr>
+      <p:grpSpPr/>
+      <p:sp>
+        <p:nvSpPr>
+          <p:cNvPr id="2" name="TextBox 1"/>
+          <p:cNvSpPr txBox="1"/>
+          <p:nvPr/>
+        </p:nvSpPr>
+        <p:spPr>
+          <a:xfrm>
+            <a:off x="731520" y="365760"/>
+            <a:ext cx="10698480" cy="320040"/>
+          </a:xfrm>
+          <a:prstGeom prst="rect">
+            <a:avLst/>
+          </a:prstGeom>
+          <a:noFill/>
+        </p:spPr>
+        <p:txBody>
+          <a:bodyPr wrap="square">
+            <a:spAutoFit/>
+          </a:bodyPr>
+          <a:lstStyle/>
+          <a:p>
+            <a:pPr>
+              <a:defRPr sz="1000" b="1">
+                <a:solidFill>
+                  <a:srgbClr val="06B6D4"/>
+                </a:solidFill>
+              </a:defRPr>
+            </a:pPr>
+            <a:r>
+              <a:t>ALGORITHMIC SELECTION</a:t>
             </a:r>
           </a:p>
         </p:txBody>
@@ -6805,7 +9319,7 @@
                         </a:defRPr>
                       </a:pPr>
                       <a:r>
-                        <a:t>O(1)</a:t>
+                        <a:t>O(1) (No acceleration)</a:t>
                       </a:r>
                     </a:p>
                   </a:txBody>
@@ -6922,7 +9436,7 @@
                         </a:defRPr>
                       </a:pPr>
                       <a:r>
-                        <a:t>O(n)</a:t>
+                        <a:t>O(n) (Cascade penalty)</a:t>
                       </a:r>
                     </a:p>
                   </a:txBody>
@@ -7039,7 +9553,7 @@
                         </a:defRPr>
                       </a:pPr>
                       <a:r>
-                        <a:t>O(4n) (High Overhead)</a:t>
+                        <a:t>O(4n) (High pointer overhead)</a:t>
                       </a:r>
                     </a:p>
                   </a:txBody>
@@ -7156,7 +9670,7 @@
                         </a:defRPr>
                       </a:pPr>
                       <a:r>
-                        <a:t>O(n) (Minimal &amp; Cache-Friendly)</a:t>
+                        <a:t>O(n) (Flat cache-friendly array)</a:t>
                       </a:r>
                     </a:p>
                   </a:txBody>
@@ -7239,513 +9753,14 @@
           <a:lstStyle/>
           <a:p>
             <a:pPr>
-              <a:defRPr sz="1200">
-                <a:solidFill>
-                  <a:srgbClr val="F8FAFC"/>
-                </a:solidFill>
-              </a:defRPr>
-            </a:pPr>
-            <a:r>
-              <a:t>Key Takeaway: The Fenwick Tree achieves the optimal Pareto frontier for real-time traffic systems — balancing O(log n) update and query speeds with strictly O(n) space and zero tree-pointer overhead.</a:t>
-            </a:r>
-          </a:p>
-        </p:txBody>
-      </p:sp>
-    </p:spTree>
-  </p:cSld>
-  <p:clrMapOvr>
-    <a:masterClrMapping/>
-  </p:clrMapOvr>
-</p:sld>
-</file>
-
-<file path=ppt/slides/slide6.xml><?xml version="1.0" encoding="utf-8"?>
-<p:sld xmlns:a="http://schemas.openxmlformats.org/drawingml/2006/main" xmlns:p="http://schemas.openxmlformats.org/presentationml/2006/main" xmlns:r="http://schemas.openxmlformats.org/officeDocument/2006/relationships">
-  <p:cSld>
-    <p:bg>
-      <p:bgPr>
-        <a:solidFill>
-          <a:srgbClr val="0F172A"/>
-        </a:solidFill>
-        <a:effectLst/>
-      </p:bgPr>
-    </p:bg>
-    <p:spTree>
-      <p:nvGrpSpPr>
-        <p:cNvPr id="1" name=""/>
-        <p:cNvGrpSpPr/>
-        <p:nvPr/>
-      </p:nvGrpSpPr>
-      <p:grpSpPr/>
-      <p:sp>
-        <p:nvSpPr>
-          <p:cNvPr id="2" name="TextBox 1"/>
-          <p:cNvSpPr txBox="1"/>
-          <p:nvPr/>
-        </p:nvSpPr>
-        <p:spPr>
-          <a:xfrm>
-            <a:off x="731520" y="365760"/>
-            <a:ext cx="10698480" cy="320040"/>
-          </a:xfrm>
-          <a:prstGeom prst="rect">
-            <a:avLst/>
-          </a:prstGeom>
-          <a:noFill/>
-        </p:spPr>
-        <p:txBody>
-          <a:bodyPr wrap="square">
-            <a:spAutoFit/>
-          </a:bodyPr>
-          <a:lstStyle/>
-          <a:p>
-            <a:pPr>
-              <a:defRPr sz="1000" b="1">
-                <a:solidFill>
-                  <a:srgbClr val="06B6D4"/>
-                </a:solidFill>
-              </a:defRPr>
-            </a:pPr>
-            <a:r>
-              <a:t>DSA CASE STUDY EVALUATION</a:t>
-            </a:r>
-          </a:p>
-        </p:txBody>
-      </p:sp>
-      <p:sp>
-        <p:nvSpPr>
-          <p:cNvPr id="3" name="TextBox 2"/>
-          <p:cNvSpPr txBox="1"/>
-          <p:nvPr/>
-        </p:nvSpPr>
-        <p:spPr>
-          <a:xfrm>
-            <a:off x="731520" y="640080"/>
-            <a:ext cx="10698480" cy="640080"/>
-          </a:xfrm>
-          <a:prstGeom prst="rect">
-            <a:avLst/>
-          </a:prstGeom>
-          <a:noFill/>
-        </p:spPr>
-        <p:txBody>
-          <a:bodyPr wrap="square">
-            <a:spAutoFit/>
-          </a:bodyPr>
-          <a:lstStyle/>
-          <a:p>
-            <a:pPr>
-              <a:defRPr sz="2200" b="1">
-                <a:solidFill>
-                  <a:srgbClr val="F8FAFC"/>
-                </a:solidFill>
-              </a:defRPr>
-            </a:pPr>
-            <a:r>
-              <a:t>Fenwick Tree Representation &amp; The lowbit() Concept</a:t>
-            </a:r>
-          </a:p>
-        </p:txBody>
-      </p:sp>
-      <p:sp>
-        <p:nvSpPr>
-          <p:cNvPr id="4" name="Rounded Rectangle 3"/>
-          <p:cNvSpPr/>
-          <p:nvPr/>
-        </p:nvSpPr>
-        <p:spPr>
-          <a:xfrm>
-            <a:off x="731520" y="1463040"/>
-            <a:ext cx="5120640" cy="4754880"/>
-          </a:xfrm>
-          <a:prstGeom prst="roundRect">
-            <a:avLst/>
-          </a:prstGeom>
-          <a:solidFill>
-            <a:srgbClr val="1E293B"/>
-          </a:solidFill>
-          <a:ln w="19050">
-            <a:solidFill>
-              <a:srgbClr val="334155"/>
-            </a:solidFill>
-          </a:ln>
-        </p:spPr>
-        <p:style>
-          <a:lnRef idx="1">
-            <a:schemeClr val="accent1"/>
-          </a:lnRef>
-          <a:fillRef idx="3">
-            <a:schemeClr val="accent1"/>
-          </a:fillRef>
-          <a:effectRef idx="2">
-            <a:schemeClr val="accent1"/>
-          </a:effectRef>
-          <a:fontRef idx="minor">
-            <a:schemeClr val="lt1"/>
-          </a:fontRef>
-        </p:style>
-        <p:txBody>
-          <a:bodyPr rtlCol="0" anchor="ctr"/>
-          <a:lstStyle/>
-          <a:p>
-            <a:pPr algn="ctr"/>
-          </a:p>
-        </p:txBody>
-      </p:sp>
-      <p:sp>
-        <p:nvSpPr>
-          <p:cNvPr id="5" name="TextBox 4"/>
-          <p:cNvSpPr txBox="1"/>
-          <p:nvPr/>
-        </p:nvSpPr>
-        <p:spPr>
-          <a:xfrm>
-            <a:off x="914400" y="1600200"/>
-            <a:ext cx="4754880" cy="411480"/>
-          </a:xfrm>
-          <a:prstGeom prst="rect">
-            <a:avLst/>
-          </a:prstGeom>
-          <a:noFill/>
-        </p:spPr>
-        <p:txBody>
-          <a:bodyPr wrap="square">
-            <a:spAutoFit/>
-          </a:bodyPr>
-          <a:lstStyle/>
-          <a:p>
-            <a:pPr>
-              <a:defRPr sz="1400" b="1">
-                <a:solidFill>
-                  <a:srgbClr val="3B82F6"/>
-                </a:solidFill>
-              </a:defRPr>
-            </a:pPr>
-            <a:r>
-              <a:t>The lowbit(x) Primitive</a:t>
-            </a:r>
-          </a:p>
-        </p:txBody>
-      </p:sp>
-      <p:sp>
-        <p:nvSpPr>
-          <p:cNvPr id="6" name="TextBox 5"/>
-          <p:cNvSpPr txBox="1"/>
-          <p:nvPr/>
-        </p:nvSpPr>
-        <p:spPr>
-          <a:xfrm>
-            <a:off x="914400" y="2011680"/>
-            <a:ext cx="4754880" cy="4023360"/>
-          </a:xfrm>
-          <a:prstGeom prst="rect">
-            <a:avLst/>
-          </a:prstGeom>
-          <a:noFill/>
-        </p:spPr>
-        <p:txBody>
-          <a:bodyPr wrap="square">
-            <a:spAutoFit/>
-          </a:bodyPr>
-          <a:lstStyle/>
-          <a:p/>
-          <a:p>
-            <a:pPr>
-              <a:spcAft>
-                <a:spcPts val="800"/>
-              </a:spcAft>
-              <a:defRPr sz="1200">
-                <a:solidFill>
-                  <a:srgbClr val="F8FAFC"/>
-                </a:solidFill>
-              </a:defRPr>
-            </a:pPr>
-            <a:r>
-              <a:t>• Mathematical Formula: lowbit(x) = x &amp; (-x)</a:t>
-            </a:r>
-          </a:p>
-          <a:p>
-            <a:pPr>
-              <a:spcAft>
-                <a:spcPts val="800"/>
-              </a:spcAft>
-              <a:defRPr sz="1200">
-                <a:solidFill>
-                  <a:srgbClr val="F8FAFC"/>
-                </a:solidFill>
-              </a:defRPr>
-            </a:pPr>
-            <a:r>
-              <a:t>• Two's Complement Property: -x = (~x) + 1. Inverting bits and adding 1 isolates the least significant 1-bit.</a:t>
-            </a:r>
-          </a:p>
-          <a:p>
-            <a:pPr>
-              <a:spcAft>
-                <a:spcPts val="800"/>
-              </a:spcAft>
-              <a:defRPr sz="1200">
-                <a:solidFill>
-                  <a:srgbClr val="F8FAFC"/>
-                </a:solidFill>
-              </a:defRPr>
-            </a:pPr>
-            <a:r>
-              <a:t>• Interval of Responsibility: Index i stores the sum of elements in the range [i - lowbit(i) + 1 .. i].</a:t>
-            </a:r>
-          </a:p>
-          <a:p>
-            <a:pPr>
-              <a:spcAft>
-                <a:spcPts val="800"/>
-              </a:spcAft>
-              <a:defRPr sz="1200">
-                <a:solidFill>
-                  <a:srgbClr val="F8FAFC"/>
-                </a:solidFill>
-              </a:defRPr>
-            </a:pPr>
-            <a:r>
-              <a:t>• Length of Covered Range: Exactly lowbit(i) elements.</a:t>
-            </a:r>
-          </a:p>
-          <a:p>
-            <a:pPr>
-              <a:spcAft>
-                <a:spcPts val="800"/>
-              </a:spcAft>
-              <a:defRPr sz="1200">
-                <a:solidFill>
-                  <a:srgbClr val="F8FAFC"/>
-                </a:solidFill>
-              </a:defRPr>
-            </a:pPr>
-            <a:r>
-              <a:t>• Even vs Odd Indices: Odd indices have lowbit(i) = 1 (leaves storing single elements). Powers of 2 cover all preceding segments [1..i].</a:t>
-            </a:r>
-          </a:p>
-        </p:txBody>
-      </p:sp>
-      <p:sp>
-        <p:nvSpPr>
-          <p:cNvPr id="7" name="Rounded Rectangle 6"/>
-          <p:cNvSpPr/>
-          <p:nvPr/>
-        </p:nvSpPr>
-        <p:spPr>
-          <a:xfrm>
-            <a:off x="6217920" y="1463040"/>
-            <a:ext cx="5212080" cy="4754880"/>
-          </a:xfrm>
-          <a:prstGeom prst="roundRect">
-            <a:avLst/>
-          </a:prstGeom>
-          <a:solidFill>
-            <a:srgbClr val="1E293B"/>
-          </a:solidFill>
-          <a:ln w="19050">
-            <a:solidFill>
-              <a:srgbClr val="334155"/>
-            </a:solidFill>
-          </a:ln>
-        </p:spPr>
-        <p:style>
-          <a:lnRef idx="1">
-            <a:schemeClr val="accent1"/>
-          </a:lnRef>
-          <a:fillRef idx="3">
-            <a:schemeClr val="accent1"/>
-          </a:fillRef>
-          <a:effectRef idx="2">
-            <a:schemeClr val="accent1"/>
-          </a:effectRef>
-          <a:fontRef idx="minor">
-            <a:schemeClr val="lt1"/>
-          </a:fontRef>
-        </p:style>
-        <p:txBody>
-          <a:bodyPr rtlCol="0" anchor="ctr"/>
-          <a:lstStyle/>
-          <a:p>
-            <a:pPr algn="ctr"/>
-          </a:p>
-        </p:txBody>
-      </p:sp>
-      <p:sp>
-        <p:nvSpPr>
-          <p:cNvPr id="8" name="TextBox 7"/>
-          <p:cNvSpPr txBox="1"/>
-          <p:nvPr/>
-        </p:nvSpPr>
-        <p:spPr>
-          <a:xfrm>
-            <a:off x="6400800" y="1600200"/>
-            <a:ext cx="4846320" cy="411480"/>
-          </a:xfrm>
-          <a:prstGeom prst="rect">
-            <a:avLst/>
-          </a:prstGeom>
-          <a:noFill/>
-        </p:spPr>
-        <p:txBody>
-          <a:bodyPr wrap="square">
-            <a:spAutoFit/>
-          </a:bodyPr>
-          <a:lstStyle/>
-          <a:p>
-            <a:pPr>
-              <a:defRPr sz="1400" b="1">
-                <a:solidFill>
-                  <a:srgbClr val="3B82F6"/>
-                </a:solidFill>
-              </a:defRPr>
-            </a:pPr>
-            <a:r>
-              <a:t>1-Based Indexing Mapping (n = 8)</a:t>
-            </a:r>
-          </a:p>
-        </p:txBody>
-      </p:sp>
-      <p:sp>
-        <p:nvSpPr>
-          <p:cNvPr id="9" name="TextBox 8"/>
-          <p:cNvSpPr txBox="1"/>
-          <p:nvPr/>
-        </p:nvSpPr>
-        <p:spPr>
-          <a:xfrm>
-            <a:off x="6400800" y="2011680"/>
-            <a:ext cx="4846320" cy="4023360"/>
-          </a:xfrm>
-          <a:prstGeom prst="rect">
-            <a:avLst/>
-          </a:prstGeom>
-          <a:noFill/>
-        </p:spPr>
-        <p:txBody>
-          <a:bodyPr wrap="square">
-            <a:spAutoFit/>
-          </a:bodyPr>
-          <a:lstStyle/>
-          <a:p/>
-          <a:p>
-            <a:pPr>
-              <a:spcAft>
-                <a:spcPts val="400"/>
-              </a:spcAft>
-              <a:defRPr sz="1100">
-                <a:solidFill>
-                  <a:srgbClr val="06B6D4"/>
-                </a:solidFill>
-              </a:defRPr>
-            </a:pPr>
-            <a:r>
-              <a:t>bit[1] : 0001_2 | lowbit=1 | Interval [1..1] | Covers Seg 1</a:t>
-            </a:r>
-          </a:p>
-          <a:p>
-            <a:pPr>
-              <a:spcAft>
-                <a:spcPts val="400"/>
-              </a:spcAft>
-              <a:defRPr sz="1100">
-                <a:solidFill>
-                  <a:srgbClr val="06B6D4"/>
-                </a:solidFill>
-              </a:defRPr>
-            </a:pPr>
-            <a:r>
-              <a:t>bit[2] : 0010_2 | lowbit=2 | Interval [1..2] | Covers Segs 1..2</a:t>
-            </a:r>
-          </a:p>
-          <a:p>
-            <a:pPr>
-              <a:spcAft>
-                <a:spcPts val="400"/>
-              </a:spcAft>
-              <a:defRPr sz="1100">
-                <a:solidFill>
-                  <a:srgbClr val="06B6D4"/>
-                </a:solidFill>
-              </a:defRPr>
-            </a:pPr>
-            <a:r>
-              <a:t>bit[3] : 0011_2 | lowbit=1 | Interval [3..3] | Covers Seg 3</a:t>
-            </a:r>
-          </a:p>
-          <a:p>
-            <a:pPr>
-              <a:spcAft>
-                <a:spcPts val="400"/>
-              </a:spcAft>
-              <a:defRPr sz="1100">
-                <a:solidFill>
-                  <a:srgbClr val="06B6D4"/>
-                </a:solidFill>
-              </a:defRPr>
-            </a:pPr>
-            <a:r>
-              <a:t>bit[4] : 0100_2 | lowbit=4 | Interval [1..4] | Covers Segs 1..4</a:t>
-            </a:r>
-          </a:p>
-          <a:p>
-            <a:pPr>
-              <a:spcAft>
-                <a:spcPts val="400"/>
-              </a:spcAft>
-              <a:defRPr sz="1100">
-                <a:solidFill>
-                  <a:srgbClr val="06B6D4"/>
-                </a:solidFill>
-              </a:defRPr>
-            </a:pPr>
-            <a:r>
-              <a:t>bit[5] : 0101_2 | lowbit=1 | Interval [5..5] | Covers Seg 5</a:t>
-            </a:r>
-          </a:p>
-          <a:p>
-            <a:pPr>
-              <a:spcAft>
-                <a:spcPts val="400"/>
-              </a:spcAft>
-              <a:defRPr sz="1100">
-                <a:solidFill>
-                  <a:srgbClr val="06B6D4"/>
-                </a:solidFill>
-              </a:defRPr>
-            </a:pPr>
-            <a:r>
-              <a:t>bit[6] : 0110_2 | lowbit=2 | Interval [5..6] | Covers Segs 5..6</a:t>
-            </a:r>
-          </a:p>
-          <a:p>
-            <a:pPr>
-              <a:spcAft>
-                <a:spcPts val="400"/>
-              </a:spcAft>
-              <a:defRPr sz="1100">
-                <a:solidFill>
-                  <a:srgbClr val="06B6D4"/>
-                </a:solidFill>
-              </a:defRPr>
-            </a:pPr>
-            <a:r>
-              <a:t>bit[7] : 0111_2 | lowbit=1 | Interval [7..7] | Covers Seg 7</a:t>
-            </a:r>
-          </a:p>
-          <a:p>
-            <a:pPr>
-              <a:spcAft>
-                <a:spcPts val="400"/>
-              </a:spcAft>
-              <a:defRPr sz="1100">
-                <a:solidFill>
-                  <a:srgbClr val="06B6D4"/>
-                </a:solidFill>
-              </a:defRPr>
-            </a:pPr>
-            <a:r>
-              <a:t>bit[8] : 1000_2 | lowbit=8 | Interval [1..8] | Covers Segs 1..8</a:t>
+              <a:defRPr sz="1100">
+                <a:solidFill>
+                  <a:srgbClr val="F8FAFC"/>
+                </a:solidFill>
+              </a:defRPr>
+            </a:pPr>
+            <a:r>
+              <a:t>Key Takeaway: The Fenwick Tree achieves the optimal Pareto frontier — matching Segment Tree query/update speed (O(log n)) while using 75% less memory (O(n) vs O(4n)), eliminating pointer chasing, and executing on flat CPU caches.</a:t>
             </a:r>
           </a:p>
         </p:txBody>
@@ -7806,7 +9821,7 @@
               </a:defRPr>
             </a:pPr>
             <a:r>
-              <a:t>DSA CASE STUDY EVALUATION</a:t>
+              <a:t>MATHEMATICAL FOUNDATION</a:t>
             </a:r>
           </a:p>
         </p:txBody>
@@ -7841,7 +9856,7 @@
               </a:defRPr>
             </a:pPr>
             <a:r>
-              <a:t>Dynamic Point Update Operation: O(log n)</a:t>
+              <a:t>Fenwick Tree Representation &amp; The lowbit() Concept</a:t>
             </a:r>
           </a:p>
         </p:txBody>
@@ -7914,14 +9929,14 @@
           <a:lstStyle/>
           <a:p>
             <a:pPr>
-              <a:defRPr sz="1400" b="1">
+              <a:defRPr sz="1300" b="1">
                 <a:solidFill>
                   <a:srgbClr val="3B82F6"/>
                 </a:solidFill>
               </a:defRPr>
             </a:pPr>
             <a:r>
-              <a:t>Algorithm: update(idx, delta)</a:t>
+              <a:t>The lowbit(x) Primitive: Formula &amp; Mechanics</a:t>
             </a:r>
           </a:p>
         </p:txBody>
@@ -7953,14 +9968,14 @@
               <a:spcAft>
                 <a:spcPts val="800"/>
               </a:spcAft>
-              <a:defRPr sz="1200">
-                <a:solidFill>
-                  <a:srgbClr val="F8FAFC"/>
-                </a:solidFill>
-              </a:defRPr>
-            </a:pPr>
-            <a:r>
-              <a:t>• Goal: Add delta to segment idx and propagate the change to all responsible BIT intervals.</a:t>
+              <a:defRPr sz="1100">
+                <a:solidFill>
+                  <a:srgbClr val="F8FAFC"/>
+                </a:solidFill>
+              </a:defRPr>
+            </a:pPr>
+            <a:r>
+              <a:t>• Mathematical Formula: lowbit(x) = x &amp; (-x)</a:t>
             </a:r>
           </a:p>
           <a:p>
@@ -7968,14 +9983,14 @@
               <a:spcAft>
                 <a:spcPts val="800"/>
               </a:spcAft>
-              <a:defRPr sz="1200">
-                <a:solidFill>
-                  <a:srgbClr val="F8FAFC"/>
-                </a:solidFill>
-              </a:defRPr>
-            </a:pPr>
-            <a:r>
-              <a:t>• Loop Mechanism: Start at i = idx; while i &lt;= n, add delta to bit[i] and advance to parent: i += lowbit(i).</a:t>
+              <a:defRPr sz="1100">
+                <a:solidFill>
+                  <a:srgbClr val="F8FAFC"/>
+                </a:solidFill>
+              </a:defRPr>
+            </a:pPr>
+            <a:r>
+              <a:t>• Two's Complement Property: In two's complement arithmetic, -x = (~x) + 1. Bitwise ANDing x with -x isolates the least significant 1-bit.</a:t>
             </a:r>
           </a:p>
           <a:p>
@@ -7983,14 +9998,14 @@
               <a:spcAft>
                 <a:spcPts val="800"/>
               </a:spcAft>
-              <a:defRPr sz="1200">
-                <a:solidFill>
-                  <a:srgbClr val="F8FAFC"/>
-                </a:solidFill>
-              </a:defRPr>
-            </a:pPr>
-            <a:r>
-              <a:t>• Tree Ascent: Adding lowbit(i) flips the lowest set bit and carries upward, visiting strictly the ancestor nodes in the implicit tree.</a:t>
+              <a:defRPr sz="1100">
+                <a:solidFill>
+                  <a:srgbClr val="F8FAFC"/>
+                </a:solidFill>
+              </a:defRPr>
+            </a:pPr>
+            <a:r>
+              <a:t>• Interval of Responsibility: Node bit[i] stores cumulative sum over the contiguous range [i - lowbit(i) + 1 .. i].</a:t>
             </a:r>
           </a:p>
           <a:p>
@@ -7998,14 +10013,14 @@
               <a:spcAft>
                 <a:spcPts val="800"/>
               </a:spcAft>
-              <a:defRPr sz="1200">
-                <a:solidFill>
-                  <a:srgbClr val="F8FAFC"/>
-                </a:solidFill>
-              </a:defRPr>
-            </a:pPr>
-            <a:r>
-              <a:t>• Time Complexity: At most log2(n) iterations -&gt; O(log n).</a:t>
+              <a:defRPr sz="1100">
+                <a:solidFill>
+                  <a:srgbClr val="F8FAFC"/>
+                </a:solidFill>
+              </a:defRPr>
+            </a:pPr>
+            <a:r>
+              <a:t>• Length of Covered Range: Exactly lowbit(i) segments.</a:t>
             </a:r>
           </a:p>
           <a:p>
@@ -8013,14 +10028,14 @@
               <a:spcAft>
                 <a:spcPts val="800"/>
               </a:spcAft>
-              <a:defRPr sz="1200">
-                <a:solidFill>
-                  <a:srgbClr val="F8FAFC"/>
-                </a:solidFill>
-              </a:defRPr>
-            </a:pPr>
-            <a:r>
-              <a:t>• setCount(idx, newCount): Computes delta = newCount - trafficCounts[idx], updates the raw array, then invokes update(idx, delta).</a:t>
+              <a:defRPr sz="1100">
+                <a:solidFill>
+                  <a:srgbClr val="F8FAFC"/>
+                </a:solidFill>
+              </a:defRPr>
+            </a:pPr>
+            <a:r>
+              <a:t>• Even vs Odd Indices: Odd indices have lowbit = 1 (leaves storing single elements). Powers of 2 cover all preceding segments [1..i].</a:t>
             </a:r>
           </a:p>
         </p:txBody>
@@ -8093,14 +10108,14 @@
           <a:lstStyle/>
           <a:p>
             <a:pPr>
-              <a:defRPr sz="1400" b="1">
+              <a:defRPr sz="1300" b="1">
                 <a:solidFill>
                   <a:srgbClr val="3B82F6"/>
                 </a:solidFill>
               </a:defRPr>
             </a:pPr>
             <a:r>
-              <a:t>Trace: Updating Segment 5 by delta = +14</a:t>
+              <a:t>1-Based Responsibility Table (n = 8)</a:t>
             </a:r>
           </a:p>
         </p:txBody>
@@ -8134,12 +10149,12 @@
               </a:spcAft>
               <a:defRPr sz="1100">
                 <a:solidFill>
-                  <a:srgbClr val="F8FAFC"/>
-                </a:solidFill>
-              </a:defRPr>
-            </a:pPr>
-            <a:r>
-              <a:t>1. Start at i = 5 (0101_2):</a:t>
+                  <a:srgbClr val="06B6D4"/>
+                </a:solidFill>
+              </a:defRPr>
+            </a:pPr>
+            <a:r>
+              <a:t>bit[1] : 0001_2 | lowbit=1 | Interval [1..1] | Covers Seg 1 (Leaf)</a:t>
             </a:r>
           </a:p>
           <a:p>
@@ -8149,12 +10164,12 @@
               </a:spcAft>
               <a:defRPr sz="1100">
                 <a:solidFill>
-                  <a:srgbClr val="F8FAFC"/>
-                </a:solidFill>
-              </a:defRPr>
-            </a:pPr>
-            <a:r>
-              <a:t>   lowbit(5) = 1. Add +14 to bit[5] (20 -&gt; 34).</a:t>
+                  <a:srgbClr val="06B6D4"/>
+                </a:solidFill>
+              </a:defRPr>
+            </a:pPr>
+            <a:r>
+              <a:t>bit[2] : 0010_2 | lowbit=2 | Interval [1..2] | Covers Segs 1..2 (Sub-root)</a:t>
             </a:r>
           </a:p>
           <a:p>
@@ -8164,12 +10179,12 @@
               </a:spcAft>
               <a:defRPr sz="1100">
                 <a:solidFill>
-                  <a:srgbClr val="F8FAFC"/>
-                </a:solidFill>
-              </a:defRPr>
-            </a:pPr>
-            <a:r>
-              <a:t>   Next index: 5 + 1 = 6.</a:t>
+                  <a:srgbClr val="06B6D4"/>
+                </a:solidFill>
+              </a:defRPr>
+            </a:pPr>
+            <a:r>
+              <a:t>bit[3] : 0011_2 | lowbit=1 | Interval [3..3] | Covers Seg 3 (Leaf)</a:t>
             </a:r>
           </a:p>
           <a:p>
@@ -8179,12 +10194,12 @@
               </a:spcAft>
               <a:defRPr sz="1100">
                 <a:solidFill>
-                  <a:srgbClr val="F8FAFC"/>
-                </a:solidFill>
-              </a:defRPr>
-            </a:pPr>
-            <a:r>
-              <a:t>2. Step to i = 6 (0110_2):</a:t>
+                  <a:srgbClr val="06B6D4"/>
+                </a:solidFill>
+              </a:defRPr>
+            </a:pPr>
+            <a:r>
+              <a:t>bit[4] : 0100_2 | lowbit=4 | Interval [1..4] | Covers Segs 1..4 (Branch Root)</a:t>
             </a:r>
           </a:p>
           <a:p>
@@ -8194,12 +10209,12 @@
               </a:spcAft>
               <a:defRPr sz="1100">
                 <a:solidFill>
-                  <a:srgbClr val="F8FAFC"/>
-                </a:solidFill>
-              </a:defRPr>
-            </a:pPr>
-            <a:r>
-              <a:t>   lowbit(6) = 2. Add +14 to bit[6] (25 -&gt; 39).</a:t>
+                  <a:srgbClr val="06B6D4"/>
+                </a:solidFill>
+              </a:defRPr>
+            </a:pPr>
+            <a:r>
+              <a:t>bit[5] : 0101_2 | lowbit=1 | Interval [5..5] | Covers Seg 5 (Leaf)</a:t>
             </a:r>
           </a:p>
           <a:p>
@@ -8209,12 +10224,12 @@
               </a:spcAft>
               <a:defRPr sz="1100">
                 <a:solidFill>
-                  <a:srgbClr val="F8FAFC"/>
-                </a:solidFill>
-              </a:defRPr>
-            </a:pPr>
-            <a:r>
-              <a:t>   Next index: 6 + 2 = 8.</a:t>
+                  <a:srgbClr val="06B6D4"/>
+                </a:solidFill>
+              </a:defRPr>
+            </a:pPr>
+            <a:r>
+              <a:t>bit[6] : 0110_2 | lowbit=2 | Interval [5..6] | Covers Segs 5..6 (Sub-root)</a:t>
             </a:r>
           </a:p>
           <a:p>
@@ -8224,12 +10239,12 @@
               </a:spcAft>
               <a:defRPr sz="1100">
                 <a:solidFill>
-                  <a:srgbClr val="F8FAFC"/>
-                </a:solidFill>
-              </a:defRPr>
-            </a:pPr>
-            <a:r>
-              <a:t>3. Step to i = 8 (1000_2):</a:t>
+                  <a:srgbClr val="06B6D4"/>
+                </a:solidFill>
+              </a:defRPr>
+            </a:pPr>
+            <a:r>
+              <a:t>bit[7] : 0111_2 | lowbit=1 | Interval [7..7] | Covers Seg 7 (Leaf)</a:t>
             </a:r>
           </a:p>
           <a:p>
@@ -8239,42 +10254,12 @@
               </a:spcAft>
               <a:defRPr sz="1100">
                 <a:solidFill>
-                  <a:srgbClr val="F8FAFC"/>
-                </a:solidFill>
-              </a:defRPr>
-            </a:pPr>
-            <a:r>
-              <a:t>   lowbit(8) = 8. Add +14 to bit[8] (87 -&gt; 101).</a:t>
-            </a:r>
-          </a:p>
-          <a:p>
-            <a:pPr>
-              <a:spcAft>
-                <a:spcPts val="400"/>
-              </a:spcAft>
-              <a:defRPr sz="1100">
-                <a:solidFill>
-                  <a:srgbClr val="F8FAFC"/>
-                </a:solidFill>
-              </a:defRPr>
-            </a:pPr>
-            <a:r>
-              <a:t>   Next index: 8 + 8 = 16 &gt; 8 (Termination).</a:t>
-            </a:r>
-          </a:p>
-          <a:p>
-            <a:pPr>
-              <a:spcAft>
-                <a:spcPts val="400"/>
-              </a:spcAft>
-              <a:defRPr sz="1100">
-                <a:solidFill>
-                  <a:srgbClr val="10B981"/>
-                </a:solidFill>
-              </a:defRPr>
-            </a:pPr>
-            <a:r>
-              <a:t>Total Node Updates: Only 3 nodes touched (5, 6, 8) out of 8!</a:t>
+                  <a:srgbClr val="06B6D4"/>
+                </a:solidFill>
+              </a:defRPr>
+            </a:pPr>
+            <a:r>
+              <a:t>bit[8] : 1000_2 | lowbit=8 | Interval [1..8] | Covers Segs 1..8 (Global Root)</a:t>
             </a:r>
           </a:p>
         </p:txBody>
@@ -8335,7 +10320,7 @@
               </a:defRPr>
             </a:pPr>
             <a:r>
-              <a:t>DSA CASE STUDY EVALUATION</a:t>
+              <a:t>CORE ALGORITHMS</a:t>
             </a:r>
           </a:p>
         </p:txBody>
@@ -8370,7 +10355,7 @@
               </a:defRPr>
             </a:pPr>
             <a:r>
-              <a:t>Prefix Sum &amp; Range Sum Aggregation: O(log n)</a:t>
+              <a:t>Dynamic Point Update Operation: O(log n)</a:t>
             </a:r>
           </a:p>
         </p:txBody>
@@ -8443,14 +10428,14 @@
           <a:lstStyle/>
           <a:p>
             <a:pPr>
-              <a:defRPr sz="1400" b="1">
+              <a:defRPr sz="1300" b="1">
                 <a:solidFill>
                   <a:srgbClr val="3B82F6"/>
                 </a:solidFill>
               </a:defRPr>
             </a:pPr>
             <a:r>
-              <a:t>Prefix Sum: prefixSum(idx)</a:t>
+              <a:t>Algorithm: update(idx, delta) &amp; setCount()</a:t>
             </a:r>
           </a:p>
         </p:txBody>
@@ -8482,14 +10467,14 @@
               <a:spcAft>
                 <a:spcPts val="800"/>
               </a:spcAft>
-              <a:defRPr sz="1200">
-                <a:solidFill>
-                  <a:srgbClr val="F8FAFC"/>
-                </a:solidFill>
-              </a:defRPr>
-            </a:pPr>
-            <a:r>
-              <a:t>• Goal: Compute total traffic from segment 1 to idx: sum(traffic[1..idx]).</a:t>
+              <a:defRPr sz="1100">
+                <a:solidFill>
+                  <a:srgbClr val="F8FAFC"/>
+                </a:solidFill>
+              </a:defRPr>
+            </a:pPr>
+            <a:r>
+              <a:t>• Goal: Add delta to segment idx and propagate the change upward to all ancestor nodes in the implicit Fenwick Tree.</a:t>
             </a:r>
           </a:p>
           <a:p>
@@ -8497,14 +10482,14 @@
               <a:spcAft>
                 <a:spcPts val="800"/>
               </a:spcAft>
-              <a:defRPr sz="1200">
-                <a:solidFill>
-                  <a:srgbClr val="F8FAFC"/>
-                </a:solidFill>
-              </a:defRPr>
-            </a:pPr>
-            <a:r>
-              <a:t>• Loop Mechanism: Start at i = idx; while i &gt; 0, accumulate bit[i] into sum, and step to left disjoint interval: i -= lowbit(i).</a:t>
+              <a:defRPr sz="1100">
+                <a:solidFill>
+                  <a:srgbClr val="F8FAFC"/>
+                </a:solidFill>
+              </a:defRPr>
+            </a:pPr>
+            <a:r>
+              <a:t>• Loop Mechanism: Start at i = idx; while i &lt;= n, add delta to bit[i] and advance to parent: i += lowbit(i).</a:t>
             </a:r>
           </a:p>
           <a:p>
@@ -8512,14 +10497,14 @@
               <a:spcAft>
                 <a:spcPts val="800"/>
               </a:spcAft>
-              <a:defRPr sz="1200">
-                <a:solidFill>
-                  <a:srgbClr val="F8FAFC"/>
-                </a:solidFill>
-              </a:defRPr>
-            </a:pPr>
-            <a:r>
-              <a:t>• Binary Decomposition: Each step strips the lowest set bit from i, decomposing the prefix into at most log2(n) pre-calculated canonical sub-intervals.</a:t>
+              <a:defRPr sz="1100">
+                <a:solidFill>
+                  <a:srgbClr val="F8FAFC"/>
+                </a:solidFill>
+              </a:defRPr>
+            </a:pPr>
+            <a:r>
+              <a:t>• Tree Ascent: Adding lowbit(i) flips the lowest set bit and carries upward, strictly visiting ancestor nodes in O(log n) steps.</a:t>
             </a:r>
           </a:p>
           <a:p>
@@ -8527,14 +10512,29 @@
               <a:spcAft>
                 <a:spcPts val="800"/>
               </a:spcAft>
-              <a:defRPr sz="1200">
-                <a:solidFill>
-                  <a:srgbClr val="F8FAFC"/>
-                </a:solidFill>
-              </a:defRPr>
-            </a:pPr>
-            <a:r>
-              <a:t>• Time Complexity: O(log n) addition operations.</a:t>
+              <a:defRPr sz="1100">
+                <a:solidFill>
+                  <a:srgbClr val="F8FAFC"/>
+                </a:solidFill>
+              </a:defRPr>
+            </a:pPr>
+            <a:r>
+              <a:t>• setCount(idx, newCount): Computes delta = newCount - trafficCounts[idx], updates the raw array, then invokes update(idx, delta).</a:t>
+            </a:r>
+          </a:p>
+          <a:p>
+            <a:pPr>
+              <a:spcAft>
+                <a:spcPts val="800"/>
+              </a:spcAft>
+              <a:defRPr sz="1100">
+                <a:solidFill>
+                  <a:srgbClr val="F8FAFC"/>
+                </a:solidFill>
+              </a:defRPr>
+            </a:pPr>
+            <a:r>
+              <a:t>• Boundary Validation: Rejects invalid segment indices (idx &lt; 1 or idx &gt; n) and negative vehicle counts.</a:t>
             </a:r>
           </a:p>
         </p:txBody>
@@ -8607,14 +10607,14 @@
           <a:lstStyle/>
           <a:p>
             <a:pPr>
-              <a:defRPr sz="1400" b="1">
+              <a:defRPr sz="1300" b="1">
                 <a:solidFill>
                   <a:srgbClr val="3B82F6"/>
                 </a:solidFill>
               </a:defRPr>
             </a:pPr>
             <a:r>
-              <a:t>Corridor Range Sum: rangeSum(L, R)</a:t>
+              <a:t>Trace: Updating Segment 5 by delta = +14</a:t>
             </a:r>
           </a:p>
         </p:txBody>
@@ -8644,121 +10644,175 @@
           <a:p>
             <a:pPr>
               <a:spcAft>
-                <a:spcPts val="600"/>
-              </a:spcAft>
-              <a:defRPr sz="1200">
-                <a:solidFill>
-                  <a:srgbClr val="F8FAFC"/>
-                </a:solidFill>
-              </a:defRPr>
-            </a:pPr>
-            <a:r>
-              <a:t>Fundamental Principle: Range sum equals difference between two prefix sums:</a:t>
-            </a:r>
-          </a:p>
-          <a:p>
-            <a:pPr>
-              <a:spcAft>
-                <a:spcPts val="600"/>
-              </a:spcAft>
-              <a:defRPr sz="1200">
+                <a:spcPts val="200"/>
+              </a:spcAft>
+              <a:defRPr sz="1100">
+                <a:solidFill>
+                  <a:srgbClr val="F8FAFC"/>
+                </a:solidFill>
+              </a:defRPr>
+            </a:pPr>
+            <a:r>
+              <a:t>Initial State: trafficCounts[5] = 20 vehicles.</a:t>
+            </a:r>
+          </a:p>
+          <a:p>
+            <a:pPr>
+              <a:spcAft>
+                <a:spcPts val="200"/>
+              </a:spcAft>
+              <a:defRPr sz="1100">
+                <a:solidFill>
+                  <a:srgbClr val="F8FAFC"/>
+                </a:solidFill>
+              </a:defRPr>
+            </a:pPr>
+            <a:r>
+              <a:t>Dynamic Event: Sensor reports 34 vehicles (surge/accident).</a:t>
+            </a:r>
+          </a:p>
+          <a:p>
+            <a:pPr>
+              <a:spcAft>
+                <a:spcPts val="200"/>
+              </a:spcAft>
+              <a:defRPr sz="1100">
+                <a:solidFill>
+                  <a:srgbClr val="F8FAFC"/>
+                </a:solidFill>
+              </a:defRPr>
+            </a:pPr>
+            <a:r>
+              <a:t>Computed Delta: 34 - 20 = +14 vehicles.</a:t>
+            </a:r>
+          </a:p>
+          <a:p>
+            <a:pPr>
+              <a:spcAft>
+                <a:spcPts val="200"/>
+              </a:spcAft>
+              <a:defRPr sz="1100">
+                <a:solidFill>
+                  <a:srgbClr val="F8FAFC"/>
+                </a:solidFill>
+              </a:defRPr>
+            </a:pPr>
+          </a:p>
+          <a:p>
+            <a:pPr>
+              <a:spcAft>
+                <a:spcPts val="200"/>
+              </a:spcAft>
+              <a:defRPr sz="1100">
                 <a:solidFill>
                   <a:srgbClr val="06B6D4"/>
                 </a:solidFill>
               </a:defRPr>
             </a:pPr>
             <a:r>
-              <a:t>rangeSum(L, R) = prefixSum(R) - prefixSum(L - 1)</a:t>
-            </a:r>
-          </a:p>
-          <a:p>
-            <a:pPr>
-              <a:spcAft>
-                <a:spcPts val="600"/>
-              </a:spcAft>
-              <a:defRPr sz="1200">
-                <a:solidFill>
-                  <a:srgbClr val="F8FAFC"/>
-                </a:solidFill>
-              </a:defRPr>
-            </a:pPr>
-            <a:r>
-              <a:t>Example on Corridor [3..6]:</a:t>
-            </a:r>
-          </a:p>
-          <a:p>
-            <a:pPr>
-              <a:spcAft>
-                <a:spcPts val="600"/>
-              </a:spcAft>
-              <a:defRPr sz="1200">
-                <a:solidFill>
-                  <a:srgbClr val="F8FAFC"/>
-                </a:solidFill>
-              </a:defRPr>
-            </a:pPr>
-            <a:r>
-              <a:t>  prefixSum(6) = bit[6] + bit[4] = 25 + 43 = 68</a:t>
-            </a:r>
-          </a:p>
-          <a:p>
-            <a:pPr>
-              <a:spcAft>
-                <a:spcPts val="600"/>
-              </a:spcAft>
-              <a:defRPr sz="1200">
-                <a:solidFill>
-                  <a:srgbClr val="F8FAFC"/>
-                </a:solidFill>
-              </a:defRPr>
-            </a:pPr>
-            <a:r>
-              <a:t>  prefixSum(2) = bit[2] = 19</a:t>
-            </a:r>
-          </a:p>
-          <a:p>
-            <a:pPr>
-              <a:spcAft>
-                <a:spcPts val="600"/>
-              </a:spcAft>
-              <a:defRPr sz="1200">
+              <a:t>Step 1: i = 5 (0101_2): lowbit(5) = 1.</a:t>
+            </a:r>
+          </a:p>
+          <a:p>
+            <a:pPr>
+              <a:spcAft>
+                <a:spcPts val="200"/>
+              </a:spcAft>
+              <a:defRPr sz="1100">
+                <a:solidFill>
+                  <a:srgbClr val="F8FAFC"/>
+                </a:solidFill>
+              </a:defRPr>
+            </a:pPr>
+            <a:r>
+              <a:t>  bit[5] += 14  --&gt;  20 + 14 = 34. Next: 5 + 1 = 6.</a:t>
+            </a:r>
+          </a:p>
+          <a:p>
+            <a:pPr>
+              <a:spcAft>
+                <a:spcPts val="200"/>
+              </a:spcAft>
+              <a:defRPr sz="1100">
                 <a:solidFill>
                   <a:srgbClr val="06B6D4"/>
                 </a:solidFill>
               </a:defRPr>
             </a:pPr>
             <a:r>
-              <a:t>  rangeSum(3, 6) = 68 - 19 = 49 vehicles.</a:t>
-            </a:r>
-          </a:p>
-          <a:p>
-            <a:pPr>
-              <a:spcAft>
-                <a:spcPts val="600"/>
-              </a:spcAft>
-              <a:defRPr sz="1200">
-                <a:solidFill>
-                  <a:srgbClr val="F8FAFC"/>
-                </a:solidFill>
-              </a:defRPr>
-            </a:pPr>
-            <a:r>
-              <a:t>Safety Validation:</a:t>
-            </a:r>
-          </a:p>
-          <a:p>
-            <a:pPr>
-              <a:spcAft>
-                <a:spcPts val="600"/>
-              </a:spcAft>
-              <a:defRPr sz="1200">
-                <a:solidFill>
-                  <a:srgbClr val="F8FAFC"/>
-                </a:solidFill>
-              </a:defRPr>
-            </a:pPr>
-            <a:r>
-              <a:t>  Verify: 1 &lt;= L &lt;= R &lt;= n; returns error code (-1) if bounds or ordering violated.</a:t>
+              <a:t>Step 2: i = 6 (0110_2): lowbit(6) = 2.</a:t>
+            </a:r>
+          </a:p>
+          <a:p>
+            <a:pPr>
+              <a:spcAft>
+                <a:spcPts val="200"/>
+              </a:spcAft>
+              <a:defRPr sz="1100">
+                <a:solidFill>
+                  <a:srgbClr val="F8FAFC"/>
+                </a:solidFill>
+              </a:defRPr>
+            </a:pPr>
+            <a:r>
+              <a:t>  bit[6] += 14  --&gt;  25 + 14 = 39. Next: 6 + 2 = 8.</a:t>
+            </a:r>
+          </a:p>
+          <a:p>
+            <a:pPr>
+              <a:spcAft>
+                <a:spcPts val="200"/>
+              </a:spcAft>
+              <a:defRPr sz="1100">
+                <a:solidFill>
+                  <a:srgbClr val="06B6D4"/>
+                </a:solidFill>
+              </a:defRPr>
+            </a:pPr>
+            <a:r>
+              <a:t>Step 3: i = 8 (1000_2): lowbit(8) = 8.</a:t>
+            </a:r>
+          </a:p>
+          <a:p>
+            <a:pPr>
+              <a:spcAft>
+                <a:spcPts val="200"/>
+              </a:spcAft>
+              <a:defRPr sz="1100">
+                <a:solidFill>
+                  <a:srgbClr val="F8FAFC"/>
+                </a:solidFill>
+              </a:defRPr>
+            </a:pPr>
+            <a:r>
+              <a:t>  bit[8] += 14  --&gt;  87 + 14 = 101. Next: 8 + 8 = 16 &gt; 8.</a:t>
+            </a:r>
+          </a:p>
+          <a:p>
+            <a:pPr>
+              <a:spcAft>
+                <a:spcPts val="200"/>
+              </a:spcAft>
+              <a:defRPr sz="1100">
+                <a:solidFill>
+                  <a:srgbClr val="F8FAFC"/>
+                </a:solidFill>
+              </a:defRPr>
+            </a:pPr>
+          </a:p>
+          <a:p>
+            <a:pPr>
+              <a:spcAft>
+                <a:spcPts val="200"/>
+              </a:spcAft>
+              <a:defRPr sz="1100">
+                <a:solidFill>
+                  <a:srgbClr val="10B981"/>
+                </a:solidFill>
+              </a:defRPr>
+            </a:pPr>
+            <a:r>
+              <a:t>Update Path: [5 -&gt; 6 -&gt; 8] (Exactly 3 nodes touched out of 8!)</a:t>
             </a:r>
           </a:p>
         </p:txBody>
@@ -8819,7 +10873,7 @@
               </a:defRPr>
             </a:pPr>
             <a:r>
-              <a:t>DSA CASE STUDY EVALUATION</a:t>
+              <a:t>CORE ALGORITHMS</a:t>
             </a:r>
           </a:p>
         </p:txBody>
@@ -8854,7 +10908,7 @@
               </a:defRPr>
             </a:pPr>
             <a:r>
-              <a:t>Worked Example: Step-by-Step Numerical Verification</a:t>
+              <a:t>Prefix Sum &amp; Corridor Range Aggregation: O(log n)</a:t>
             </a:r>
           </a:p>
         </p:txBody>
@@ -8927,14 +10981,14 @@
           <a:lstStyle/>
           <a:p>
             <a:pPr>
-              <a:defRPr sz="1400" b="1">
+              <a:defRPr sz="1300" b="1">
                 <a:solidFill>
                   <a:srgbClr val="3B82F6"/>
                 </a:solidFill>
               </a:defRPr>
             </a:pPr>
             <a:r>
-              <a:t>Phase 1: Initial State &amp; Query 1</a:t>
+              <a:t>Prefix Sum: prefixSum(idx)</a:t>
             </a:r>
           </a:p>
         </p:txBody>
@@ -8964,136 +11018,61 @@
           <a:p>
             <a:pPr>
               <a:spcAft>
-                <a:spcPts val="400"/>
-              </a:spcAft>
-              <a:defRPr sz="1100">
-                <a:solidFill>
-                  <a:srgbClr val="F8FAFC"/>
-                </a:solidFill>
-              </a:defRPr>
-            </a:pPr>
-            <a:r>
-              <a:t>Initial Counts: [12, 7, 15, 9, 20, 5, 11, 8]</a:t>
-            </a:r>
-          </a:p>
-          <a:p>
-            <a:pPr>
-              <a:spcAft>
-                <a:spcPts val="400"/>
-              </a:spcAft>
-              <a:defRPr sz="1100">
-                <a:solidFill>
-                  <a:srgbClr val="F8FAFC"/>
-                </a:solidFill>
-              </a:defRPr>
-            </a:pPr>
-            <a:r>
-              <a:t>Constructed BIT Array (1 to 8):</a:t>
-            </a:r>
-          </a:p>
-          <a:p>
-            <a:pPr>
-              <a:spcAft>
-                <a:spcPts val="400"/>
-              </a:spcAft>
-              <a:defRPr sz="1100">
-                <a:solidFill>
-                  <a:srgbClr val="F8FAFC"/>
-                </a:solidFill>
-              </a:defRPr>
-            </a:pPr>
-            <a:r>
-              <a:t>  [12, 19, 15, 43, 20, 25, 11, 87]</a:t>
-            </a:r>
-          </a:p>
-          <a:p>
-            <a:pPr>
-              <a:spcAft>
-                <a:spcPts val="400"/>
-              </a:spcAft>
-              <a:defRPr sz="1100">
-                <a:solidFill>
-                  <a:srgbClr val="10B981"/>
-                </a:solidFill>
-              </a:defRPr>
-            </a:pPr>
-            <a:r>
-              <a:t>Total Network Traffic: prefixSum(8) = 87 [VERIFIED]</a:t>
-            </a:r>
-          </a:p>
-          <a:p>
-            <a:pPr>
-              <a:spcAft>
-                <a:spcPts val="400"/>
-              </a:spcAft>
-              <a:defRPr sz="1100">
-                <a:solidFill>
-                  <a:srgbClr val="F8FAFC"/>
-                </a:solidFill>
-              </a:defRPr>
-            </a:pPr>
-            <a:r>
-              <a:t>Corridor Query [3..6] (Threshold = 55):</a:t>
-            </a:r>
-          </a:p>
-          <a:p>
-            <a:pPr>
-              <a:spcAft>
-                <a:spcPts val="400"/>
-              </a:spcAft>
-              <a:defRPr sz="1100">
-                <a:solidFill>
-                  <a:srgbClr val="F8FAFC"/>
-                </a:solidFill>
-              </a:defRPr>
-            </a:pPr>
-            <a:r>
-              <a:t>  prefixSum(6) = bit[6] + bit[4] = 25 + 43 = 68</a:t>
-            </a:r>
-          </a:p>
-          <a:p>
-            <a:pPr>
-              <a:spcAft>
-                <a:spcPts val="400"/>
-              </a:spcAft>
-              <a:defRPr sz="1100">
-                <a:solidFill>
-                  <a:srgbClr val="F8FAFC"/>
-                </a:solidFill>
-              </a:defRPr>
-            </a:pPr>
-            <a:r>
-              <a:t>  prefixSum(2) = bit[2] = 19</a:t>
-            </a:r>
-          </a:p>
-          <a:p>
-            <a:pPr>
-              <a:spcAft>
-                <a:spcPts val="400"/>
-              </a:spcAft>
-              <a:defRPr sz="1100">
-                <a:solidFill>
-                  <a:srgbClr val="F8FAFC"/>
-                </a:solidFill>
-              </a:defRPr>
-            </a:pPr>
-            <a:r>
-              <a:t>  Volume = 68 - 19 = 49 vehicles.</a:t>
-            </a:r>
-          </a:p>
-          <a:p>
-            <a:pPr>
-              <a:spcAft>
-                <a:spcPts val="400"/>
-              </a:spcAft>
-              <a:defRPr sz="1100">
-                <a:solidFill>
-                  <a:srgbClr val="10B981"/>
-                </a:solidFill>
-              </a:defRPr>
-            </a:pPr>
-            <a:r>
-              <a:t>Classification: 49 &lt;= 55 -&gt; NORMAL [VERIFIED]</a:t>
+                <a:spcPts val="800"/>
+              </a:spcAft>
+              <a:defRPr sz="1100">
+                <a:solidFill>
+                  <a:srgbClr val="F8FAFC"/>
+                </a:solidFill>
+              </a:defRPr>
+            </a:pPr>
+            <a:r>
+              <a:t>• Goal: Compute total traffic from segment 1 to idx: sum(traffic[1..idx]).</a:t>
+            </a:r>
+          </a:p>
+          <a:p>
+            <a:pPr>
+              <a:spcAft>
+                <a:spcPts val="800"/>
+              </a:spcAft>
+              <a:defRPr sz="1100">
+                <a:solidFill>
+                  <a:srgbClr val="F8FAFC"/>
+                </a:solidFill>
+              </a:defRPr>
+            </a:pPr>
+            <a:r>
+              <a:t>• Loop Mechanism: Start at i = idx; while i &gt; 0, accumulate bit[i] into sum, and step to left disjoint interval: i -= lowbit(i).</a:t>
+            </a:r>
+          </a:p>
+          <a:p>
+            <a:pPr>
+              <a:spcAft>
+                <a:spcPts val="800"/>
+              </a:spcAft>
+              <a:defRPr sz="1100">
+                <a:solidFill>
+                  <a:srgbClr val="F8FAFC"/>
+                </a:solidFill>
+              </a:defRPr>
+            </a:pPr>
+            <a:r>
+              <a:t>• Binary Decomposition: Each step strips the lowest set bit from index i, decomposing the prefix into at most log2(n) canonical sub-intervals.</a:t>
+            </a:r>
+          </a:p>
+          <a:p>
+            <a:pPr>
+              <a:spcAft>
+                <a:spcPts val="800"/>
+              </a:spcAft>
+              <a:defRPr sz="1100">
+                <a:solidFill>
+                  <a:srgbClr val="F8FAFC"/>
+                </a:solidFill>
+              </a:defRPr>
+            </a:pPr>
+            <a:r>
+              <a:t>• Time Complexity: At most log2(n) iterations -&gt; strictly O(log n).</a:t>
             </a:r>
           </a:p>
         </p:txBody>
@@ -9166,14 +11145,14 @@
           <a:lstStyle/>
           <a:p>
             <a:pPr>
-              <a:defRPr sz="1400" b="1">
+              <a:defRPr sz="1300" b="1">
                 <a:solidFill>
                   <a:srgbClr val="3B82F6"/>
                 </a:solidFill>
               </a:defRPr>
             </a:pPr>
             <a:r>
-              <a:t>Phase 2: Surge Update &amp; Query 2</a:t>
+              <a:t>Corridor Range Query &amp; Congestion Logic</a:t>
             </a:r>
           </a:p>
         </p:txBody>
@@ -9203,112 +11182,67 @@
           <a:p>
             <a:pPr>
               <a:spcAft>
-                <a:spcPts val="400"/>
-              </a:spcAft>
-              <a:defRPr sz="1100">
-                <a:solidFill>
-                  <a:srgbClr val="F8FAFC"/>
-                </a:solidFill>
-              </a:defRPr>
-            </a:pPr>
-            <a:r>
-              <a:t>Point Update: Segment 5 updated from 20 to 34</a:t>
-            </a:r>
-          </a:p>
-          <a:p>
-            <a:pPr>
-              <a:spcAft>
-                <a:spcPts val="400"/>
-              </a:spcAft>
-              <a:defRPr sz="1100">
-                <a:solidFill>
-                  <a:srgbClr val="F8FAFC"/>
-                </a:solidFill>
-              </a:defRPr>
-            </a:pPr>
-            <a:r>
-              <a:t>Delta = 34 - 20 = +14</a:t>
-            </a:r>
-          </a:p>
-          <a:p>
-            <a:pPr>
-              <a:spcAft>
-                <a:spcPts val="400"/>
-              </a:spcAft>
-              <a:defRPr sz="1100">
-                <a:solidFill>
-                  <a:srgbClr val="F8FAFC"/>
-                </a:solidFill>
-              </a:defRPr>
-            </a:pPr>
-            <a:r>
-              <a:t>Propagated Indices: bit[5], bit[6], bit[8]</a:t>
-            </a:r>
-          </a:p>
-          <a:p>
-            <a:pPr>
-              <a:spcAft>
-                <a:spcPts val="400"/>
-              </a:spcAft>
-              <a:defRPr sz="1100">
-                <a:solidFill>
-                  <a:srgbClr val="F8FAFC"/>
-                </a:solidFill>
-              </a:defRPr>
-            </a:pPr>
-            <a:r>
-              <a:t>Updated BIT Array (1 to 8):</a:t>
-            </a:r>
-          </a:p>
-          <a:p>
-            <a:pPr>
-              <a:spcAft>
-                <a:spcPts val="400"/>
-              </a:spcAft>
-              <a:defRPr sz="1100">
-                <a:solidFill>
-                  <a:srgbClr val="F8FAFC"/>
-                </a:solidFill>
-              </a:defRPr>
-            </a:pPr>
-            <a:r>
-              <a:t>  [12, 19, 15, 43, 34, 39, 11, 101]</a:t>
-            </a:r>
-          </a:p>
-          <a:p>
-            <a:pPr>
-              <a:spcAft>
-                <a:spcPts val="400"/>
-              </a:spcAft>
-              <a:defRPr sz="1100">
-                <a:solidFill>
-                  <a:srgbClr val="F8FAFC"/>
-                </a:solidFill>
-              </a:defRPr>
-            </a:pPr>
-            <a:r>
-              <a:t>Corridor Re-Query [3..6] (Threshold = 55):</a:t>
-            </a:r>
-          </a:p>
-          <a:p>
-            <a:pPr>
-              <a:spcAft>
-                <a:spcPts val="400"/>
-              </a:spcAft>
-              <a:defRPr sz="1100">
-                <a:solidFill>
-                  <a:srgbClr val="F8FAFC"/>
-                </a:solidFill>
-              </a:defRPr>
-            </a:pPr>
-            <a:r>
-              <a:t>  prefixSum(6) = bit[6] + bit[4] = 39 + 43 = 82</a:t>
-            </a:r>
-          </a:p>
-          <a:p>
-            <a:pPr>
-              <a:spcAft>
-                <a:spcPts val="400"/>
+                <a:spcPts val="300"/>
+              </a:spcAft>
+              <a:defRPr sz="1100">
+                <a:solidFill>
+                  <a:srgbClr val="F8FAFC"/>
+                </a:solidFill>
+              </a:defRPr>
+            </a:pPr>
+            <a:r>
+              <a:t>Principle of Inclusion-Exclusion:</a:t>
+            </a:r>
+          </a:p>
+          <a:p>
+            <a:pPr>
+              <a:spcAft>
+                <a:spcPts val="300"/>
+              </a:spcAft>
+              <a:defRPr sz="1100">
+                <a:solidFill>
+                  <a:srgbClr val="06B6D4"/>
+                </a:solidFill>
+              </a:defRPr>
+            </a:pPr>
+            <a:r>
+              <a:t>  rangeSum(L, R) = prefixSum(R) - prefixSum(L - 1)</a:t>
+            </a:r>
+          </a:p>
+          <a:p>
+            <a:pPr>
+              <a:spcAft>
+                <a:spcPts val="300"/>
+              </a:spcAft>
+              <a:defRPr sz="1100">
+                <a:solidFill>
+                  <a:srgbClr val="F8FAFC"/>
+                </a:solidFill>
+              </a:defRPr>
+            </a:pPr>
+            <a:r>
+              <a:t>Example Corridor [3..6]:</a:t>
+            </a:r>
+          </a:p>
+          <a:p>
+            <a:pPr>
+              <a:spcAft>
+                <a:spcPts val="300"/>
+              </a:spcAft>
+              <a:defRPr sz="1100">
+                <a:solidFill>
+                  <a:srgbClr val="F8FAFC"/>
+                </a:solidFill>
+              </a:defRPr>
+            </a:pPr>
+            <a:r>
+              <a:t>  prefixSum(6) = bit[6] + bit[4] = 25 + 43 = 68</a:t>
+            </a:r>
+          </a:p>
+          <a:p>
+            <a:pPr>
+              <a:spcAft>
+                <a:spcPts val="300"/>
               </a:spcAft>
               <a:defRPr sz="1100">
                 <a:solidFill>
@@ -9323,22 +11257,64 @@
           <a:p>
             <a:pPr>
               <a:spcAft>
-                <a:spcPts val="400"/>
-              </a:spcAft>
-              <a:defRPr sz="1100">
-                <a:solidFill>
-                  <a:srgbClr val="F8FAFC"/>
-                </a:solidFill>
-              </a:defRPr>
-            </a:pPr>
-            <a:r>
-              <a:t>  Volume = 82 - 19 = 63 vehicles.</a:t>
-            </a:r>
-          </a:p>
-          <a:p>
-            <a:pPr>
-              <a:spcAft>
-                <a:spcPts val="400"/>
+                <a:spcPts val="300"/>
+              </a:spcAft>
+              <a:defRPr sz="1100">
+                <a:solidFill>
+                  <a:srgbClr val="06B6D4"/>
+                </a:solidFill>
+              </a:defRPr>
+            </a:pPr>
+            <a:r>
+              <a:t>  rangeSum(3, 6) = 68 - 19 = 49 vehicles.</a:t>
+            </a:r>
+          </a:p>
+          <a:p>
+            <a:pPr>
+              <a:spcAft>
+                <a:spcPts val="300"/>
+              </a:spcAft>
+              <a:defRPr sz="1100">
+                <a:solidFill>
+                  <a:srgbClr val="F8FAFC"/>
+                </a:solidFill>
+              </a:defRPr>
+            </a:pPr>
+          </a:p>
+          <a:p>
+            <a:pPr>
+              <a:spcAft>
+                <a:spcPts val="300"/>
+              </a:spcAft>
+              <a:defRPr sz="1100">
+                <a:solidFill>
+                  <a:srgbClr val="F8FAFC"/>
+                </a:solidFill>
+              </a:defRPr>
+            </a:pPr>
+            <a:r>
+              <a:t>Congestion Classification Rule (Threshold = 55 veh):</a:t>
+            </a:r>
+          </a:p>
+          <a:p>
+            <a:pPr>
+              <a:spcAft>
+                <a:spcPts val="300"/>
+              </a:spcAft>
+              <a:defRPr sz="1100">
+                <a:solidFill>
+                  <a:srgbClr val="F8FAFC"/>
+                </a:solidFill>
+              </a:defRPr>
+            </a:pPr>
+            <a:r>
+              <a:t>  • Volume &lt; 55  --&gt;  NORMAL</a:t>
+            </a:r>
+          </a:p>
+          <a:p>
+            <a:pPr>
+              <a:spcAft>
+                <a:spcPts val="300"/>
               </a:spcAft>
               <a:defRPr sz="1100">
                 <a:solidFill>
@@ -9347,7 +11323,37 @@
               </a:defRPr>
             </a:pPr>
             <a:r>
-              <a:t>Classification: 63 &gt; 55 -&gt; POTENTIALLY CONGESTED [VERIFIED]</a:t>
+              <a:t>  • Volume &gt;= 55 --&gt;  POTENTIALLY CONGESTED</a:t>
+            </a:r>
+          </a:p>
+          <a:p>
+            <a:pPr>
+              <a:spcAft>
+                <a:spcPts val="300"/>
+              </a:spcAft>
+              <a:defRPr sz="1100">
+                <a:solidFill>
+                  <a:srgbClr val="F8FAFC"/>
+                </a:solidFill>
+              </a:defRPr>
+            </a:pPr>
+            <a:r>
+              <a:t>Boundary Equality (Volume = 55, Threshold = 55):</a:t>
+            </a:r>
+          </a:p>
+          <a:p>
+            <a:pPr>
+              <a:spcAft>
+                <a:spcPts val="300"/>
+              </a:spcAft>
+              <a:defRPr sz="1100">
+                <a:solidFill>
+                  <a:srgbClr val="EF4444"/>
+                </a:solidFill>
+              </a:defRPr>
+            </a:pPr>
+            <a:r>
+              <a:t>  Classified as POTENTIALLY CONGESTED (&gt;= rule enforced).</a:t>
             </a:r>
           </a:p>
         </p:txBody>
